--- a/4_Hypothesis Testing.pptx
+++ b/4_Hypothesis Testing.pptx
@@ -5,24 +5,26 @@
     <p:sldMasterId id="2147483648" r:id="rId4"/>
   </p:sldMasterIdLst>
   <p:notesMasterIdLst>
-    <p:notesMasterId r:id="rId17"/>
+    <p:notesMasterId r:id="rId19"/>
   </p:notesMasterIdLst>
   <p:handoutMasterIdLst>
-    <p:handoutMasterId r:id="rId18"/>
+    <p:handoutMasterId r:id="rId20"/>
   </p:handoutMasterIdLst>
   <p:sldIdLst>
     <p:sldId id="256" r:id="rId5"/>
     <p:sldId id="270" r:id="rId6"/>
     <p:sldId id="272" r:id="rId7"/>
     <p:sldId id="271" r:id="rId8"/>
-    <p:sldId id="273" r:id="rId9"/>
-    <p:sldId id="274" r:id="rId10"/>
-    <p:sldId id="275" r:id="rId11"/>
-    <p:sldId id="276" r:id="rId12"/>
-    <p:sldId id="277" r:id="rId13"/>
-    <p:sldId id="278" r:id="rId14"/>
-    <p:sldId id="279" r:id="rId15"/>
-    <p:sldId id="280" r:id="rId16"/>
+    <p:sldId id="281" r:id="rId9"/>
+    <p:sldId id="273" r:id="rId10"/>
+    <p:sldId id="274" r:id="rId11"/>
+    <p:sldId id="275" r:id="rId12"/>
+    <p:sldId id="276" r:id="rId13"/>
+    <p:sldId id="363" r:id="rId14"/>
+    <p:sldId id="277" r:id="rId15"/>
+    <p:sldId id="278" r:id="rId16"/>
+    <p:sldId id="279" r:id="rId17"/>
+    <p:sldId id="280" r:id="rId18"/>
   </p:sldIdLst>
   <p:sldSz cx="12188825" cy="6858000"/>
   <p:notesSz cx="6858000" cy="9144000"/>
@@ -244,7 +246,7 @@
                 <a:latin typeface="맑은 고딕" panose="020B0503020000020004" pitchFamily="50" charset="-127"/>
                 <a:ea typeface="맑은 고딕" panose="020B0503020000020004" pitchFamily="50" charset="-127"/>
               </a:rPr>
-              <a:t>2026-03-02</a:t>
+              <a:t>2026-03-16</a:t>
             </a:fld>
             <a:endParaRPr lang="ko-KR" altLang="en-US" dirty="0">
               <a:latin typeface="맑은 고딕" panose="020B0503020000020004" pitchFamily="50" charset="-127"/>
@@ -431,7 +433,7 @@
             <a:fld id="{39DBE7D5-AA2D-4B26-8C69-8B60D39FD5EE}" type="datetime1">
               <a:rPr lang="ko-KR" altLang="en-US" smtClean="0"/>
               <a:pPr/>
-              <a:t>2026-03-02</a:t>
+              <a:t>2026-03-16</a:t>
             </a:fld>
             <a:endParaRPr lang="ko-KR" altLang="en-US" dirty="0"/>
           </a:p>
@@ -797,7 +799,13 @@
   <p:cSld>
     <p:spTree>
       <p:nvGrpSpPr>
-        <p:cNvPr id="1" name=""/>
+        <p:cNvPr id="1" name="">
+          <a:extLst>
+            <a:ext uri="{FF2B5EF4-FFF2-40B4-BE49-F238E27FC236}">
+              <a16:creationId xmlns:a16="http://schemas.microsoft.com/office/drawing/2014/main" id="{B21AA8D9-600A-F975-AF39-7C4A71BDC3D6}"/>
+            </a:ext>
+          </a:extLst>
+        </p:cNvPr>
         <p:cNvGrpSpPr/>
         <p:nvPr/>
       </p:nvGrpSpPr>
@@ -811,7 +819,13 @@
       </p:grpSpPr>
       <p:sp>
         <p:nvSpPr>
-          <p:cNvPr id="2" name="슬라이드 이미지 개체 틀 1"/>
+          <p:cNvPr id="2" name="슬라이드 이미지 개체 틀 1">
+            <a:extLst>
+              <a:ext uri="{FF2B5EF4-FFF2-40B4-BE49-F238E27FC236}">
+                <a16:creationId xmlns:a16="http://schemas.microsoft.com/office/drawing/2014/main" id="{4B17B488-9014-47F4-B025-68110CD11323}"/>
+              </a:ext>
+            </a:extLst>
+          </p:cNvPr>
           <p:cNvSpPr>
             <a:spLocks noGrp="1" noRot="1" noChangeAspect="1"/>
           </p:cNvSpPr>
@@ -823,7 +837,13 @@
       </p:sp>
       <p:sp>
         <p:nvSpPr>
-          <p:cNvPr id="3" name="슬라이드 노트 개체 틀 2"/>
+          <p:cNvPr id="3" name="슬라이드 노트 개체 틀 2">
+            <a:extLst>
+              <a:ext uri="{FF2B5EF4-FFF2-40B4-BE49-F238E27FC236}">
+                <a16:creationId xmlns:a16="http://schemas.microsoft.com/office/drawing/2014/main" id="{274C337A-0E33-780B-F888-436B2DCF500D}"/>
+              </a:ext>
+            </a:extLst>
+          </p:cNvPr>
           <p:cNvSpPr>
             <a:spLocks noGrp="1"/>
           </p:cNvSpPr>
@@ -842,7 +862,13 @@
       </p:sp>
       <p:sp>
         <p:nvSpPr>
-          <p:cNvPr id="4" name="슬라이드 번호 개체 틀 3"/>
+          <p:cNvPr id="4" name="슬라이드 번호 개체 틀 3">
+            <a:extLst>
+              <a:ext uri="{FF2B5EF4-FFF2-40B4-BE49-F238E27FC236}">
+                <a16:creationId xmlns:a16="http://schemas.microsoft.com/office/drawing/2014/main" id="{28D3F98F-1801-D05E-7B68-8901BBFD8101}"/>
+              </a:ext>
+            </a:extLst>
+          </p:cNvPr>
           <p:cNvSpPr>
             <a:spLocks noGrp="1"/>
           </p:cNvSpPr>
@@ -867,7 +893,7 @@
     </p:spTree>
     <p:extLst>
       <p:ext uri="{BB962C8B-B14F-4D97-AF65-F5344CB8AC3E}">
-        <p14:creationId xmlns:p14="http://schemas.microsoft.com/office/powerpoint/2010/main" val="3077940026"/>
+        <p14:creationId xmlns:p14="http://schemas.microsoft.com/office/powerpoint/2010/main" val="1252142345"/>
       </p:ext>
     </p:extLst>
   </p:cSld>
@@ -952,7 +978,7 @@
     </p:spTree>
     <p:extLst>
       <p:ext uri="{BB962C8B-B14F-4D97-AF65-F5344CB8AC3E}">
-        <p14:creationId xmlns:p14="http://schemas.microsoft.com/office/powerpoint/2010/main" val="999459255"/>
+        <p14:creationId xmlns:p14="http://schemas.microsoft.com/office/powerpoint/2010/main" val="145654622"/>
       </p:ext>
     </p:extLst>
   </p:cSld>
@@ -1029,6 +1055,176 @@
             <a:fld id="{5FB91549-43BF-425A-AF25-75262019208C}" type="slidenum">
               <a:rPr lang="en-US" altLang="ko-KR" smtClean="0"/>
               <a:t>12</a:t>
+            </a:fld>
+            <a:endParaRPr lang="ko-KR" altLang="en-US" dirty="0"/>
+          </a:p>
+        </p:txBody>
+      </p:sp>
+    </p:spTree>
+    <p:extLst>
+      <p:ext uri="{BB962C8B-B14F-4D97-AF65-F5344CB8AC3E}">
+        <p14:creationId xmlns:p14="http://schemas.microsoft.com/office/powerpoint/2010/main" val="3077940026"/>
+      </p:ext>
+    </p:extLst>
+  </p:cSld>
+  <p:clrMapOvr>
+    <a:masterClrMapping/>
+  </p:clrMapOvr>
+</p:notes>
+</file>
+
+<file path=ppt/notesSlides/notesSlide13.xml><?xml version="1.0" encoding="utf-8"?>
+<p:notes xmlns:a="http://schemas.openxmlformats.org/drawingml/2006/main" xmlns:r="http://schemas.openxmlformats.org/officeDocument/2006/relationships" xmlns:p="http://schemas.openxmlformats.org/presentationml/2006/main">
+  <p:cSld>
+    <p:spTree>
+      <p:nvGrpSpPr>
+        <p:cNvPr id="1" name=""/>
+        <p:cNvGrpSpPr/>
+        <p:nvPr/>
+      </p:nvGrpSpPr>
+      <p:grpSpPr>
+        <a:xfrm>
+          <a:off x="0" y="0"/>
+          <a:ext cx="0" cy="0"/>
+          <a:chOff x="0" y="0"/>
+          <a:chExt cx="0" cy="0"/>
+        </a:xfrm>
+      </p:grpSpPr>
+      <p:sp>
+        <p:nvSpPr>
+          <p:cNvPr id="2" name="슬라이드 이미지 개체 틀 1"/>
+          <p:cNvSpPr>
+            <a:spLocks noGrp="1" noRot="1" noChangeAspect="1"/>
+          </p:cNvSpPr>
+          <p:nvPr>
+            <p:ph type="sldImg"/>
+          </p:nvPr>
+        </p:nvSpPr>
+        <p:spPr/>
+      </p:sp>
+      <p:sp>
+        <p:nvSpPr>
+          <p:cNvPr id="3" name="슬라이드 노트 개체 틀 2"/>
+          <p:cNvSpPr>
+            <a:spLocks noGrp="1"/>
+          </p:cNvSpPr>
+          <p:nvPr>
+            <p:ph type="body" idx="1"/>
+          </p:nvPr>
+        </p:nvSpPr>
+        <p:spPr/>
+        <p:txBody>
+          <a:bodyPr/>
+          <a:lstStyle/>
+          <a:p>
+            <a:endParaRPr lang="ko-KR" altLang="en-US" dirty="0"/>
+          </a:p>
+        </p:txBody>
+      </p:sp>
+      <p:sp>
+        <p:nvSpPr>
+          <p:cNvPr id="4" name="슬라이드 번호 개체 틀 3"/>
+          <p:cNvSpPr>
+            <a:spLocks noGrp="1"/>
+          </p:cNvSpPr>
+          <p:nvPr>
+            <p:ph type="sldNum" sz="quarter" idx="10"/>
+          </p:nvPr>
+        </p:nvSpPr>
+        <p:spPr/>
+        <p:txBody>
+          <a:bodyPr/>
+          <a:lstStyle/>
+          <a:p>
+            <a:pPr rtl="0"/>
+            <a:fld id="{5FB91549-43BF-425A-AF25-75262019208C}" type="slidenum">
+              <a:rPr lang="en-US" altLang="ko-KR" smtClean="0"/>
+              <a:t>13</a:t>
+            </a:fld>
+            <a:endParaRPr lang="ko-KR" altLang="en-US" dirty="0"/>
+          </a:p>
+        </p:txBody>
+      </p:sp>
+    </p:spTree>
+    <p:extLst>
+      <p:ext uri="{BB962C8B-B14F-4D97-AF65-F5344CB8AC3E}">
+        <p14:creationId xmlns:p14="http://schemas.microsoft.com/office/powerpoint/2010/main" val="999459255"/>
+      </p:ext>
+    </p:extLst>
+  </p:cSld>
+  <p:clrMapOvr>
+    <a:masterClrMapping/>
+  </p:clrMapOvr>
+</p:notes>
+</file>
+
+<file path=ppt/notesSlides/notesSlide14.xml><?xml version="1.0" encoding="utf-8"?>
+<p:notes xmlns:a="http://schemas.openxmlformats.org/drawingml/2006/main" xmlns:r="http://schemas.openxmlformats.org/officeDocument/2006/relationships" xmlns:p="http://schemas.openxmlformats.org/presentationml/2006/main">
+  <p:cSld>
+    <p:spTree>
+      <p:nvGrpSpPr>
+        <p:cNvPr id="1" name=""/>
+        <p:cNvGrpSpPr/>
+        <p:nvPr/>
+      </p:nvGrpSpPr>
+      <p:grpSpPr>
+        <a:xfrm>
+          <a:off x="0" y="0"/>
+          <a:ext cx="0" cy="0"/>
+          <a:chOff x="0" y="0"/>
+          <a:chExt cx="0" cy="0"/>
+        </a:xfrm>
+      </p:grpSpPr>
+      <p:sp>
+        <p:nvSpPr>
+          <p:cNvPr id="2" name="슬라이드 이미지 개체 틀 1"/>
+          <p:cNvSpPr>
+            <a:spLocks noGrp="1" noRot="1" noChangeAspect="1"/>
+          </p:cNvSpPr>
+          <p:nvPr>
+            <p:ph type="sldImg"/>
+          </p:nvPr>
+        </p:nvSpPr>
+        <p:spPr/>
+      </p:sp>
+      <p:sp>
+        <p:nvSpPr>
+          <p:cNvPr id="3" name="슬라이드 노트 개체 틀 2"/>
+          <p:cNvSpPr>
+            <a:spLocks noGrp="1"/>
+          </p:cNvSpPr>
+          <p:nvPr>
+            <p:ph type="body" idx="1"/>
+          </p:nvPr>
+        </p:nvSpPr>
+        <p:spPr/>
+        <p:txBody>
+          <a:bodyPr/>
+          <a:lstStyle/>
+          <a:p>
+            <a:endParaRPr lang="ko-KR" altLang="en-US" dirty="0"/>
+          </a:p>
+        </p:txBody>
+      </p:sp>
+      <p:sp>
+        <p:nvSpPr>
+          <p:cNvPr id="4" name="슬라이드 번호 개체 틀 3"/>
+          <p:cNvSpPr>
+            <a:spLocks noGrp="1"/>
+          </p:cNvSpPr>
+          <p:nvPr>
+            <p:ph type="sldNum" sz="quarter" idx="10"/>
+          </p:nvPr>
+        </p:nvSpPr>
+        <p:spPr/>
+        <p:txBody>
+          <a:bodyPr/>
+          <a:lstStyle/>
+          <a:p>
+            <a:pPr rtl="0"/>
+            <a:fld id="{5FB91549-43BF-425A-AF25-75262019208C}" type="slidenum">
+              <a:rPr lang="en-US" altLang="ko-KR" smtClean="0"/>
+              <a:t>14</a:t>
             </a:fld>
             <a:endParaRPr lang="ko-KR" altLang="en-US" dirty="0"/>
           </a:p>
@@ -1307,7 +1503,13 @@
   <p:cSld>
     <p:spTree>
       <p:nvGrpSpPr>
-        <p:cNvPr id="1" name=""/>
+        <p:cNvPr id="1" name="">
+          <a:extLst>
+            <a:ext uri="{FF2B5EF4-FFF2-40B4-BE49-F238E27FC236}">
+              <a16:creationId xmlns:a16="http://schemas.microsoft.com/office/drawing/2014/main" id="{51D7E5C1-8BE4-75C2-5973-DE2C88BC034C}"/>
+            </a:ext>
+          </a:extLst>
+        </p:cNvPr>
         <p:cNvGrpSpPr/>
         <p:nvPr/>
       </p:nvGrpSpPr>
@@ -1321,7 +1523,13 @@
       </p:grpSpPr>
       <p:sp>
         <p:nvSpPr>
-          <p:cNvPr id="2" name="슬라이드 이미지 개체 틀 1"/>
+          <p:cNvPr id="2" name="슬라이드 이미지 개체 틀 1">
+            <a:extLst>
+              <a:ext uri="{FF2B5EF4-FFF2-40B4-BE49-F238E27FC236}">
+                <a16:creationId xmlns:a16="http://schemas.microsoft.com/office/drawing/2014/main" id="{BA3385EE-D887-4872-22C9-0EE66769EFA0}"/>
+              </a:ext>
+            </a:extLst>
+          </p:cNvPr>
           <p:cNvSpPr>
             <a:spLocks noGrp="1" noRot="1" noChangeAspect="1"/>
           </p:cNvSpPr>
@@ -1333,7 +1541,13 @@
       </p:sp>
       <p:sp>
         <p:nvSpPr>
-          <p:cNvPr id="3" name="슬라이드 노트 개체 틀 2"/>
+          <p:cNvPr id="3" name="슬라이드 노트 개체 틀 2">
+            <a:extLst>
+              <a:ext uri="{FF2B5EF4-FFF2-40B4-BE49-F238E27FC236}">
+                <a16:creationId xmlns:a16="http://schemas.microsoft.com/office/drawing/2014/main" id="{8520B6FF-D6E8-262B-0A7C-529E9A002F13}"/>
+              </a:ext>
+            </a:extLst>
+          </p:cNvPr>
           <p:cNvSpPr>
             <a:spLocks noGrp="1"/>
           </p:cNvSpPr>
@@ -1352,7 +1566,13 @@
       </p:sp>
       <p:sp>
         <p:nvSpPr>
-          <p:cNvPr id="4" name="슬라이드 번호 개체 틀 3"/>
+          <p:cNvPr id="4" name="슬라이드 번호 개체 틀 3">
+            <a:extLst>
+              <a:ext uri="{FF2B5EF4-FFF2-40B4-BE49-F238E27FC236}">
+                <a16:creationId xmlns:a16="http://schemas.microsoft.com/office/drawing/2014/main" id="{75E2F0FB-50CC-7B15-66BC-3D0CE1482799}"/>
+              </a:ext>
+            </a:extLst>
+          </p:cNvPr>
           <p:cNvSpPr>
             <a:spLocks noGrp="1"/>
           </p:cNvSpPr>
@@ -1377,7 +1597,7 @@
     </p:spTree>
     <p:extLst>
       <p:ext uri="{BB962C8B-B14F-4D97-AF65-F5344CB8AC3E}">
-        <p14:creationId xmlns:p14="http://schemas.microsoft.com/office/powerpoint/2010/main" val="4288904593"/>
+        <p14:creationId xmlns:p14="http://schemas.microsoft.com/office/powerpoint/2010/main" val="1216411481"/>
       </p:ext>
     </p:extLst>
   </p:cSld>
@@ -1462,7 +1682,7 @@
     </p:spTree>
     <p:extLst>
       <p:ext uri="{BB962C8B-B14F-4D97-AF65-F5344CB8AC3E}">
-        <p14:creationId xmlns:p14="http://schemas.microsoft.com/office/powerpoint/2010/main" val="390987337"/>
+        <p14:creationId xmlns:p14="http://schemas.microsoft.com/office/powerpoint/2010/main" val="4288904593"/>
       </p:ext>
     </p:extLst>
   </p:cSld>
@@ -1547,7 +1767,7 @@
     </p:spTree>
     <p:extLst>
       <p:ext uri="{BB962C8B-B14F-4D97-AF65-F5344CB8AC3E}">
-        <p14:creationId xmlns:p14="http://schemas.microsoft.com/office/powerpoint/2010/main" val="3948408493"/>
+        <p14:creationId xmlns:p14="http://schemas.microsoft.com/office/powerpoint/2010/main" val="390987337"/>
       </p:ext>
     </p:extLst>
   </p:cSld>
@@ -1632,7 +1852,7 @@
     </p:spTree>
     <p:extLst>
       <p:ext uri="{BB962C8B-B14F-4D97-AF65-F5344CB8AC3E}">
-        <p14:creationId xmlns:p14="http://schemas.microsoft.com/office/powerpoint/2010/main" val="3014349002"/>
+        <p14:creationId xmlns:p14="http://schemas.microsoft.com/office/powerpoint/2010/main" val="3948408493"/>
       </p:ext>
     </p:extLst>
   </p:cSld>
@@ -1717,7 +1937,7 @@
     </p:spTree>
     <p:extLst>
       <p:ext uri="{BB962C8B-B14F-4D97-AF65-F5344CB8AC3E}">
-        <p14:creationId xmlns:p14="http://schemas.microsoft.com/office/powerpoint/2010/main" val="145654622"/>
+        <p14:creationId xmlns:p14="http://schemas.microsoft.com/office/powerpoint/2010/main" val="3014349002"/>
       </p:ext>
     </p:extLst>
   </p:cSld>
@@ -1965,7 +2185,7 @@
           <a:p>
             <a:fld id="{4B229CEB-779D-4AB3-81CB-8FCEEAE03F61}" type="datetime1">
               <a:rPr lang="ko-KR" altLang="en-US" smtClean="0"/>
-              <a:t>2026-03-02</a:t>
+              <a:t>2026-03-16</a:t>
             </a:fld>
             <a:endParaRPr lang="ko-KR" altLang="en-US" dirty="0"/>
           </a:p>
@@ -2203,7 +2423,7 @@
             <a:pPr rtl="0"/>
             <a:fld id="{C3B7A883-0BF0-4B4B-84D5-D747A0111A56}" type="datetime1">
               <a:rPr lang="ko-KR" altLang="en-US" noProof="0" smtClean="0"/>
-              <a:t>2026-03-02</a:t>
+              <a:t>2026-03-16</a:t>
             </a:fld>
             <a:endParaRPr lang="ko-KR" altLang="en-US" noProof="0" dirty="0"/>
           </a:p>
@@ -2421,7 +2641,7 @@
             <a:pPr rtl="0"/>
             <a:fld id="{3DA7EA29-F2BB-4FB1-BB4B-C55A7FA3FC5C}" type="datetime1">
               <a:rPr lang="ko-KR" altLang="en-US" noProof="0" smtClean="0"/>
-              <a:t>2026-03-02</a:t>
+              <a:t>2026-03-16</a:t>
             </a:fld>
             <a:endParaRPr lang="ko-KR" altLang="en-US" noProof="0" dirty="0"/>
           </a:p>
@@ -2630,7 +2850,7 @@
             <a:pPr rtl="0"/>
             <a:fld id="{D76306AB-75A0-421C-B431-0E4E30A5C28E}" type="datetime1">
               <a:rPr lang="ko-KR" altLang="en-US" noProof="0" smtClean="0"/>
-              <a:t>2026-03-02</a:t>
+              <a:t>2026-03-16</a:t>
             </a:fld>
             <a:endParaRPr lang="ko-KR" altLang="en-US" noProof="0" dirty="0"/>
           </a:p>
@@ -2900,7 +3120,7 @@
             <a:pPr rtl="0"/>
             <a:fld id="{E1D969EE-F1EB-462E-B70D-5B36B3806A4E}" type="datetime1">
               <a:rPr lang="ko-KR" altLang="en-US" noProof="0" smtClean="0"/>
-              <a:t>2026-03-02</a:t>
+              <a:t>2026-03-16</a:t>
             </a:fld>
             <a:endParaRPr lang="ko-KR" altLang="en-US" noProof="0" dirty="0"/>
           </a:p>
@@ -3208,7 +3428,7 @@
             <a:pPr rtl="0"/>
             <a:fld id="{E8CBB1B7-E0A1-46A3-B5B5-C69931095FF6}" type="datetime1">
               <a:rPr lang="ko-KR" altLang="en-US" noProof="0" smtClean="0"/>
-              <a:t>2026-03-02</a:t>
+              <a:t>2026-03-16</a:t>
             </a:fld>
             <a:endParaRPr lang="ko-KR" altLang="en-US" noProof="0" dirty="0"/>
           </a:p>
@@ -3659,7 +3879,7 @@
             <a:pPr rtl="0"/>
             <a:fld id="{DAFC0E65-06AB-44D7-AAEE-8F4C7ED84A0C}" type="datetime1">
               <a:rPr lang="ko-KR" altLang="en-US" noProof="0" smtClean="0"/>
-              <a:t>2026-03-02</a:t>
+              <a:t>2026-03-16</a:t>
             </a:fld>
             <a:endParaRPr lang="ko-KR" altLang="en-US" noProof="0" dirty="0"/>
           </a:p>
@@ -3796,7 +4016,7 @@
             <a:pPr rtl="0"/>
             <a:fld id="{30189E66-D439-4767-B911-EB49CB20E313}" type="datetime1">
               <a:rPr lang="ko-KR" altLang="en-US" noProof="0" smtClean="0"/>
-              <a:t>2026-03-02</a:t>
+              <a:t>2026-03-16</a:t>
             </a:fld>
             <a:endParaRPr lang="ko-KR" altLang="en-US" noProof="0" dirty="0"/>
           </a:p>
@@ -3909,7 +4129,7 @@
             <a:pPr rtl="0"/>
             <a:fld id="{D4E4FFC0-DB28-4291-80A0-63DBF8428320}" type="datetime1">
               <a:rPr lang="ko-KR" altLang="en-US" noProof="0" smtClean="0"/>
-              <a:t>2026-03-02</a:t>
+              <a:t>2026-03-16</a:t>
             </a:fld>
             <a:endParaRPr lang="ko-KR" altLang="en-US" noProof="0" dirty="0"/>
           </a:p>
@@ -4214,7 +4434,7 @@
             <a:pPr rtl="0"/>
             <a:fld id="{3AB5804B-C38E-4214-93DF-3E6DA00134E8}" type="datetime1">
               <a:rPr lang="ko-KR" altLang="en-US" noProof="0" smtClean="0"/>
-              <a:t>2026-03-02</a:t>
+              <a:t>2026-03-16</a:t>
             </a:fld>
             <a:endParaRPr lang="ko-KR" altLang="en-US" noProof="0" dirty="0"/>
           </a:p>
@@ -4508,7 +4728,7 @@
             <a:pPr rtl="0"/>
             <a:fld id="{CABEE384-F18F-4153-AC21-608599869F84}" type="datetime1">
               <a:rPr lang="ko-KR" altLang="en-US" noProof="0" smtClean="0"/>
-              <a:t>2026-03-02</a:t>
+              <a:t>2026-03-16</a:t>
             </a:fld>
             <a:endParaRPr lang="ko-KR" altLang="en-US" noProof="0" dirty="0"/>
           </a:p>
@@ -4740,7 +4960,7 @@
           <a:p>
             <a:fld id="{667A4C69-65FB-481C-AC2A-84D254D33675}" type="datetime1">
               <a:rPr lang="ko-KR" altLang="en-US" smtClean="0"/>
-              <a:t>2026-03-02</a:t>
+              <a:t>2026-03-16</a:t>
             </a:fld>
             <a:endParaRPr lang="ko-KR" altLang="en-US" dirty="0"/>
           </a:p>
@@ -5338,7 +5558,13 @@
   <p:cSld>
     <p:spTree>
       <p:nvGrpSpPr>
-        <p:cNvPr id="1" name=""/>
+        <p:cNvPr id="1" name="">
+          <a:extLst>
+            <a:ext uri="{FF2B5EF4-FFF2-40B4-BE49-F238E27FC236}">
+              <a16:creationId xmlns:a16="http://schemas.microsoft.com/office/drawing/2014/main" id="{ED0C8D64-2465-85C7-D991-C725B4D0D029}"/>
+            </a:ext>
+          </a:extLst>
+        </p:cNvPr>
         <p:cNvGrpSpPr/>
         <p:nvPr/>
       </p:nvGrpSpPr>
@@ -5352,7 +5578,13 @@
       </p:grpSpPr>
       <p:sp>
         <p:nvSpPr>
-          <p:cNvPr id="8" name="슬라이드 번호 개체 틀 7"/>
+          <p:cNvPr id="8" name="슬라이드 번호 개체 틀 7">
+            <a:extLst>
+              <a:ext uri="{FF2B5EF4-FFF2-40B4-BE49-F238E27FC236}">
+                <a16:creationId xmlns:a16="http://schemas.microsoft.com/office/drawing/2014/main" id="{C66F2910-2209-1475-49C6-6EC7DDC33E9C}"/>
+              </a:ext>
+            </a:extLst>
+          </p:cNvPr>
           <p:cNvSpPr>
             <a:spLocks noGrp="1"/>
           </p:cNvSpPr>
@@ -5374,34 +5606,484 @@
           </a:p>
         </p:txBody>
       </p:sp>
+      <p:sp>
+        <p:nvSpPr>
+          <p:cNvPr id="5" name="TextBox 4">
+            <a:extLst>
+              <a:ext uri="{FF2B5EF4-FFF2-40B4-BE49-F238E27FC236}">
+                <a16:creationId xmlns:a16="http://schemas.microsoft.com/office/drawing/2014/main" id="{65C73BBB-662E-79D0-E653-928BFAC00570}"/>
+              </a:ext>
+            </a:extLst>
+          </p:cNvPr>
+          <p:cNvSpPr txBox="1"/>
+          <p:nvPr/>
+        </p:nvSpPr>
+        <p:spPr>
+          <a:xfrm>
+            <a:off x="117748" y="260648"/>
+            <a:ext cx="2592288" cy="584775"/>
+          </a:xfrm>
+          <a:prstGeom prst="rect">
+            <a:avLst/>
+          </a:prstGeom>
+          <a:noFill/>
+        </p:spPr>
+        <p:txBody>
+          <a:bodyPr wrap="square" rtlCol="0">
+            <a:spAutoFit/>
+          </a:bodyPr>
+          <a:lstStyle/>
+          <a:p>
+            <a:r>
+              <a:rPr lang="ko-KR" altLang="en-US" sz="3200" b="1"/>
+              <a:t>문제 풀이</a:t>
+            </a:r>
+          </a:p>
+        </p:txBody>
+      </p:sp>
+      <p:sp>
+        <p:nvSpPr>
+          <p:cNvPr id="2" name="Rectangle 1">
+            <a:extLst>
+              <a:ext uri="{FF2B5EF4-FFF2-40B4-BE49-F238E27FC236}">
+                <a16:creationId xmlns:a16="http://schemas.microsoft.com/office/drawing/2014/main" id="{3282D776-FD3C-1EF1-CE8F-5B2BF3CA2718}"/>
+              </a:ext>
+            </a:extLst>
+          </p:cNvPr>
+          <p:cNvSpPr>
+            <a:spLocks noChangeArrowheads="1"/>
+          </p:cNvSpPr>
+          <p:nvPr/>
+        </p:nvSpPr>
+        <p:spPr bwMode="auto">
+          <a:xfrm>
+            <a:off x="100568" y="836712"/>
+            <a:ext cx="11610468" cy="2129494"/>
+          </a:xfrm>
+          <a:prstGeom prst="rect">
+            <a:avLst/>
+          </a:prstGeom>
+          <a:solidFill>
+            <a:schemeClr val="bg1">
+              <a:lumMod val="85000"/>
+            </a:schemeClr>
+          </a:solidFill>
+          <a:ln>
+            <a:noFill/>
+          </a:ln>
+          <a:effectLst/>
+        </p:spPr>
+        <p:txBody>
+          <a:bodyPr vert="horz" wrap="square" lIns="91440" tIns="0" rIns="91440" bIns="45720" numCol="1" anchor="ctr" anchorCtr="0" compatLnSpc="1">
+            <a:prstTxWarp prst="textNoShape">
+              <a:avLst/>
+            </a:prstTxWarp>
+            <a:spAutoFit/>
+          </a:bodyPr>
+          <a:lstStyle/>
+          <a:p>
+            <a:pPr marL="285750" indent="-285750" eaLnBrk="0" fontAlgn="base" hangingPunct="0">
+              <a:lnSpc>
+                <a:spcPct val="150000"/>
+              </a:lnSpc>
+              <a:spcBef>
+                <a:spcPct val="0"/>
+              </a:spcBef>
+              <a:spcAft>
+                <a:spcPct val="0"/>
+              </a:spcAft>
+              <a:buFont typeface="Wingdings" panose="05000000000000000000" pitchFamily="2" charset="2"/>
+              <a:buChar char="v"/>
+            </a:pPr>
+            <a:r>
+              <a:rPr lang="en-US" altLang="ko-KR" sz="1600" dirty="0">
+                <a:latin typeface="휴먼모음T" panose="02030504000101010101" pitchFamily="18" charset="-127"/>
+                <a:ea typeface="휴먼모음T" panose="02030504000101010101" pitchFamily="18" charset="-127"/>
+              </a:rPr>
+              <a:t>Seaborn</a:t>
+            </a:r>
+            <a:r>
+              <a:rPr lang="ko-KR" altLang="en-US" sz="1600" dirty="0">
+                <a:latin typeface="휴먼모음T" panose="02030504000101010101" pitchFamily="18" charset="-127"/>
+                <a:ea typeface="휴먼모음T" panose="02030504000101010101" pitchFamily="18" charset="-127"/>
+              </a:rPr>
+              <a:t>　레스토랑</a:t>
+            </a:r>
+            <a:r>
+              <a:rPr lang="ko-KR" altLang="ko-KR" sz="1600" dirty="0">
+                <a:latin typeface="휴먼모음T" panose="02030504000101010101" pitchFamily="18" charset="-127"/>
+                <a:ea typeface="휴먼모음T" panose="02030504000101010101" pitchFamily="18" charset="-127"/>
+              </a:rPr>
+              <a:t>의 데이터에서 목요일(</a:t>
+            </a:r>
+            <a:r>
+              <a:rPr lang="ko-KR" altLang="ko-KR" sz="1600" dirty="0" err="1">
+                <a:latin typeface="휴먼모음T" panose="02030504000101010101" pitchFamily="18" charset="-127"/>
+                <a:ea typeface="휴먼모음T" panose="02030504000101010101" pitchFamily="18" charset="-127"/>
+              </a:rPr>
+              <a:t>Thursday</a:t>
+            </a:r>
+            <a:r>
+              <a:rPr lang="ko-KR" altLang="ko-KR" sz="1600" dirty="0">
+                <a:latin typeface="휴먼모음T" panose="02030504000101010101" pitchFamily="18" charset="-127"/>
+                <a:ea typeface="휴먼모음T" panose="02030504000101010101" pitchFamily="18" charset="-127"/>
+              </a:rPr>
+              <a:t>)과 금요일(</a:t>
+            </a:r>
+            <a:r>
+              <a:rPr lang="ko-KR" altLang="ko-KR" sz="1600" dirty="0" err="1">
+                <a:latin typeface="휴먼모음T" panose="02030504000101010101" pitchFamily="18" charset="-127"/>
+                <a:ea typeface="휴먼모음T" panose="02030504000101010101" pitchFamily="18" charset="-127"/>
+              </a:rPr>
+              <a:t>Friday</a:t>
+            </a:r>
+            <a:r>
+              <a:rPr lang="ko-KR" altLang="ko-KR" sz="1600" dirty="0">
+                <a:latin typeface="휴먼모음T" panose="02030504000101010101" pitchFamily="18" charset="-127"/>
+                <a:ea typeface="휴먼모음T" panose="02030504000101010101" pitchFamily="18" charset="-127"/>
+              </a:rPr>
+              <a:t>)의 평균 팁(</a:t>
+            </a:r>
+            <a:r>
+              <a:rPr lang="ko-KR" altLang="ko-KR" sz="1600" dirty="0" err="1">
+                <a:latin typeface="휴먼모음T" panose="02030504000101010101" pitchFamily="18" charset="-127"/>
+                <a:ea typeface="휴먼모음T" panose="02030504000101010101" pitchFamily="18" charset="-127"/>
+              </a:rPr>
+              <a:t>tip</a:t>
+            </a:r>
+            <a:r>
+              <a:rPr lang="ko-KR" altLang="ko-KR" sz="1600" dirty="0">
+                <a:latin typeface="휴먼모음T" panose="02030504000101010101" pitchFamily="18" charset="-127"/>
+                <a:ea typeface="휴먼모음T" panose="02030504000101010101" pitchFamily="18" charset="-127"/>
+              </a:rPr>
+              <a:t>) 금액이 통계적으로 유의미하게 </a:t>
+            </a:r>
+            <a:r>
+              <a:rPr lang="ko-KR" altLang="ko-KR" sz="1600" dirty="0" err="1">
+                <a:latin typeface="휴먼모음T" panose="02030504000101010101" pitchFamily="18" charset="-127"/>
+                <a:ea typeface="휴먼모음T" panose="02030504000101010101" pitchFamily="18" charset="-127"/>
+              </a:rPr>
+              <a:t>다른가?를</a:t>
+            </a:r>
+            <a:r>
+              <a:rPr lang="ko-KR" altLang="ko-KR" sz="1600" dirty="0">
+                <a:latin typeface="휴먼모음T" panose="02030504000101010101" pitchFamily="18" charset="-127"/>
+                <a:ea typeface="휴먼모음T" panose="02030504000101010101" pitchFamily="18" charset="-127"/>
+              </a:rPr>
+              <a:t> 확인하려고 합니다.</a:t>
+            </a:r>
+          </a:p>
+          <a:p>
+            <a:pPr marL="742950" lvl="1" indent="-285750" eaLnBrk="0" fontAlgn="base" hangingPunct="0">
+              <a:lnSpc>
+                <a:spcPct val="150000"/>
+              </a:lnSpc>
+              <a:spcBef>
+                <a:spcPct val="0"/>
+              </a:spcBef>
+              <a:spcAft>
+                <a:spcPct val="0"/>
+              </a:spcAft>
+              <a:buFont typeface="Wingdings" panose="05000000000000000000" pitchFamily="2" charset="2"/>
+              <a:buChar char="v"/>
+            </a:pPr>
+            <a:r>
+              <a:rPr lang="ko-KR" altLang="ko-KR" sz="1400" dirty="0">
+                <a:latin typeface="휴먼모음T" panose="02030504000101010101" pitchFamily="18" charset="-127"/>
+                <a:ea typeface="휴먼모음T" panose="02030504000101010101" pitchFamily="18" charset="-127"/>
+              </a:rPr>
+              <a:t>귀무가설($H_0$): 목요일과 금요일의 평균 팁 금액은 차이가 없다.</a:t>
+            </a:r>
+          </a:p>
+          <a:p>
+            <a:pPr marL="742950" lvl="1" indent="-285750" eaLnBrk="0" fontAlgn="base" hangingPunct="0">
+              <a:lnSpc>
+                <a:spcPct val="150000"/>
+              </a:lnSpc>
+              <a:spcBef>
+                <a:spcPct val="0"/>
+              </a:spcBef>
+              <a:spcAft>
+                <a:spcPct val="0"/>
+              </a:spcAft>
+              <a:buFont typeface="Wingdings" panose="05000000000000000000" pitchFamily="2" charset="2"/>
+              <a:buChar char="v"/>
+            </a:pPr>
+            <a:r>
+              <a:rPr lang="ko-KR" altLang="ko-KR" sz="1400" dirty="0">
+                <a:latin typeface="휴먼모음T" panose="02030504000101010101" pitchFamily="18" charset="-127"/>
+                <a:ea typeface="휴먼모음T" panose="02030504000101010101" pitchFamily="18" charset="-127"/>
+              </a:rPr>
+              <a:t>대립가설($H_1$): 목요일과 금요일의 평균 팁 금액은 차이가 있다.</a:t>
+            </a:r>
+          </a:p>
+          <a:p>
+            <a:pPr marL="742950" lvl="1" indent="-285750" eaLnBrk="0" fontAlgn="base" hangingPunct="0">
+              <a:lnSpc>
+                <a:spcPct val="150000"/>
+              </a:lnSpc>
+              <a:spcBef>
+                <a:spcPct val="0"/>
+              </a:spcBef>
+              <a:spcAft>
+                <a:spcPct val="0"/>
+              </a:spcAft>
+              <a:buFont typeface="Wingdings" panose="05000000000000000000" pitchFamily="2" charset="2"/>
+              <a:buChar char="v"/>
+            </a:pPr>
+            <a:r>
+              <a:rPr lang="ko-KR" altLang="ko-KR" sz="1400" dirty="0">
+                <a:latin typeface="휴먼모음T" panose="02030504000101010101" pitchFamily="18" charset="-127"/>
+                <a:ea typeface="휴먼모음T" panose="02030504000101010101" pitchFamily="18" charset="-127"/>
+              </a:rPr>
+              <a:t>유의수준(</a:t>
+            </a:r>
+            <a:r>
+              <a:rPr lang="ko-KR" altLang="ko-KR" sz="1400" dirty="0" err="1">
+                <a:latin typeface="휴먼모음T" panose="02030504000101010101" pitchFamily="18" charset="-127"/>
+                <a:ea typeface="휴먼모음T" panose="02030504000101010101" pitchFamily="18" charset="-127"/>
+              </a:rPr>
+              <a:t>alpha</a:t>
+            </a:r>
+            <a:r>
+              <a:rPr lang="ko-KR" altLang="ko-KR" sz="1400" dirty="0">
+                <a:latin typeface="휴먼모음T" panose="02030504000101010101" pitchFamily="18" charset="-127"/>
+                <a:ea typeface="휴먼모음T" panose="02030504000101010101" pitchFamily="18" charset="-127"/>
+              </a:rPr>
+              <a:t>): 0.05 (5%)</a:t>
+            </a:r>
+            <a:endParaRPr lang="en-US" altLang="ko-KR" sz="1400" dirty="0">
+              <a:latin typeface="휴먼모음T" panose="02030504000101010101" pitchFamily="18" charset="-127"/>
+              <a:ea typeface="휴먼모음T" panose="02030504000101010101" pitchFamily="18" charset="-127"/>
+            </a:endParaRPr>
+          </a:p>
+          <a:p>
+            <a:pPr marL="285750" indent="-285750" eaLnBrk="0" fontAlgn="base" hangingPunct="0">
+              <a:lnSpc>
+                <a:spcPct val="150000"/>
+              </a:lnSpc>
+              <a:spcBef>
+                <a:spcPct val="0"/>
+              </a:spcBef>
+              <a:spcAft>
+                <a:spcPct val="0"/>
+              </a:spcAft>
+              <a:buFont typeface="Wingdings" panose="05000000000000000000" pitchFamily="2" charset="2"/>
+              <a:buChar char="v"/>
+            </a:pPr>
+            <a:r>
+              <a:rPr lang="ko-KR" altLang="en-US" sz="1600" dirty="0">
+                <a:latin typeface="휴먼모음T" panose="02030504000101010101" pitchFamily="18" charset="-127"/>
+                <a:ea typeface="휴먼모음T" panose="02030504000101010101" pitchFamily="18" charset="-127"/>
+              </a:rPr>
+              <a:t>어느　요일끼리　차이가　있는지？</a:t>
+            </a:r>
+            <a:endParaRPr lang="ko-KR" altLang="ko-KR" sz="1600" dirty="0">
+              <a:latin typeface="휴먼모음T" panose="02030504000101010101" pitchFamily="18" charset="-127"/>
+              <a:ea typeface="휴먼모음T" panose="02030504000101010101" pitchFamily="18" charset="-127"/>
+            </a:endParaRPr>
+          </a:p>
+        </p:txBody>
+      </p:sp>
       <p:pic>
         <p:nvPicPr>
-          <p:cNvPr id="2" name="그림 1"/>
+          <p:cNvPr id="1027" name="Picture 3">
+            <a:extLst>
+              <a:ext uri="{FF2B5EF4-FFF2-40B4-BE49-F238E27FC236}">
+                <a16:creationId xmlns:a16="http://schemas.microsoft.com/office/drawing/2014/main" id="{7B0E0AB1-523F-04CD-EFF6-4A656EBCC043}"/>
+              </a:ext>
+            </a:extLst>
+          </p:cNvPr>
           <p:cNvPicPr>
-            <a:picLocks noChangeAspect="1"/>
+            <a:picLocks noChangeAspect="1" noChangeArrowheads="1"/>
           </p:cNvPicPr>
           <p:nvPr/>
         </p:nvPicPr>
         <p:blipFill>
-          <a:blip r:embed="rId3"/>
+          <a:blip r:embed="rId3">
+            <a:extLst>
+              <a:ext uri="{28A0092B-C50C-407E-A947-70E740481C1C}">
+                <a14:useLocalDpi xmlns:a14="http://schemas.microsoft.com/office/drawing/2010/main" val="0"/>
+              </a:ext>
+            </a:extLst>
+          </a:blip>
+          <a:srcRect/>
           <a:stretch>
             <a:fillRect/>
           </a:stretch>
         </p:blipFill>
-        <p:spPr>
+        <p:spPr bwMode="auto">
           <a:xfrm>
-            <a:off x="1701924" y="412055"/>
-            <a:ext cx="8685765" cy="6099594"/>
+            <a:off x="189756" y="3307187"/>
+            <a:ext cx="5584105" cy="3585583"/>
           </a:xfrm>
           <a:prstGeom prst="rect">
             <a:avLst/>
           </a:prstGeom>
+          <a:noFill/>
+          <a:extLst>
+            <a:ext uri="{909E8E84-426E-40DD-AFC4-6F175D3DCCD1}">
+              <a14:hiddenFill xmlns:a14="http://schemas.microsoft.com/office/drawing/2010/main">
+                <a:solidFill>
+                  <a:srgbClr val="FFFFFF"/>
+                </a:solidFill>
+              </a14:hiddenFill>
+            </a:ext>
+          </a:extLst>
         </p:spPr>
       </p:pic>
+      <p:sp>
+        <p:nvSpPr>
+          <p:cNvPr id="4" name="TextBox 3">
+            <a:extLst>
+              <a:ext uri="{FF2B5EF4-FFF2-40B4-BE49-F238E27FC236}">
+                <a16:creationId xmlns:a16="http://schemas.microsoft.com/office/drawing/2014/main" id="{5BCDAE03-EB36-5EC9-3118-6FA9E0344A77}"/>
+              </a:ext>
+            </a:extLst>
+          </p:cNvPr>
+          <p:cNvSpPr txBox="1"/>
+          <p:nvPr/>
+        </p:nvSpPr>
+        <p:spPr>
+          <a:xfrm>
+            <a:off x="6359061" y="4399668"/>
+            <a:ext cx="4752528" cy="523220"/>
+          </a:xfrm>
+          <a:prstGeom prst="rect">
+            <a:avLst/>
+          </a:prstGeom>
+          <a:noFill/>
+        </p:spPr>
+        <p:txBody>
+          <a:bodyPr wrap="square">
+            <a:spAutoFit/>
+          </a:bodyPr>
+          <a:lstStyle/>
+          <a:p>
+            <a:r>
+              <a:rPr lang="en-US" altLang="ko-KR" sz="1400" b="0" i="0" dirty="0">
+                <a:effectLst/>
+                <a:latin typeface="휴먼모음T" panose="02030504000101010101" pitchFamily="18" charset="-127"/>
+                <a:ea typeface="휴먼모음T" panose="02030504000101010101" pitchFamily="18" charset="-127"/>
+              </a:rPr>
+              <a:t>p-value: 0.0240 </a:t>
+            </a:r>
+            <a:r>
+              <a:rPr lang="ko-KR" altLang="en-US" sz="1400" b="0" i="0" dirty="0">
+                <a:effectLst/>
+                <a:latin typeface="휴먼모음T" panose="02030504000101010101" pitchFamily="18" charset="-127"/>
+                <a:ea typeface="휴먼모음T" panose="02030504000101010101" pitchFamily="18" charset="-127"/>
+              </a:rPr>
+              <a:t>결과</a:t>
+            </a:r>
+            <a:r>
+              <a:rPr lang="en-US" altLang="ko-KR" sz="1400" b="0" i="0" dirty="0">
+                <a:effectLst/>
+                <a:latin typeface="휴먼모음T" panose="02030504000101010101" pitchFamily="18" charset="-127"/>
+                <a:ea typeface="휴먼모음T" panose="02030504000101010101" pitchFamily="18" charset="-127"/>
+              </a:rPr>
+              <a:t>: p-value</a:t>
+            </a:r>
+            <a:r>
+              <a:rPr lang="ko-KR" altLang="en-US" sz="1400" b="0" i="0" dirty="0">
+                <a:effectLst/>
+                <a:latin typeface="휴먼모음T" panose="02030504000101010101" pitchFamily="18" charset="-127"/>
+                <a:ea typeface="휴먼모음T" panose="02030504000101010101" pitchFamily="18" charset="-127"/>
+              </a:rPr>
+              <a:t>가 </a:t>
+            </a:r>
+            <a:r>
+              <a:rPr lang="en-US" altLang="ko-KR" sz="1400" b="0" i="0" dirty="0">
+                <a:effectLst/>
+                <a:latin typeface="휴먼모음T" panose="02030504000101010101" pitchFamily="18" charset="-127"/>
+                <a:ea typeface="휴먼모음T" panose="02030504000101010101" pitchFamily="18" charset="-127"/>
+              </a:rPr>
+              <a:t>0.05</a:t>
+            </a:r>
+            <a:r>
+              <a:rPr lang="ko-KR" altLang="en-US" sz="1400" b="0" i="0" dirty="0">
+                <a:effectLst/>
+                <a:latin typeface="휴먼모음T" panose="02030504000101010101" pitchFamily="18" charset="-127"/>
+                <a:ea typeface="휴먼모음T" panose="02030504000101010101" pitchFamily="18" charset="-127"/>
+              </a:rPr>
+              <a:t>보다 작으므로 귀무가설을 기각합니다</a:t>
+            </a:r>
+            <a:r>
+              <a:rPr lang="en-US" altLang="ko-KR" sz="1400" b="0" i="0" dirty="0">
+                <a:effectLst/>
+                <a:latin typeface="휴먼모음T" panose="02030504000101010101" pitchFamily="18" charset="-127"/>
+                <a:ea typeface="휴먼모음T" panose="02030504000101010101" pitchFamily="18" charset="-127"/>
+              </a:rPr>
+              <a:t>. (</a:t>
+            </a:r>
+            <a:r>
+              <a:rPr lang="ko-KR" altLang="en-US" sz="1400" b="0" i="0" dirty="0">
+                <a:effectLst/>
+                <a:latin typeface="휴먼모음T" panose="02030504000101010101" pitchFamily="18" charset="-127"/>
+                <a:ea typeface="휴먼모음T" panose="02030504000101010101" pitchFamily="18" charset="-127"/>
+              </a:rPr>
+              <a:t>통계적으로 유의미한 차이 있음</a:t>
+            </a:r>
+            <a:r>
+              <a:rPr lang="en-US" altLang="ko-KR" sz="1400" b="0" i="0" dirty="0">
+                <a:effectLst/>
+                <a:latin typeface="휴먼모음T" panose="02030504000101010101" pitchFamily="18" charset="-127"/>
+                <a:ea typeface="휴먼모음T" panose="02030504000101010101" pitchFamily="18" charset="-127"/>
+              </a:rPr>
+              <a:t>)</a:t>
+            </a:r>
+            <a:endParaRPr lang="ko-KR" altLang="en-US" sz="1400" dirty="0">
+              <a:latin typeface="휴먼모음T" panose="02030504000101010101" pitchFamily="18" charset="-127"/>
+              <a:ea typeface="휴먼모음T" panose="02030504000101010101" pitchFamily="18" charset="-127"/>
+            </a:endParaRPr>
+          </a:p>
+        </p:txBody>
+      </p:sp>
+      <p:cxnSp>
+        <p:nvCxnSpPr>
+          <p:cNvPr id="10" name="연결선: 꺾임 9">
+            <a:extLst>
+              <a:ext uri="{FF2B5EF4-FFF2-40B4-BE49-F238E27FC236}">
+                <a16:creationId xmlns:a16="http://schemas.microsoft.com/office/drawing/2014/main" id="{DB661435-009F-7875-6DC9-30E05C372326}"/>
+              </a:ext>
+            </a:extLst>
+          </p:cNvPr>
+          <p:cNvCxnSpPr/>
+          <p:nvPr/>
+        </p:nvCxnSpPr>
+        <p:spPr>
+          <a:xfrm>
+            <a:off x="4366220" y="3429000"/>
+            <a:ext cx="1944216" cy="1232278"/>
+          </a:xfrm>
+          <a:prstGeom prst="bentConnector3">
+            <a:avLst>
+              <a:gd name="adj1" fmla="val 20885"/>
+            </a:avLst>
+          </a:prstGeom>
+          <a:ln>
+            <a:tailEnd type="triangle"/>
+          </a:ln>
+        </p:spPr>
+        <p:style>
+          <a:lnRef idx="1">
+            <a:schemeClr val="accent1"/>
+          </a:lnRef>
+          <a:fillRef idx="0">
+            <a:schemeClr val="accent1"/>
+          </a:fillRef>
+          <a:effectRef idx="0">
+            <a:schemeClr val="accent1"/>
+          </a:effectRef>
+          <a:fontRef idx="minor">
+            <a:schemeClr val="tx1"/>
+          </a:fontRef>
+        </p:style>
+      </p:cxnSp>
     </p:spTree>
     <p:extLst>
       <p:ext uri="{BB962C8B-B14F-4D97-AF65-F5344CB8AC3E}">
-        <p14:creationId xmlns:p14="http://schemas.microsoft.com/office/powerpoint/2010/main" val="3367876437"/>
+        <p14:creationId xmlns:p14="http://schemas.microsoft.com/office/powerpoint/2010/main" val="1893394278"/>
       </p:ext>
     </p:extLst>
   </p:cSld>
@@ -5459,6 +6141,186 @@
             <a:fld id="{A3F31473-23EB-4724-8B59-FE6D21D89FA4}" type="slidenum">
               <a:rPr lang="en-US" altLang="ko-KR" noProof="0" smtClean="0"/>
               <a:t>11</a:t>
+            </a:fld>
+            <a:endParaRPr lang="en-US" altLang="ko-KR" noProof="0" dirty="0"/>
+          </a:p>
+        </p:txBody>
+      </p:sp>
+      <p:pic>
+        <p:nvPicPr>
+          <p:cNvPr id="3" name="그림 2"/>
+          <p:cNvPicPr>
+            <a:picLocks noChangeAspect="1"/>
+          </p:cNvPicPr>
+          <p:nvPr/>
+        </p:nvPicPr>
+        <p:blipFill>
+          <a:blip r:embed="rId3"/>
+          <a:stretch>
+            <a:fillRect/>
+          </a:stretch>
+        </p:blipFill>
+        <p:spPr>
+          <a:xfrm>
+            <a:off x="2410569" y="1026141"/>
+            <a:ext cx="6961393" cy="4805718"/>
+          </a:xfrm>
+          <a:prstGeom prst="rect">
+            <a:avLst/>
+          </a:prstGeom>
+        </p:spPr>
+      </p:pic>
+    </p:spTree>
+    <p:extLst>
+      <p:ext uri="{BB962C8B-B14F-4D97-AF65-F5344CB8AC3E}">
+        <p14:creationId xmlns:p14="http://schemas.microsoft.com/office/powerpoint/2010/main" val="2675074773"/>
+      </p:ext>
+    </p:extLst>
+  </p:cSld>
+  <p:clrMapOvr>
+    <a:masterClrMapping/>
+  </p:clrMapOvr>
+  <mc:AlternateContent xmlns:mc="http://schemas.openxmlformats.org/markup-compatibility/2006" xmlns:p14="http://schemas.microsoft.com/office/powerpoint/2010/main">
+    <mc:Choice Requires="p14">
+      <p:transition spd="med" p14:dur="700">
+        <p:fade/>
+      </p:transition>
+    </mc:Choice>
+    <mc:Fallback xmlns="">
+      <p:transition spd="med">
+        <p:fade/>
+      </p:transition>
+    </mc:Fallback>
+  </mc:AlternateContent>
+</p:sld>
+</file>
+
+<file path=ppt/slides/slide12.xml><?xml version="1.0" encoding="utf-8"?>
+<p:sld xmlns:a="http://schemas.openxmlformats.org/drawingml/2006/main" xmlns:r="http://schemas.openxmlformats.org/officeDocument/2006/relationships" xmlns:p="http://schemas.openxmlformats.org/presentationml/2006/main">
+  <p:cSld>
+    <p:spTree>
+      <p:nvGrpSpPr>
+        <p:cNvPr id="1" name=""/>
+        <p:cNvGrpSpPr/>
+        <p:nvPr/>
+      </p:nvGrpSpPr>
+      <p:grpSpPr>
+        <a:xfrm>
+          <a:off x="0" y="0"/>
+          <a:ext cx="0" cy="0"/>
+          <a:chOff x="0" y="0"/>
+          <a:chExt cx="0" cy="0"/>
+        </a:xfrm>
+      </p:grpSpPr>
+      <p:sp>
+        <p:nvSpPr>
+          <p:cNvPr id="8" name="슬라이드 번호 개체 틀 7"/>
+          <p:cNvSpPr>
+            <a:spLocks noGrp="1"/>
+          </p:cNvSpPr>
+          <p:nvPr>
+            <p:ph type="sldNum" sz="quarter" idx="12"/>
+          </p:nvPr>
+        </p:nvSpPr>
+        <p:spPr/>
+        <p:txBody>
+          <a:bodyPr/>
+          <a:lstStyle/>
+          <a:p>
+            <a:pPr rtl="0"/>
+            <a:fld id="{A3F31473-23EB-4724-8B59-FE6D21D89FA4}" type="slidenum">
+              <a:rPr lang="en-US" altLang="ko-KR" noProof="0" smtClean="0"/>
+              <a:t>12</a:t>
+            </a:fld>
+            <a:endParaRPr lang="en-US" altLang="ko-KR" noProof="0" dirty="0"/>
+          </a:p>
+        </p:txBody>
+      </p:sp>
+      <p:pic>
+        <p:nvPicPr>
+          <p:cNvPr id="2" name="그림 1"/>
+          <p:cNvPicPr>
+            <a:picLocks noChangeAspect="1"/>
+          </p:cNvPicPr>
+          <p:nvPr/>
+        </p:nvPicPr>
+        <p:blipFill>
+          <a:blip r:embed="rId3"/>
+          <a:stretch>
+            <a:fillRect/>
+          </a:stretch>
+        </p:blipFill>
+        <p:spPr>
+          <a:xfrm>
+            <a:off x="1989956" y="622490"/>
+            <a:ext cx="7992888" cy="5613020"/>
+          </a:xfrm>
+          <a:prstGeom prst="rect">
+            <a:avLst/>
+          </a:prstGeom>
+        </p:spPr>
+      </p:pic>
+    </p:spTree>
+    <p:extLst>
+      <p:ext uri="{BB962C8B-B14F-4D97-AF65-F5344CB8AC3E}">
+        <p14:creationId xmlns:p14="http://schemas.microsoft.com/office/powerpoint/2010/main" val="3367876437"/>
+      </p:ext>
+    </p:extLst>
+  </p:cSld>
+  <p:clrMapOvr>
+    <a:masterClrMapping/>
+  </p:clrMapOvr>
+  <mc:AlternateContent xmlns:mc="http://schemas.openxmlformats.org/markup-compatibility/2006" xmlns:p14="http://schemas.microsoft.com/office/powerpoint/2010/main">
+    <mc:Choice Requires="p14">
+      <p:transition spd="med" p14:dur="700">
+        <p:fade/>
+      </p:transition>
+    </mc:Choice>
+    <mc:Fallback xmlns="">
+      <p:transition spd="med">
+        <p:fade/>
+      </p:transition>
+    </mc:Fallback>
+  </mc:AlternateContent>
+</p:sld>
+</file>
+
+<file path=ppt/slides/slide13.xml><?xml version="1.0" encoding="utf-8"?>
+<p:sld xmlns:a="http://schemas.openxmlformats.org/drawingml/2006/main" xmlns:r="http://schemas.openxmlformats.org/officeDocument/2006/relationships" xmlns:p="http://schemas.openxmlformats.org/presentationml/2006/main">
+  <p:cSld>
+    <p:spTree>
+      <p:nvGrpSpPr>
+        <p:cNvPr id="1" name=""/>
+        <p:cNvGrpSpPr/>
+        <p:nvPr/>
+      </p:nvGrpSpPr>
+      <p:grpSpPr>
+        <a:xfrm>
+          <a:off x="0" y="0"/>
+          <a:ext cx="0" cy="0"/>
+          <a:chOff x="0" y="0"/>
+          <a:chExt cx="0" cy="0"/>
+        </a:xfrm>
+      </p:grpSpPr>
+      <p:sp>
+        <p:nvSpPr>
+          <p:cNvPr id="8" name="슬라이드 번호 개체 틀 7"/>
+          <p:cNvSpPr>
+            <a:spLocks noGrp="1"/>
+          </p:cNvSpPr>
+          <p:nvPr>
+            <p:ph type="sldNum" sz="quarter" idx="12"/>
+          </p:nvPr>
+        </p:nvSpPr>
+        <p:spPr/>
+        <p:txBody>
+          <a:bodyPr/>
+          <a:lstStyle/>
+          <a:p>
+            <a:pPr rtl="0"/>
+            <a:fld id="{A3F31473-23EB-4724-8B59-FE6D21D89FA4}" type="slidenum">
+              <a:rPr lang="en-US" altLang="ko-KR" noProof="0" smtClean="0"/>
+              <a:t>13</a:t>
             </a:fld>
             <a:endParaRPr lang="en-US" altLang="ko-KR" noProof="0" dirty="0"/>
           </a:p>
@@ -5513,7 +6375,7 @@
 </p:sld>
 </file>
 
-<file path=ppt/slides/slide12.xml><?xml version="1.0" encoding="utf-8"?>
+<file path=ppt/slides/slide14.xml><?xml version="1.0" encoding="utf-8"?>
 <p:sld xmlns:a="http://schemas.openxmlformats.org/drawingml/2006/main" xmlns:r="http://schemas.openxmlformats.org/officeDocument/2006/relationships" xmlns:p="http://schemas.openxmlformats.org/presentationml/2006/main">
   <p:cSld>
     <p:spTree>
@@ -5548,7 +6410,7 @@
             <a:pPr rtl="0"/>
             <a:fld id="{A3F31473-23EB-4724-8B59-FE6D21D89FA4}" type="slidenum">
               <a:rPr lang="en-US" altLang="ko-KR" noProof="0" smtClean="0"/>
-              <a:t>12</a:t>
+              <a:t>14</a:t>
             </a:fld>
             <a:endParaRPr lang="en-US" altLang="ko-KR" noProof="0" dirty="0"/>
           </a:p>
@@ -6012,6 +6874,114 @@
   <p:cSld>
     <p:spTree>
       <p:nvGrpSpPr>
+        <p:cNvPr id="1" name="">
+          <a:extLst>
+            <a:ext uri="{FF2B5EF4-FFF2-40B4-BE49-F238E27FC236}">
+              <a16:creationId xmlns:a16="http://schemas.microsoft.com/office/drawing/2014/main" id="{5007A63E-4CF5-6FDF-8908-4CACFBE0ED30}"/>
+            </a:ext>
+          </a:extLst>
+        </p:cNvPr>
+        <p:cNvGrpSpPr/>
+        <p:nvPr/>
+      </p:nvGrpSpPr>
+      <p:grpSpPr>
+        <a:xfrm>
+          <a:off x="0" y="0"/>
+          <a:ext cx="0" cy="0"/>
+          <a:chOff x="0" y="0"/>
+          <a:chExt cx="0" cy="0"/>
+        </a:xfrm>
+      </p:grpSpPr>
+      <p:sp>
+        <p:nvSpPr>
+          <p:cNvPr id="8" name="슬라이드 번호 개체 틀 7">
+            <a:extLst>
+              <a:ext uri="{FF2B5EF4-FFF2-40B4-BE49-F238E27FC236}">
+                <a16:creationId xmlns:a16="http://schemas.microsoft.com/office/drawing/2014/main" id="{010F0487-E9F5-4741-E920-0C82A69F9762}"/>
+              </a:ext>
+            </a:extLst>
+          </p:cNvPr>
+          <p:cNvSpPr>
+            <a:spLocks noGrp="1"/>
+          </p:cNvSpPr>
+          <p:nvPr>
+            <p:ph type="sldNum" sz="quarter" idx="12"/>
+          </p:nvPr>
+        </p:nvSpPr>
+        <p:spPr/>
+        <p:txBody>
+          <a:bodyPr/>
+          <a:lstStyle/>
+          <a:p>
+            <a:pPr rtl="0"/>
+            <a:fld id="{A3F31473-23EB-4724-8B59-FE6D21D89FA4}" type="slidenum">
+              <a:rPr lang="en-US" altLang="ko-KR" noProof="0" smtClean="0"/>
+              <a:t>5</a:t>
+            </a:fld>
+            <a:endParaRPr lang="en-US" altLang="ko-KR" noProof="0" dirty="0"/>
+          </a:p>
+        </p:txBody>
+      </p:sp>
+      <p:pic>
+        <p:nvPicPr>
+          <p:cNvPr id="2" name="그림 1">
+            <a:extLst>
+              <a:ext uri="{FF2B5EF4-FFF2-40B4-BE49-F238E27FC236}">
+                <a16:creationId xmlns:a16="http://schemas.microsoft.com/office/drawing/2014/main" id="{4E6632DC-89A1-F573-CFA6-11F64F1EA8A5}"/>
+              </a:ext>
+            </a:extLst>
+          </p:cNvPr>
+          <p:cNvPicPr>
+            <a:picLocks noChangeAspect="1"/>
+          </p:cNvPicPr>
+          <p:nvPr/>
+        </p:nvPicPr>
+        <p:blipFill>
+          <a:blip r:embed="rId3"/>
+          <a:stretch>
+            <a:fillRect/>
+          </a:stretch>
+        </p:blipFill>
+        <p:spPr>
+          <a:xfrm>
+            <a:off x="1701924" y="260648"/>
+            <a:ext cx="8925044" cy="6178877"/>
+          </a:xfrm>
+          <a:prstGeom prst="rect">
+            <a:avLst/>
+          </a:prstGeom>
+        </p:spPr>
+      </p:pic>
+    </p:spTree>
+    <p:extLst>
+      <p:ext uri="{BB962C8B-B14F-4D97-AF65-F5344CB8AC3E}">
+        <p14:creationId xmlns:p14="http://schemas.microsoft.com/office/powerpoint/2010/main" val="936647029"/>
+      </p:ext>
+    </p:extLst>
+  </p:cSld>
+  <p:clrMapOvr>
+    <a:masterClrMapping/>
+  </p:clrMapOvr>
+  <mc:AlternateContent xmlns:mc="http://schemas.openxmlformats.org/markup-compatibility/2006" xmlns:p14="http://schemas.microsoft.com/office/powerpoint/2010/main">
+    <mc:Choice Requires="p14">
+      <p:transition spd="med" p14:dur="700">
+        <p:fade/>
+      </p:transition>
+    </mc:Choice>
+    <mc:Fallback xmlns="">
+      <p:transition spd="med">
+        <p:fade/>
+      </p:transition>
+    </mc:Fallback>
+  </mc:AlternateContent>
+</p:sld>
+</file>
+
+<file path=ppt/slides/slide6.xml><?xml version="1.0" encoding="utf-8"?>
+<p:sld xmlns:a="http://schemas.openxmlformats.org/drawingml/2006/main" xmlns:r="http://schemas.openxmlformats.org/officeDocument/2006/relationships" xmlns:p="http://schemas.openxmlformats.org/presentationml/2006/main">
+  <p:cSld>
+    <p:spTree>
+      <p:nvGrpSpPr>
         <p:cNvPr id="1" name=""/>
         <p:cNvGrpSpPr/>
         <p:nvPr/>
@@ -6042,7 +7012,7 @@
             <a:pPr rtl="0"/>
             <a:fld id="{A3F31473-23EB-4724-8B59-FE6D21D89FA4}" type="slidenum">
               <a:rPr lang="en-US" altLang="ko-KR" noProof="0" smtClean="0"/>
-              <a:t>5</a:t>
+              <a:t>6</a:t>
             </a:fld>
             <a:endParaRPr lang="en-US" altLang="ko-KR" noProof="0" dirty="0"/>
           </a:p>
@@ -6097,7 +7067,7 @@
 </p:sld>
 </file>
 
-<file path=ppt/slides/slide6.xml><?xml version="1.0" encoding="utf-8"?>
+<file path=ppt/slides/slide7.xml><?xml version="1.0" encoding="utf-8"?>
 <p:sld xmlns:a="http://schemas.openxmlformats.org/drawingml/2006/main" xmlns:r="http://schemas.openxmlformats.org/officeDocument/2006/relationships" xmlns:p="http://schemas.openxmlformats.org/presentationml/2006/main">
   <p:cSld>
     <p:spTree>
@@ -6132,7 +7102,7 @@
             <a:pPr rtl="0"/>
             <a:fld id="{A3F31473-23EB-4724-8B59-FE6D21D89FA4}" type="slidenum">
               <a:rPr lang="en-US" altLang="ko-KR" noProof="0" smtClean="0"/>
-              <a:t>6</a:t>
+              <a:t>7</a:t>
             </a:fld>
             <a:endParaRPr lang="en-US" altLang="ko-KR" noProof="0" dirty="0"/>
           </a:p>
@@ -6434,7 +7404,7 @@
 </p:sld>
 </file>
 
-<file path=ppt/slides/slide7.xml><?xml version="1.0" encoding="utf-8"?>
+<file path=ppt/slides/slide8.xml><?xml version="1.0" encoding="utf-8"?>
 <p:sld xmlns:a="http://schemas.openxmlformats.org/drawingml/2006/main" xmlns:r="http://schemas.openxmlformats.org/officeDocument/2006/relationships" xmlns:p="http://schemas.openxmlformats.org/presentationml/2006/main">
   <p:cSld>
     <p:spTree>
@@ -6469,7 +7439,7 @@
             <a:pPr rtl="0"/>
             <a:fld id="{A3F31473-23EB-4724-8B59-FE6D21D89FA4}" type="slidenum">
               <a:rPr lang="en-US" altLang="ko-KR" noProof="0" smtClean="0"/>
-              <a:t>7</a:t>
+              <a:t>8</a:t>
             </a:fld>
             <a:endParaRPr lang="en-US" altLang="ko-KR" noProof="0" dirty="0"/>
           </a:p>
@@ -6581,7 +7551,7 @@
 </p:sld>
 </file>
 
-<file path=ppt/slides/slide8.xml><?xml version="1.0" encoding="utf-8"?>
+<file path=ppt/slides/slide9.xml><?xml version="1.0" encoding="utf-8"?>
 <p:sld xmlns:a="http://schemas.openxmlformats.org/drawingml/2006/main" xmlns:r="http://schemas.openxmlformats.org/officeDocument/2006/relationships" xmlns:p="http://schemas.openxmlformats.org/presentationml/2006/main">
   <p:cSld>
     <p:spTree>
@@ -6616,7 +7586,7 @@
             <a:pPr rtl="0"/>
             <a:fld id="{A3F31473-23EB-4724-8B59-FE6D21D89FA4}" type="slidenum">
               <a:rPr lang="en-US" altLang="ko-KR" noProof="0" smtClean="0"/>
-              <a:t>8</a:t>
+              <a:t>9</a:t>
             </a:fld>
             <a:endParaRPr lang="en-US" altLang="ko-KR" noProof="0" dirty="0"/>
           </a:p>
@@ -7037,96 +8007,6 @@
     <p:extLst>
       <p:ext uri="{BB962C8B-B14F-4D97-AF65-F5344CB8AC3E}">
         <p14:creationId xmlns:p14="http://schemas.microsoft.com/office/powerpoint/2010/main" val="2244855479"/>
-      </p:ext>
-    </p:extLst>
-  </p:cSld>
-  <p:clrMapOvr>
-    <a:masterClrMapping/>
-  </p:clrMapOvr>
-  <mc:AlternateContent xmlns:mc="http://schemas.openxmlformats.org/markup-compatibility/2006" xmlns:p14="http://schemas.microsoft.com/office/powerpoint/2010/main">
-    <mc:Choice Requires="p14">
-      <p:transition spd="med" p14:dur="700">
-        <p:fade/>
-      </p:transition>
-    </mc:Choice>
-    <mc:Fallback xmlns="">
-      <p:transition spd="med">
-        <p:fade/>
-      </p:transition>
-    </mc:Fallback>
-  </mc:AlternateContent>
-</p:sld>
-</file>
-
-<file path=ppt/slides/slide9.xml><?xml version="1.0" encoding="utf-8"?>
-<p:sld xmlns:a="http://schemas.openxmlformats.org/drawingml/2006/main" xmlns:r="http://schemas.openxmlformats.org/officeDocument/2006/relationships" xmlns:p="http://schemas.openxmlformats.org/presentationml/2006/main">
-  <p:cSld>
-    <p:spTree>
-      <p:nvGrpSpPr>
-        <p:cNvPr id="1" name=""/>
-        <p:cNvGrpSpPr/>
-        <p:nvPr/>
-      </p:nvGrpSpPr>
-      <p:grpSpPr>
-        <a:xfrm>
-          <a:off x="0" y="0"/>
-          <a:ext cx="0" cy="0"/>
-          <a:chOff x="0" y="0"/>
-          <a:chExt cx="0" cy="0"/>
-        </a:xfrm>
-      </p:grpSpPr>
-      <p:sp>
-        <p:nvSpPr>
-          <p:cNvPr id="8" name="슬라이드 번호 개체 틀 7"/>
-          <p:cNvSpPr>
-            <a:spLocks noGrp="1"/>
-          </p:cNvSpPr>
-          <p:nvPr>
-            <p:ph type="sldNum" sz="quarter" idx="12"/>
-          </p:nvPr>
-        </p:nvSpPr>
-        <p:spPr/>
-        <p:txBody>
-          <a:bodyPr/>
-          <a:lstStyle/>
-          <a:p>
-            <a:pPr rtl="0"/>
-            <a:fld id="{A3F31473-23EB-4724-8B59-FE6D21D89FA4}" type="slidenum">
-              <a:rPr lang="en-US" altLang="ko-KR" noProof="0" smtClean="0"/>
-              <a:t>9</a:t>
-            </a:fld>
-            <a:endParaRPr lang="en-US" altLang="ko-KR" noProof="0" dirty="0"/>
-          </a:p>
-        </p:txBody>
-      </p:sp>
-      <p:pic>
-        <p:nvPicPr>
-          <p:cNvPr id="3" name="그림 2"/>
-          <p:cNvPicPr>
-            <a:picLocks noChangeAspect="1"/>
-          </p:cNvPicPr>
-          <p:nvPr/>
-        </p:nvPicPr>
-        <p:blipFill>
-          <a:blip r:embed="rId3"/>
-          <a:stretch>
-            <a:fillRect/>
-          </a:stretch>
-        </p:blipFill>
-        <p:spPr>
-          <a:xfrm>
-            <a:off x="1773932" y="437621"/>
-            <a:ext cx="8600939" cy="5937560"/>
-          </a:xfrm>
-          <a:prstGeom prst="rect">
-            <a:avLst/>
-          </a:prstGeom>
-        </p:spPr>
-      </p:pic>
-    </p:spTree>
-    <p:extLst>
-      <p:ext uri="{BB962C8B-B14F-4D97-AF65-F5344CB8AC3E}">
-        <p14:creationId xmlns:p14="http://schemas.microsoft.com/office/powerpoint/2010/main" val="2675074773"/>
       </p:ext>
     </p:extLst>
   </p:cSld>
@@ -7949,17 +8829,6 @@
 </file>
 
 <file path=customXml/item1.xml><?xml version="1.0" encoding="utf-8"?>
-<p:properties xmlns:p="http://schemas.microsoft.com/office/2006/metadata/properties" xmlns:xsi="http://www.w3.org/2001/XMLSchema-instance" xmlns:pc="http://schemas.microsoft.com/office/infopath/2007/PartnerControls">
-  <documentManagement>
-    <VSO_x0020_item_x0020_id xmlns="40262f94-9f35-4ac3-9a90-690165a166b7" xsi:nil="true"/>
-    <Assetid_x0020_ xmlns="40262f94-9f35-4ac3-9a90-690165a166b7" xsi:nil="true"/>
-    <Item_x0020_Details xmlns="40262f94-9f35-4ac3-9a90-690165a166b7" xsi:nil="true"/>
-    <Template_x0020_details xmlns="40262f94-9f35-4ac3-9a90-690165a166b7" xsi:nil="true"/>
-  </documentManagement>
-</p:properties>
-</file>
-
-<file path=customXml/item2.xml><?xml version="1.0" encoding="utf-8"?>
 <ct:contentTypeSchema xmlns:ct="http://schemas.microsoft.com/office/2006/metadata/contentType" xmlns:ma="http://schemas.microsoft.com/office/2006/metadata/properties/metaAttributes" ct:_="" ma:_="" ma:contentTypeName="Document" ma:contentTypeID="0x010100AA3F7D94069FF64A86F7DFF56D60E3BE" ma:contentTypeVersion="6" ma:contentTypeDescription="Create a new document." ma:contentTypeScope="" ma:versionID="c32302c77d4085ecf495bdddb7f5e889">
   <xsd:schema xmlns:xsd="http://www.w3.org/2001/XMLSchema" xmlns:xs="http://www.w3.org/2001/XMLSchema" xmlns:p="http://schemas.microsoft.com/office/2006/metadata/properties" xmlns:ns2="a4f35948-e619-41b3-aa29-22878b09cfd2" xmlns:ns3="40262f94-9f35-4ac3-9a90-690165a166b7" targetNamespace="http://schemas.microsoft.com/office/2006/metadata/properties" ma:root="true" ma:fieldsID="4ab5ae46be95f9d0be6107e8200be7a2" ns2:_="" ns3:_="">
     <xsd:import namespace="a4f35948-e619-41b3-aa29-22878b09cfd2"/>
@@ -8140,6 +9009,17 @@
 </ct:contentTypeSchema>
 </file>
 
+<file path=customXml/item2.xml><?xml version="1.0" encoding="utf-8"?>
+<p:properties xmlns:p="http://schemas.microsoft.com/office/2006/metadata/properties" xmlns:xsi="http://www.w3.org/2001/XMLSchema-instance" xmlns:pc="http://schemas.microsoft.com/office/infopath/2007/PartnerControls">
+  <documentManagement>
+    <VSO_x0020_item_x0020_id xmlns="40262f94-9f35-4ac3-9a90-690165a166b7" xsi:nil="true"/>
+    <Assetid_x0020_ xmlns="40262f94-9f35-4ac3-9a90-690165a166b7" xsi:nil="true"/>
+    <Item_x0020_Details xmlns="40262f94-9f35-4ac3-9a90-690165a166b7" xsi:nil="true"/>
+    <Template_x0020_details xmlns="40262f94-9f35-4ac3-9a90-690165a166b7" xsi:nil="true"/>
+  </documentManagement>
+</p:properties>
+</file>
+
 <file path=customXml/item3.xml><?xml version="1.0" encoding="utf-8"?>
 <?mso-contentType ?>
 <FormTemplates xmlns="http://schemas.microsoft.com/sharepoint/v3/contenttype/forms">
@@ -8150,23 +9030,6 @@
 </file>
 
 <file path=customXml/itemProps1.xml><?xml version="1.0" encoding="utf-8"?>
-<ds:datastoreItem xmlns:ds="http://schemas.openxmlformats.org/officeDocument/2006/customXml" ds:itemID="{50AACE6D-8EB6-447A-8DFD-C2C0C52916AC}">
-  <ds:schemaRefs>
-    <ds:schemaRef ds:uri="http://schemas.microsoft.com/office/infopath/2007/PartnerControls"/>
-    <ds:schemaRef ds:uri="http://schemas.microsoft.com/office/2006/documentManagement/types"/>
-    <ds:schemaRef ds:uri="http://schemas.openxmlformats.org/package/2006/metadata/core-properties"/>
-    <ds:schemaRef ds:uri="http://purl.org/dc/dcmitype/"/>
-    <ds:schemaRef ds:uri="http://schemas.microsoft.com/office/2006/metadata/properties"/>
-    <ds:schemaRef ds:uri="http://purl.org/dc/elements/1.1/"/>
-    <ds:schemaRef ds:uri="http://www.w3.org/XML/1998/namespace"/>
-    <ds:schemaRef ds:uri="40262f94-9f35-4ac3-9a90-690165a166b7"/>
-    <ds:schemaRef ds:uri="a4f35948-e619-41b3-aa29-22878b09cfd2"/>
-    <ds:schemaRef ds:uri="http://purl.org/dc/terms/"/>
-  </ds:schemaRefs>
-</ds:datastoreItem>
-</file>
-
-<file path=customXml/itemProps2.xml><?xml version="1.0" encoding="utf-8"?>
 <ds:datastoreItem xmlns:ds="http://schemas.openxmlformats.org/officeDocument/2006/customXml" ds:itemID="{5CCB2C71-1ED8-4540-B003-293B5E75C71F}">
   <ds:schemaRefs>
     <ds:schemaRef ds:uri="http://schemas.microsoft.com/office/2006/metadata/contentType"/>
@@ -8185,6 +9048,23 @@
 </ds:datastoreItem>
 </file>
 
+<file path=customXml/itemProps2.xml><?xml version="1.0" encoding="utf-8"?>
+<ds:datastoreItem xmlns:ds="http://schemas.openxmlformats.org/officeDocument/2006/customXml" ds:itemID="{50AACE6D-8EB6-447A-8DFD-C2C0C52916AC}">
+  <ds:schemaRefs>
+    <ds:schemaRef ds:uri="http://schemas.microsoft.com/office/infopath/2007/PartnerControls"/>
+    <ds:schemaRef ds:uri="http://schemas.microsoft.com/office/2006/documentManagement/types"/>
+    <ds:schemaRef ds:uri="http://schemas.openxmlformats.org/package/2006/metadata/core-properties"/>
+    <ds:schemaRef ds:uri="http://purl.org/dc/dcmitype/"/>
+    <ds:schemaRef ds:uri="http://schemas.microsoft.com/office/2006/metadata/properties"/>
+    <ds:schemaRef ds:uri="http://purl.org/dc/elements/1.1/"/>
+    <ds:schemaRef ds:uri="http://www.w3.org/XML/1998/namespace"/>
+    <ds:schemaRef ds:uri="40262f94-9f35-4ac3-9a90-690165a166b7"/>
+    <ds:schemaRef ds:uri="a4f35948-e619-41b3-aa29-22878b09cfd2"/>
+    <ds:schemaRef ds:uri="http://purl.org/dc/terms/"/>
+  </ds:schemaRefs>
+</ds:datastoreItem>
+</file>
+
 <file path=customXml/itemProps3.xml><?xml version="1.0" encoding="utf-8"?>
 <ds:datastoreItem xmlns:ds="http://schemas.openxmlformats.org/officeDocument/2006/customXml" ds:itemID="{7F9B8BCC-BF24-4800-92E1-9F891BBB27E6}">
   <ds:schemaRefs>

--- a/4_Hypothesis Testing.pptx
+++ b/4_Hypothesis Testing.pptx
@@ -5,26 +5,27 @@
     <p:sldMasterId id="2147483648" r:id="rId4"/>
   </p:sldMasterIdLst>
   <p:notesMasterIdLst>
-    <p:notesMasterId r:id="rId19"/>
+    <p:notesMasterId r:id="rId20"/>
   </p:notesMasterIdLst>
   <p:handoutMasterIdLst>
-    <p:handoutMasterId r:id="rId20"/>
+    <p:handoutMasterId r:id="rId21"/>
   </p:handoutMasterIdLst>
   <p:sldIdLst>
     <p:sldId id="256" r:id="rId5"/>
     <p:sldId id="270" r:id="rId6"/>
-    <p:sldId id="272" r:id="rId7"/>
-    <p:sldId id="271" r:id="rId8"/>
-    <p:sldId id="281" r:id="rId9"/>
-    <p:sldId id="273" r:id="rId10"/>
-    <p:sldId id="274" r:id="rId11"/>
-    <p:sldId id="275" r:id="rId12"/>
-    <p:sldId id="276" r:id="rId13"/>
-    <p:sldId id="363" r:id="rId14"/>
-    <p:sldId id="277" r:id="rId15"/>
-    <p:sldId id="278" r:id="rId16"/>
-    <p:sldId id="279" r:id="rId17"/>
-    <p:sldId id="280" r:id="rId18"/>
+    <p:sldId id="364" r:id="rId7"/>
+    <p:sldId id="272" r:id="rId8"/>
+    <p:sldId id="271" r:id="rId9"/>
+    <p:sldId id="281" r:id="rId10"/>
+    <p:sldId id="273" r:id="rId11"/>
+    <p:sldId id="274" r:id="rId12"/>
+    <p:sldId id="275" r:id="rId13"/>
+    <p:sldId id="276" r:id="rId14"/>
+    <p:sldId id="363" r:id="rId15"/>
+    <p:sldId id="277" r:id="rId16"/>
+    <p:sldId id="278" r:id="rId17"/>
+    <p:sldId id="279" r:id="rId18"/>
+    <p:sldId id="280" r:id="rId19"/>
   </p:sldIdLst>
   <p:sldSz cx="12188825" cy="6858000"/>
   <p:notesSz cx="6858000" cy="9144000"/>
@@ -246,7 +247,7 @@
                 <a:latin typeface="맑은 고딕" panose="020B0503020000020004" pitchFamily="50" charset="-127"/>
                 <a:ea typeface="맑은 고딕" panose="020B0503020000020004" pitchFamily="50" charset="-127"/>
               </a:rPr>
-              <a:t>2026-03-16</a:t>
+              <a:t>2026-03-17</a:t>
             </a:fld>
             <a:endParaRPr lang="ko-KR" altLang="en-US" dirty="0">
               <a:latin typeface="맑은 고딕" panose="020B0503020000020004" pitchFamily="50" charset="-127"/>
@@ -433,7 +434,7 @@
             <a:fld id="{39DBE7D5-AA2D-4B26-8C69-8B60D39FD5EE}" type="datetime1">
               <a:rPr lang="ko-KR" altLang="en-US" smtClean="0"/>
               <a:pPr/>
-              <a:t>2026-03-16</a:t>
+              <a:t>2026-03-17</a:t>
             </a:fld>
             <a:endParaRPr lang="ko-KR" altLang="en-US" dirty="0"/>
           </a:p>
@@ -799,6 +800,91 @@
   <p:cSld>
     <p:spTree>
       <p:nvGrpSpPr>
+        <p:cNvPr id="1" name=""/>
+        <p:cNvGrpSpPr/>
+        <p:nvPr/>
+      </p:nvGrpSpPr>
+      <p:grpSpPr>
+        <a:xfrm>
+          <a:off x="0" y="0"/>
+          <a:ext cx="0" cy="0"/>
+          <a:chOff x="0" y="0"/>
+          <a:chExt cx="0" cy="0"/>
+        </a:xfrm>
+      </p:grpSpPr>
+      <p:sp>
+        <p:nvSpPr>
+          <p:cNvPr id="2" name="슬라이드 이미지 개체 틀 1"/>
+          <p:cNvSpPr>
+            <a:spLocks noGrp="1" noRot="1" noChangeAspect="1"/>
+          </p:cNvSpPr>
+          <p:nvPr>
+            <p:ph type="sldImg"/>
+          </p:nvPr>
+        </p:nvSpPr>
+        <p:spPr/>
+      </p:sp>
+      <p:sp>
+        <p:nvSpPr>
+          <p:cNvPr id="3" name="슬라이드 노트 개체 틀 2"/>
+          <p:cNvSpPr>
+            <a:spLocks noGrp="1"/>
+          </p:cNvSpPr>
+          <p:nvPr>
+            <p:ph type="body" idx="1"/>
+          </p:nvPr>
+        </p:nvSpPr>
+        <p:spPr/>
+        <p:txBody>
+          <a:bodyPr/>
+          <a:lstStyle/>
+          <a:p>
+            <a:endParaRPr lang="ko-KR" altLang="en-US" dirty="0"/>
+          </a:p>
+        </p:txBody>
+      </p:sp>
+      <p:sp>
+        <p:nvSpPr>
+          <p:cNvPr id="4" name="슬라이드 번호 개체 틀 3"/>
+          <p:cNvSpPr>
+            <a:spLocks noGrp="1"/>
+          </p:cNvSpPr>
+          <p:nvPr>
+            <p:ph type="sldNum" sz="quarter" idx="10"/>
+          </p:nvPr>
+        </p:nvSpPr>
+        <p:spPr/>
+        <p:txBody>
+          <a:bodyPr/>
+          <a:lstStyle/>
+          <a:p>
+            <a:pPr rtl="0"/>
+            <a:fld id="{5FB91549-43BF-425A-AF25-75262019208C}" type="slidenum">
+              <a:rPr lang="en-US" altLang="ko-KR" smtClean="0"/>
+              <a:t>10</a:t>
+            </a:fld>
+            <a:endParaRPr lang="ko-KR" altLang="en-US" dirty="0"/>
+          </a:p>
+        </p:txBody>
+      </p:sp>
+    </p:spTree>
+    <p:extLst>
+      <p:ext uri="{BB962C8B-B14F-4D97-AF65-F5344CB8AC3E}">
+        <p14:creationId xmlns:p14="http://schemas.microsoft.com/office/powerpoint/2010/main" val="3014349002"/>
+      </p:ext>
+    </p:extLst>
+  </p:cSld>
+  <p:clrMapOvr>
+    <a:masterClrMapping/>
+  </p:clrMapOvr>
+</p:notes>
+</file>
+
+<file path=ppt/notesSlides/notesSlide11.xml><?xml version="1.0" encoding="utf-8"?>
+<p:notes xmlns:a="http://schemas.openxmlformats.org/drawingml/2006/main" xmlns:r="http://schemas.openxmlformats.org/officeDocument/2006/relationships" xmlns:p="http://schemas.openxmlformats.org/presentationml/2006/main">
+  <p:cSld>
+    <p:spTree>
+      <p:nvGrpSpPr>
         <p:cNvPr id="1" name="">
           <a:extLst>
             <a:ext uri="{FF2B5EF4-FFF2-40B4-BE49-F238E27FC236}">
@@ -884,7 +970,7 @@
             <a:pPr rtl="0"/>
             <a:fld id="{5FB91549-43BF-425A-AF25-75262019208C}" type="slidenum">
               <a:rPr lang="en-US" altLang="ko-KR" smtClean="0"/>
-              <a:t>10</a:t>
+              <a:t>11</a:t>
             </a:fld>
             <a:endParaRPr lang="ko-KR" altLang="en-US" dirty="0"/>
           </a:p>
@@ -894,91 +980,6 @@
     <p:extLst>
       <p:ext uri="{BB962C8B-B14F-4D97-AF65-F5344CB8AC3E}">
         <p14:creationId xmlns:p14="http://schemas.microsoft.com/office/powerpoint/2010/main" val="1252142345"/>
-      </p:ext>
-    </p:extLst>
-  </p:cSld>
-  <p:clrMapOvr>
-    <a:masterClrMapping/>
-  </p:clrMapOvr>
-</p:notes>
-</file>
-
-<file path=ppt/notesSlides/notesSlide11.xml><?xml version="1.0" encoding="utf-8"?>
-<p:notes xmlns:a="http://schemas.openxmlformats.org/drawingml/2006/main" xmlns:r="http://schemas.openxmlformats.org/officeDocument/2006/relationships" xmlns:p="http://schemas.openxmlformats.org/presentationml/2006/main">
-  <p:cSld>
-    <p:spTree>
-      <p:nvGrpSpPr>
-        <p:cNvPr id="1" name=""/>
-        <p:cNvGrpSpPr/>
-        <p:nvPr/>
-      </p:nvGrpSpPr>
-      <p:grpSpPr>
-        <a:xfrm>
-          <a:off x="0" y="0"/>
-          <a:ext cx="0" cy="0"/>
-          <a:chOff x="0" y="0"/>
-          <a:chExt cx="0" cy="0"/>
-        </a:xfrm>
-      </p:grpSpPr>
-      <p:sp>
-        <p:nvSpPr>
-          <p:cNvPr id="2" name="슬라이드 이미지 개체 틀 1"/>
-          <p:cNvSpPr>
-            <a:spLocks noGrp="1" noRot="1" noChangeAspect="1"/>
-          </p:cNvSpPr>
-          <p:nvPr>
-            <p:ph type="sldImg"/>
-          </p:nvPr>
-        </p:nvSpPr>
-        <p:spPr/>
-      </p:sp>
-      <p:sp>
-        <p:nvSpPr>
-          <p:cNvPr id="3" name="슬라이드 노트 개체 틀 2"/>
-          <p:cNvSpPr>
-            <a:spLocks noGrp="1"/>
-          </p:cNvSpPr>
-          <p:nvPr>
-            <p:ph type="body" idx="1"/>
-          </p:nvPr>
-        </p:nvSpPr>
-        <p:spPr/>
-        <p:txBody>
-          <a:bodyPr/>
-          <a:lstStyle/>
-          <a:p>
-            <a:endParaRPr lang="ko-KR" altLang="en-US" dirty="0"/>
-          </a:p>
-        </p:txBody>
-      </p:sp>
-      <p:sp>
-        <p:nvSpPr>
-          <p:cNvPr id="4" name="슬라이드 번호 개체 틀 3"/>
-          <p:cNvSpPr>
-            <a:spLocks noGrp="1"/>
-          </p:cNvSpPr>
-          <p:nvPr>
-            <p:ph type="sldNum" sz="quarter" idx="10"/>
-          </p:nvPr>
-        </p:nvSpPr>
-        <p:spPr/>
-        <p:txBody>
-          <a:bodyPr/>
-          <a:lstStyle/>
-          <a:p>
-            <a:pPr rtl="0"/>
-            <a:fld id="{5FB91549-43BF-425A-AF25-75262019208C}" type="slidenum">
-              <a:rPr lang="en-US" altLang="ko-KR" smtClean="0"/>
-              <a:t>11</a:t>
-            </a:fld>
-            <a:endParaRPr lang="ko-KR" altLang="en-US" dirty="0"/>
-          </a:p>
-        </p:txBody>
-      </p:sp>
-    </p:spTree>
-    <p:extLst>
-      <p:ext uri="{BB962C8B-B14F-4D97-AF65-F5344CB8AC3E}">
-        <p14:creationId xmlns:p14="http://schemas.microsoft.com/office/powerpoint/2010/main" val="145654622"/>
       </p:ext>
     </p:extLst>
   </p:cSld>
@@ -1063,7 +1064,7 @@
     </p:spTree>
     <p:extLst>
       <p:ext uri="{BB962C8B-B14F-4D97-AF65-F5344CB8AC3E}">
-        <p14:creationId xmlns:p14="http://schemas.microsoft.com/office/powerpoint/2010/main" val="3077940026"/>
+        <p14:creationId xmlns:p14="http://schemas.microsoft.com/office/powerpoint/2010/main" val="145654622"/>
       </p:ext>
     </p:extLst>
   </p:cSld>
@@ -1148,7 +1149,7 @@
     </p:spTree>
     <p:extLst>
       <p:ext uri="{BB962C8B-B14F-4D97-AF65-F5344CB8AC3E}">
-        <p14:creationId xmlns:p14="http://schemas.microsoft.com/office/powerpoint/2010/main" val="999459255"/>
+        <p14:creationId xmlns:p14="http://schemas.microsoft.com/office/powerpoint/2010/main" val="3077940026"/>
       </p:ext>
     </p:extLst>
   </p:cSld>
@@ -1225,6 +1226,91 @@
             <a:fld id="{5FB91549-43BF-425A-AF25-75262019208C}" type="slidenum">
               <a:rPr lang="en-US" altLang="ko-KR" smtClean="0"/>
               <a:t>14</a:t>
+            </a:fld>
+            <a:endParaRPr lang="ko-KR" altLang="en-US" dirty="0"/>
+          </a:p>
+        </p:txBody>
+      </p:sp>
+    </p:spTree>
+    <p:extLst>
+      <p:ext uri="{BB962C8B-B14F-4D97-AF65-F5344CB8AC3E}">
+        <p14:creationId xmlns:p14="http://schemas.microsoft.com/office/powerpoint/2010/main" val="999459255"/>
+      </p:ext>
+    </p:extLst>
+  </p:cSld>
+  <p:clrMapOvr>
+    <a:masterClrMapping/>
+  </p:clrMapOvr>
+</p:notes>
+</file>
+
+<file path=ppt/notesSlides/notesSlide15.xml><?xml version="1.0" encoding="utf-8"?>
+<p:notes xmlns:a="http://schemas.openxmlformats.org/drawingml/2006/main" xmlns:r="http://schemas.openxmlformats.org/officeDocument/2006/relationships" xmlns:p="http://schemas.openxmlformats.org/presentationml/2006/main">
+  <p:cSld>
+    <p:spTree>
+      <p:nvGrpSpPr>
+        <p:cNvPr id="1" name=""/>
+        <p:cNvGrpSpPr/>
+        <p:nvPr/>
+      </p:nvGrpSpPr>
+      <p:grpSpPr>
+        <a:xfrm>
+          <a:off x="0" y="0"/>
+          <a:ext cx="0" cy="0"/>
+          <a:chOff x="0" y="0"/>
+          <a:chExt cx="0" cy="0"/>
+        </a:xfrm>
+      </p:grpSpPr>
+      <p:sp>
+        <p:nvSpPr>
+          <p:cNvPr id="2" name="슬라이드 이미지 개체 틀 1"/>
+          <p:cNvSpPr>
+            <a:spLocks noGrp="1" noRot="1" noChangeAspect="1"/>
+          </p:cNvSpPr>
+          <p:nvPr>
+            <p:ph type="sldImg"/>
+          </p:nvPr>
+        </p:nvSpPr>
+        <p:spPr/>
+      </p:sp>
+      <p:sp>
+        <p:nvSpPr>
+          <p:cNvPr id="3" name="슬라이드 노트 개체 틀 2"/>
+          <p:cNvSpPr>
+            <a:spLocks noGrp="1"/>
+          </p:cNvSpPr>
+          <p:nvPr>
+            <p:ph type="body" idx="1"/>
+          </p:nvPr>
+        </p:nvSpPr>
+        <p:spPr/>
+        <p:txBody>
+          <a:bodyPr/>
+          <a:lstStyle/>
+          <a:p>
+            <a:endParaRPr lang="ko-KR" altLang="en-US" dirty="0"/>
+          </a:p>
+        </p:txBody>
+      </p:sp>
+      <p:sp>
+        <p:nvSpPr>
+          <p:cNvPr id="4" name="슬라이드 번호 개체 틀 3"/>
+          <p:cNvSpPr>
+            <a:spLocks noGrp="1"/>
+          </p:cNvSpPr>
+          <p:nvPr>
+            <p:ph type="sldNum" sz="quarter" idx="10"/>
+          </p:nvPr>
+        </p:nvSpPr>
+        <p:spPr/>
+        <p:txBody>
+          <a:bodyPr/>
+          <a:lstStyle/>
+          <a:p>
+            <a:pPr rtl="0"/>
+            <a:fld id="{5FB91549-43BF-425A-AF25-75262019208C}" type="slidenum">
+              <a:rPr lang="en-US" altLang="ko-KR" smtClean="0"/>
+              <a:t>15</a:t>
             </a:fld>
             <a:endParaRPr lang="ko-KR" altLang="en-US" dirty="0"/>
           </a:p>
@@ -1333,7 +1419,13 @@
   <p:cSld>
     <p:spTree>
       <p:nvGrpSpPr>
-        <p:cNvPr id="1" name=""/>
+        <p:cNvPr id="1" name="">
+          <a:extLst>
+            <a:ext uri="{FF2B5EF4-FFF2-40B4-BE49-F238E27FC236}">
+              <a16:creationId xmlns:a16="http://schemas.microsoft.com/office/drawing/2014/main" id="{1E324254-F259-0186-8184-8C24ABFAD3FA}"/>
+            </a:ext>
+          </a:extLst>
+        </p:cNvPr>
         <p:cNvGrpSpPr/>
         <p:nvPr/>
       </p:nvGrpSpPr>
@@ -1347,7 +1439,13 @@
       </p:grpSpPr>
       <p:sp>
         <p:nvSpPr>
-          <p:cNvPr id="2" name="슬라이드 이미지 개체 틀 1"/>
+          <p:cNvPr id="2" name="슬라이드 이미지 개체 틀 1">
+            <a:extLst>
+              <a:ext uri="{FF2B5EF4-FFF2-40B4-BE49-F238E27FC236}">
+                <a16:creationId xmlns:a16="http://schemas.microsoft.com/office/drawing/2014/main" id="{DF05D676-5C57-0C2C-6C7C-38E61051C72B}"/>
+              </a:ext>
+            </a:extLst>
+          </p:cNvPr>
           <p:cNvSpPr>
             <a:spLocks noGrp="1" noRot="1" noChangeAspect="1"/>
           </p:cNvSpPr>
@@ -1359,7 +1457,13 @@
       </p:sp>
       <p:sp>
         <p:nvSpPr>
-          <p:cNvPr id="3" name="슬라이드 노트 개체 틀 2"/>
+          <p:cNvPr id="3" name="슬라이드 노트 개체 틀 2">
+            <a:extLst>
+              <a:ext uri="{FF2B5EF4-FFF2-40B4-BE49-F238E27FC236}">
+                <a16:creationId xmlns:a16="http://schemas.microsoft.com/office/drawing/2014/main" id="{8ED176DB-4586-0E80-7679-11F9B7FDC3F2}"/>
+              </a:ext>
+            </a:extLst>
+          </p:cNvPr>
           <p:cNvSpPr>
             <a:spLocks noGrp="1"/>
           </p:cNvSpPr>
@@ -1378,7 +1482,13 @@
       </p:sp>
       <p:sp>
         <p:nvSpPr>
-          <p:cNvPr id="4" name="슬라이드 번호 개체 틀 3"/>
+          <p:cNvPr id="4" name="슬라이드 번호 개체 틀 3">
+            <a:extLst>
+              <a:ext uri="{FF2B5EF4-FFF2-40B4-BE49-F238E27FC236}">
+                <a16:creationId xmlns:a16="http://schemas.microsoft.com/office/drawing/2014/main" id="{7772E2A2-B4A2-BCB6-696A-196E3F182761}"/>
+              </a:ext>
+            </a:extLst>
+          </p:cNvPr>
           <p:cNvSpPr>
             <a:spLocks noGrp="1"/>
           </p:cNvSpPr>
@@ -1403,7 +1513,7 @@
     </p:spTree>
     <p:extLst>
       <p:ext uri="{BB962C8B-B14F-4D97-AF65-F5344CB8AC3E}">
-        <p14:creationId xmlns:p14="http://schemas.microsoft.com/office/powerpoint/2010/main" val="1746534141"/>
+        <p14:creationId xmlns:p14="http://schemas.microsoft.com/office/powerpoint/2010/main" val="2551433410"/>
       </p:ext>
     </p:extLst>
   </p:cSld>
@@ -1488,6 +1598,91 @@
     </p:spTree>
     <p:extLst>
       <p:ext uri="{BB962C8B-B14F-4D97-AF65-F5344CB8AC3E}">
+        <p14:creationId xmlns:p14="http://schemas.microsoft.com/office/powerpoint/2010/main" val="1746534141"/>
+      </p:ext>
+    </p:extLst>
+  </p:cSld>
+  <p:clrMapOvr>
+    <a:masterClrMapping/>
+  </p:clrMapOvr>
+</p:notes>
+</file>
+
+<file path=ppt/notesSlides/notesSlide5.xml><?xml version="1.0" encoding="utf-8"?>
+<p:notes xmlns:a="http://schemas.openxmlformats.org/drawingml/2006/main" xmlns:r="http://schemas.openxmlformats.org/officeDocument/2006/relationships" xmlns:p="http://schemas.openxmlformats.org/presentationml/2006/main">
+  <p:cSld>
+    <p:spTree>
+      <p:nvGrpSpPr>
+        <p:cNvPr id="1" name=""/>
+        <p:cNvGrpSpPr/>
+        <p:nvPr/>
+      </p:nvGrpSpPr>
+      <p:grpSpPr>
+        <a:xfrm>
+          <a:off x="0" y="0"/>
+          <a:ext cx="0" cy="0"/>
+          <a:chOff x="0" y="0"/>
+          <a:chExt cx="0" cy="0"/>
+        </a:xfrm>
+      </p:grpSpPr>
+      <p:sp>
+        <p:nvSpPr>
+          <p:cNvPr id="2" name="슬라이드 이미지 개체 틀 1"/>
+          <p:cNvSpPr>
+            <a:spLocks noGrp="1" noRot="1" noChangeAspect="1"/>
+          </p:cNvSpPr>
+          <p:nvPr>
+            <p:ph type="sldImg"/>
+          </p:nvPr>
+        </p:nvSpPr>
+        <p:spPr/>
+      </p:sp>
+      <p:sp>
+        <p:nvSpPr>
+          <p:cNvPr id="3" name="슬라이드 노트 개체 틀 2"/>
+          <p:cNvSpPr>
+            <a:spLocks noGrp="1"/>
+          </p:cNvSpPr>
+          <p:nvPr>
+            <p:ph type="body" idx="1"/>
+          </p:nvPr>
+        </p:nvSpPr>
+        <p:spPr/>
+        <p:txBody>
+          <a:bodyPr/>
+          <a:lstStyle/>
+          <a:p>
+            <a:endParaRPr lang="ko-KR" altLang="en-US" dirty="0"/>
+          </a:p>
+        </p:txBody>
+      </p:sp>
+      <p:sp>
+        <p:nvSpPr>
+          <p:cNvPr id="4" name="슬라이드 번호 개체 틀 3"/>
+          <p:cNvSpPr>
+            <a:spLocks noGrp="1"/>
+          </p:cNvSpPr>
+          <p:nvPr>
+            <p:ph type="sldNum" sz="quarter" idx="10"/>
+          </p:nvPr>
+        </p:nvSpPr>
+        <p:spPr/>
+        <p:txBody>
+          <a:bodyPr/>
+          <a:lstStyle/>
+          <a:p>
+            <a:pPr rtl="0"/>
+            <a:fld id="{5FB91549-43BF-425A-AF25-75262019208C}" type="slidenum">
+              <a:rPr lang="en-US" altLang="ko-KR" smtClean="0"/>
+              <a:t>5</a:t>
+            </a:fld>
+            <a:endParaRPr lang="ko-KR" altLang="en-US" dirty="0"/>
+          </a:p>
+        </p:txBody>
+      </p:sp>
+    </p:spTree>
+    <p:extLst>
+      <p:ext uri="{BB962C8B-B14F-4D97-AF65-F5344CB8AC3E}">
         <p14:creationId xmlns:p14="http://schemas.microsoft.com/office/powerpoint/2010/main" val="151191140"/>
       </p:ext>
     </p:extLst>
@@ -1498,7 +1693,7 @@
 </p:notes>
 </file>
 
-<file path=ppt/notesSlides/notesSlide5.xml><?xml version="1.0" encoding="utf-8"?>
+<file path=ppt/notesSlides/notesSlide6.xml><?xml version="1.0" encoding="utf-8"?>
 <p:notes xmlns:a="http://schemas.openxmlformats.org/drawingml/2006/main" xmlns:r="http://schemas.openxmlformats.org/officeDocument/2006/relationships" xmlns:p="http://schemas.openxmlformats.org/presentationml/2006/main">
   <p:cSld>
     <p:spTree>
@@ -1588,7 +1783,7 @@
             <a:pPr rtl="0"/>
             <a:fld id="{5FB91549-43BF-425A-AF25-75262019208C}" type="slidenum">
               <a:rPr lang="en-US" altLang="ko-KR" smtClean="0"/>
-              <a:t>5</a:t>
+              <a:t>6</a:t>
             </a:fld>
             <a:endParaRPr lang="ko-KR" altLang="en-US" dirty="0"/>
           </a:p>
@@ -1598,91 +1793,6 @@
     <p:extLst>
       <p:ext uri="{BB962C8B-B14F-4D97-AF65-F5344CB8AC3E}">
         <p14:creationId xmlns:p14="http://schemas.microsoft.com/office/powerpoint/2010/main" val="1216411481"/>
-      </p:ext>
-    </p:extLst>
-  </p:cSld>
-  <p:clrMapOvr>
-    <a:masterClrMapping/>
-  </p:clrMapOvr>
-</p:notes>
-</file>
-
-<file path=ppt/notesSlides/notesSlide6.xml><?xml version="1.0" encoding="utf-8"?>
-<p:notes xmlns:a="http://schemas.openxmlformats.org/drawingml/2006/main" xmlns:r="http://schemas.openxmlformats.org/officeDocument/2006/relationships" xmlns:p="http://schemas.openxmlformats.org/presentationml/2006/main">
-  <p:cSld>
-    <p:spTree>
-      <p:nvGrpSpPr>
-        <p:cNvPr id="1" name=""/>
-        <p:cNvGrpSpPr/>
-        <p:nvPr/>
-      </p:nvGrpSpPr>
-      <p:grpSpPr>
-        <a:xfrm>
-          <a:off x="0" y="0"/>
-          <a:ext cx="0" cy="0"/>
-          <a:chOff x="0" y="0"/>
-          <a:chExt cx="0" cy="0"/>
-        </a:xfrm>
-      </p:grpSpPr>
-      <p:sp>
-        <p:nvSpPr>
-          <p:cNvPr id="2" name="슬라이드 이미지 개체 틀 1"/>
-          <p:cNvSpPr>
-            <a:spLocks noGrp="1" noRot="1" noChangeAspect="1"/>
-          </p:cNvSpPr>
-          <p:nvPr>
-            <p:ph type="sldImg"/>
-          </p:nvPr>
-        </p:nvSpPr>
-        <p:spPr/>
-      </p:sp>
-      <p:sp>
-        <p:nvSpPr>
-          <p:cNvPr id="3" name="슬라이드 노트 개체 틀 2"/>
-          <p:cNvSpPr>
-            <a:spLocks noGrp="1"/>
-          </p:cNvSpPr>
-          <p:nvPr>
-            <p:ph type="body" idx="1"/>
-          </p:nvPr>
-        </p:nvSpPr>
-        <p:spPr/>
-        <p:txBody>
-          <a:bodyPr/>
-          <a:lstStyle/>
-          <a:p>
-            <a:endParaRPr lang="ko-KR" altLang="en-US" dirty="0"/>
-          </a:p>
-        </p:txBody>
-      </p:sp>
-      <p:sp>
-        <p:nvSpPr>
-          <p:cNvPr id="4" name="슬라이드 번호 개체 틀 3"/>
-          <p:cNvSpPr>
-            <a:spLocks noGrp="1"/>
-          </p:cNvSpPr>
-          <p:nvPr>
-            <p:ph type="sldNum" sz="quarter" idx="10"/>
-          </p:nvPr>
-        </p:nvSpPr>
-        <p:spPr/>
-        <p:txBody>
-          <a:bodyPr/>
-          <a:lstStyle/>
-          <a:p>
-            <a:pPr rtl="0"/>
-            <a:fld id="{5FB91549-43BF-425A-AF25-75262019208C}" type="slidenum">
-              <a:rPr lang="en-US" altLang="ko-KR" smtClean="0"/>
-              <a:t>6</a:t>
-            </a:fld>
-            <a:endParaRPr lang="ko-KR" altLang="en-US" dirty="0"/>
-          </a:p>
-        </p:txBody>
-      </p:sp>
-    </p:spTree>
-    <p:extLst>
-      <p:ext uri="{BB962C8B-B14F-4D97-AF65-F5344CB8AC3E}">
-        <p14:creationId xmlns:p14="http://schemas.microsoft.com/office/powerpoint/2010/main" val="4288904593"/>
       </p:ext>
     </p:extLst>
   </p:cSld>
@@ -1767,7 +1877,7 @@
     </p:spTree>
     <p:extLst>
       <p:ext uri="{BB962C8B-B14F-4D97-AF65-F5344CB8AC3E}">
-        <p14:creationId xmlns:p14="http://schemas.microsoft.com/office/powerpoint/2010/main" val="390987337"/>
+        <p14:creationId xmlns:p14="http://schemas.microsoft.com/office/powerpoint/2010/main" val="4288904593"/>
       </p:ext>
     </p:extLst>
   </p:cSld>
@@ -1852,7 +1962,7 @@
     </p:spTree>
     <p:extLst>
       <p:ext uri="{BB962C8B-B14F-4D97-AF65-F5344CB8AC3E}">
-        <p14:creationId xmlns:p14="http://schemas.microsoft.com/office/powerpoint/2010/main" val="3948408493"/>
+        <p14:creationId xmlns:p14="http://schemas.microsoft.com/office/powerpoint/2010/main" val="390987337"/>
       </p:ext>
     </p:extLst>
   </p:cSld>
@@ -1937,7 +2047,7 @@
     </p:spTree>
     <p:extLst>
       <p:ext uri="{BB962C8B-B14F-4D97-AF65-F5344CB8AC3E}">
-        <p14:creationId xmlns:p14="http://schemas.microsoft.com/office/powerpoint/2010/main" val="3014349002"/>
+        <p14:creationId xmlns:p14="http://schemas.microsoft.com/office/powerpoint/2010/main" val="3948408493"/>
       </p:ext>
     </p:extLst>
   </p:cSld>
@@ -2185,7 +2295,7 @@
           <a:p>
             <a:fld id="{4B229CEB-779D-4AB3-81CB-8FCEEAE03F61}" type="datetime1">
               <a:rPr lang="ko-KR" altLang="en-US" smtClean="0"/>
-              <a:t>2026-03-16</a:t>
+              <a:t>2026-03-17</a:t>
             </a:fld>
             <a:endParaRPr lang="ko-KR" altLang="en-US" dirty="0"/>
           </a:p>
@@ -2423,7 +2533,7 @@
             <a:pPr rtl="0"/>
             <a:fld id="{C3B7A883-0BF0-4B4B-84D5-D747A0111A56}" type="datetime1">
               <a:rPr lang="ko-KR" altLang="en-US" noProof="0" smtClean="0"/>
-              <a:t>2026-03-16</a:t>
+              <a:t>2026-03-17</a:t>
             </a:fld>
             <a:endParaRPr lang="ko-KR" altLang="en-US" noProof="0" dirty="0"/>
           </a:p>
@@ -2641,7 +2751,7 @@
             <a:pPr rtl="0"/>
             <a:fld id="{3DA7EA29-F2BB-4FB1-BB4B-C55A7FA3FC5C}" type="datetime1">
               <a:rPr lang="ko-KR" altLang="en-US" noProof="0" smtClean="0"/>
-              <a:t>2026-03-16</a:t>
+              <a:t>2026-03-17</a:t>
             </a:fld>
             <a:endParaRPr lang="ko-KR" altLang="en-US" noProof="0" dirty="0"/>
           </a:p>
@@ -2850,7 +2960,7 @@
             <a:pPr rtl="0"/>
             <a:fld id="{D76306AB-75A0-421C-B431-0E4E30A5C28E}" type="datetime1">
               <a:rPr lang="ko-KR" altLang="en-US" noProof="0" smtClean="0"/>
-              <a:t>2026-03-16</a:t>
+              <a:t>2026-03-17</a:t>
             </a:fld>
             <a:endParaRPr lang="ko-KR" altLang="en-US" noProof="0" dirty="0"/>
           </a:p>
@@ -3120,7 +3230,7 @@
             <a:pPr rtl="0"/>
             <a:fld id="{E1D969EE-F1EB-462E-B70D-5B36B3806A4E}" type="datetime1">
               <a:rPr lang="ko-KR" altLang="en-US" noProof="0" smtClean="0"/>
-              <a:t>2026-03-16</a:t>
+              <a:t>2026-03-17</a:t>
             </a:fld>
             <a:endParaRPr lang="ko-KR" altLang="en-US" noProof="0" dirty="0"/>
           </a:p>
@@ -3428,7 +3538,7 @@
             <a:pPr rtl="0"/>
             <a:fld id="{E8CBB1B7-E0A1-46A3-B5B5-C69931095FF6}" type="datetime1">
               <a:rPr lang="ko-KR" altLang="en-US" noProof="0" smtClean="0"/>
-              <a:t>2026-03-16</a:t>
+              <a:t>2026-03-17</a:t>
             </a:fld>
             <a:endParaRPr lang="ko-KR" altLang="en-US" noProof="0" dirty="0"/>
           </a:p>
@@ -3879,7 +3989,7 @@
             <a:pPr rtl="0"/>
             <a:fld id="{DAFC0E65-06AB-44D7-AAEE-8F4C7ED84A0C}" type="datetime1">
               <a:rPr lang="ko-KR" altLang="en-US" noProof="0" smtClean="0"/>
-              <a:t>2026-03-16</a:t>
+              <a:t>2026-03-17</a:t>
             </a:fld>
             <a:endParaRPr lang="ko-KR" altLang="en-US" noProof="0" dirty="0"/>
           </a:p>
@@ -4016,7 +4126,7 @@
             <a:pPr rtl="0"/>
             <a:fld id="{30189E66-D439-4767-B911-EB49CB20E313}" type="datetime1">
               <a:rPr lang="ko-KR" altLang="en-US" noProof="0" smtClean="0"/>
-              <a:t>2026-03-16</a:t>
+              <a:t>2026-03-17</a:t>
             </a:fld>
             <a:endParaRPr lang="ko-KR" altLang="en-US" noProof="0" dirty="0"/>
           </a:p>
@@ -4129,7 +4239,7 @@
             <a:pPr rtl="0"/>
             <a:fld id="{D4E4FFC0-DB28-4291-80A0-63DBF8428320}" type="datetime1">
               <a:rPr lang="ko-KR" altLang="en-US" noProof="0" smtClean="0"/>
-              <a:t>2026-03-16</a:t>
+              <a:t>2026-03-17</a:t>
             </a:fld>
             <a:endParaRPr lang="ko-KR" altLang="en-US" noProof="0" dirty="0"/>
           </a:p>
@@ -4434,7 +4544,7 @@
             <a:pPr rtl="0"/>
             <a:fld id="{3AB5804B-C38E-4214-93DF-3E6DA00134E8}" type="datetime1">
               <a:rPr lang="ko-KR" altLang="en-US" noProof="0" smtClean="0"/>
-              <a:t>2026-03-16</a:t>
+              <a:t>2026-03-17</a:t>
             </a:fld>
             <a:endParaRPr lang="ko-KR" altLang="en-US" noProof="0" dirty="0"/>
           </a:p>
@@ -4728,7 +4838,7 @@
             <a:pPr rtl="0"/>
             <a:fld id="{CABEE384-F18F-4153-AC21-608599869F84}" type="datetime1">
               <a:rPr lang="ko-KR" altLang="en-US" noProof="0" smtClean="0"/>
-              <a:t>2026-03-16</a:t>
+              <a:t>2026-03-17</a:t>
             </a:fld>
             <a:endParaRPr lang="ko-KR" altLang="en-US" noProof="0" dirty="0"/>
           </a:p>
@@ -4960,7 +5070,7 @@
           <a:p>
             <a:fld id="{667A4C69-65FB-481C-AC2A-84D254D33675}" type="datetime1">
               <a:rPr lang="ko-KR" altLang="en-US" smtClean="0"/>
-              <a:t>2026-03-16</a:t>
+              <a:t>2026-03-17</a:t>
             </a:fld>
             <a:endParaRPr lang="ko-KR" altLang="en-US" dirty="0"/>
           </a:p>
@@ -5558,6 +5668,483 @@
   <p:cSld>
     <p:spTree>
       <p:nvGrpSpPr>
+        <p:cNvPr id="1" name=""/>
+        <p:cNvGrpSpPr/>
+        <p:nvPr/>
+      </p:nvGrpSpPr>
+      <p:grpSpPr>
+        <a:xfrm>
+          <a:off x="0" y="0"/>
+          <a:ext cx="0" cy="0"/>
+          <a:chOff x="0" y="0"/>
+          <a:chExt cx="0" cy="0"/>
+        </a:xfrm>
+      </p:grpSpPr>
+      <p:sp>
+        <p:nvSpPr>
+          <p:cNvPr id="8" name="슬라이드 번호 개체 틀 7"/>
+          <p:cNvSpPr>
+            <a:spLocks noGrp="1"/>
+          </p:cNvSpPr>
+          <p:nvPr>
+            <p:ph type="sldNum" sz="quarter" idx="12"/>
+          </p:nvPr>
+        </p:nvSpPr>
+        <p:spPr/>
+        <p:txBody>
+          <a:bodyPr/>
+          <a:lstStyle/>
+          <a:p>
+            <a:pPr rtl="0"/>
+            <a:fld id="{A3F31473-23EB-4724-8B59-FE6D21D89FA4}" type="slidenum">
+              <a:rPr lang="en-US" altLang="ko-KR" noProof="0" smtClean="0"/>
+              <a:t>10</a:t>
+            </a:fld>
+            <a:endParaRPr lang="en-US" altLang="ko-KR" noProof="0" dirty="0"/>
+          </a:p>
+        </p:txBody>
+      </p:sp>
+      <p:sp>
+        <p:nvSpPr>
+          <p:cNvPr id="4" name="직사각형 3"/>
+          <p:cNvSpPr/>
+          <p:nvPr/>
+        </p:nvSpPr>
+        <p:spPr>
+          <a:xfrm>
+            <a:off x="333772" y="370028"/>
+            <a:ext cx="7231467" cy="523220"/>
+          </a:xfrm>
+          <a:prstGeom prst="rect">
+            <a:avLst/>
+          </a:prstGeom>
+        </p:spPr>
+        <p:txBody>
+          <a:bodyPr wrap="none">
+            <a:spAutoFit/>
+          </a:bodyPr>
+          <a:lstStyle/>
+          <a:p>
+            <a:r>
+              <a:rPr lang="ko-KR" altLang="en-US" sz="2800" b="1" dirty="0"/>
+              <a:t>새로운 신약의 효과 검정을 위한 통계분석</a:t>
+            </a:r>
+            <a:r>
+              <a:rPr lang="en-US" altLang="ko-KR" sz="2800" b="1" dirty="0"/>
+              <a:t>(3/3)</a:t>
+            </a:r>
+            <a:endParaRPr lang="ko-KR" altLang="en-US" sz="2800" b="1" dirty="0"/>
+          </a:p>
+        </p:txBody>
+      </p:sp>
+      <p:pic>
+        <p:nvPicPr>
+          <p:cNvPr id="2" name="그림 1"/>
+          <p:cNvPicPr>
+            <a:picLocks noChangeAspect="1"/>
+          </p:cNvPicPr>
+          <p:nvPr/>
+        </p:nvPicPr>
+        <p:blipFill>
+          <a:blip r:embed="rId3"/>
+          <a:stretch>
+            <a:fillRect/>
+          </a:stretch>
+        </p:blipFill>
+        <p:spPr>
+          <a:xfrm>
+            <a:off x="837828" y="1628800"/>
+            <a:ext cx="5313788" cy="4320480"/>
+          </a:xfrm>
+          <a:prstGeom prst="rect">
+            <a:avLst/>
+          </a:prstGeom>
+        </p:spPr>
+      </p:pic>
+      <p:sp>
+        <p:nvSpPr>
+          <p:cNvPr id="7" name="직사각형 6"/>
+          <p:cNvSpPr/>
+          <p:nvPr/>
+        </p:nvSpPr>
+        <p:spPr>
+          <a:xfrm>
+            <a:off x="6308231" y="3356992"/>
+            <a:ext cx="5757427" cy="2354491"/>
+          </a:xfrm>
+          <a:prstGeom prst="rect">
+            <a:avLst/>
+          </a:prstGeom>
+          <a:solidFill>
+            <a:schemeClr val="accent5">
+              <a:lumMod val="20000"/>
+              <a:lumOff val="80000"/>
+            </a:schemeClr>
+          </a:solidFill>
+        </p:spPr>
+        <p:txBody>
+          <a:bodyPr wrap="square">
+            <a:spAutoFit/>
+          </a:bodyPr>
+          <a:lstStyle/>
+          <a:p>
+            <a:pPr marL="285750" indent="-285750">
+              <a:lnSpc>
+                <a:spcPct val="150000"/>
+              </a:lnSpc>
+              <a:buFont typeface="Wingdings" panose="05000000000000000000" pitchFamily="2" charset="2"/>
+              <a:buChar char="v"/>
+            </a:pPr>
+            <a:r>
+              <a:rPr lang="ko-KR" altLang="en-US" sz="1400" dirty="0">
+                <a:latin typeface="휴먼모음T" panose="02030504000101010101" pitchFamily="18" charset="-127"/>
+                <a:ea typeface="휴먼모음T" panose="02030504000101010101" pitchFamily="18" charset="-127"/>
+                <a:cs typeface="함초롬돋움" panose="020B0604000101010101" pitchFamily="50" charset="-127"/>
+              </a:rPr>
+              <a:t>차이가 없다는 가정</a:t>
+            </a:r>
+            <a:r>
+              <a:rPr lang="en-US" altLang="ko-KR" sz="1400" dirty="0">
+                <a:latin typeface="휴먼모음T" panose="02030504000101010101" pitchFamily="18" charset="-127"/>
+                <a:ea typeface="휴먼모음T" panose="02030504000101010101" pitchFamily="18" charset="-127"/>
+                <a:cs typeface="함초롬돋움" panose="020B0604000101010101" pitchFamily="50" charset="-127"/>
+              </a:rPr>
+              <a:t>(</a:t>
+            </a:r>
+            <a:r>
+              <a:rPr lang="ko-KR" altLang="en-US" sz="1400" dirty="0" err="1">
+                <a:latin typeface="휴먼모음T" panose="02030504000101010101" pitchFamily="18" charset="-127"/>
+                <a:ea typeface="휴먼모음T" panose="02030504000101010101" pitchFamily="18" charset="-127"/>
+                <a:cs typeface="함초롬돋움" panose="020B0604000101010101" pitchFamily="50" charset="-127"/>
+              </a:rPr>
+              <a:t>귀무가설</a:t>
+            </a:r>
+            <a:r>
+              <a:rPr lang="en-US" altLang="ko-KR" sz="1400" dirty="0">
+                <a:latin typeface="휴먼모음T" panose="02030504000101010101" pitchFamily="18" charset="-127"/>
+                <a:ea typeface="휴먼모음T" panose="02030504000101010101" pitchFamily="18" charset="-127"/>
+                <a:cs typeface="함초롬돋움" panose="020B0604000101010101" pitchFamily="50" charset="-127"/>
+              </a:rPr>
+              <a:t>)</a:t>
+            </a:r>
+            <a:r>
+              <a:rPr lang="ko-KR" altLang="en-US" sz="1400" dirty="0">
+                <a:latin typeface="휴먼모음T" panose="02030504000101010101" pitchFamily="18" charset="-127"/>
+                <a:ea typeface="휴먼모음T" panose="02030504000101010101" pitchFamily="18" charset="-127"/>
+                <a:cs typeface="함초롬돋움" panose="020B0604000101010101" pitchFamily="50" charset="-127"/>
+              </a:rPr>
+              <a:t>이 옳다면 실험자료상으로 </a:t>
+            </a:r>
+            <a:r>
+              <a:rPr lang="ko-KR" altLang="en-US" sz="1400" dirty="0" err="1">
+                <a:latin typeface="휴먼모음T" panose="02030504000101010101" pitchFamily="18" charset="-127"/>
+                <a:ea typeface="휴먼모음T" panose="02030504000101010101" pitchFamily="18" charset="-127"/>
+                <a:cs typeface="함초롬돋움" panose="020B0604000101010101" pitchFamily="50" charset="-127"/>
+              </a:rPr>
+              <a:t>귀무가설을</a:t>
+            </a:r>
+            <a:r>
+              <a:rPr lang="ko-KR" altLang="en-US" sz="1400" dirty="0">
+                <a:latin typeface="휴먼모음T" panose="02030504000101010101" pitchFamily="18" charset="-127"/>
+                <a:ea typeface="휴먼모음T" panose="02030504000101010101" pitchFamily="18" charset="-127"/>
+                <a:cs typeface="함초롬돋움" panose="020B0604000101010101" pitchFamily="50" charset="-127"/>
+              </a:rPr>
+              <a:t> 기각할 확률</a:t>
+            </a:r>
+            <a:r>
+              <a:rPr lang="en-US" altLang="ko-KR" sz="1400" dirty="0">
+                <a:latin typeface="휴먼모음T" panose="02030504000101010101" pitchFamily="18" charset="-127"/>
+                <a:ea typeface="휴먼모음T" panose="02030504000101010101" pitchFamily="18" charset="-127"/>
+                <a:cs typeface="함초롬돋움" panose="020B0604000101010101" pitchFamily="50" charset="-127"/>
+              </a:rPr>
+              <a:t>(p-value = 8.21%)</a:t>
+            </a:r>
+            <a:r>
+              <a:rPr lang="ko-KR" altLang="en-US" sz="1400" dirty="0">
+                <a:latin typeface="휴먼모음T" panose="02030504000101010101" pitchFamily="18" charset="-127"/>
+                <a:ea typeface="휴먼모음T" panose="02030504000101010101" pitchFamily="18" charset="-127"/>
+                <a:cs typeface="함초롬돋움" panose="020B0604000101010101" pitchFamily="50" charset="-127"/>
+              </a:rPr>
+              <a:t>인데</a:t>
+            </a:r>
+            <a:r>
+              <a:rPr lang="en-US" altLang="ko-KR" sz="1400" dirty="0">
+                <a:latin typeface="휴먼모음T" panose="02030504000101010101" pitchFamily="18" charset="-127"/>
+                <a:ea typeface="휴먼모음T" panose="02030504000101010101" pitchFamily="18" charset="-127"/>
+                <a:cs typeface="함초롬돋움" panose="020B0604000101010101" pitchFamily="50" charset="-127"/>
+              </a:rPr>
+              <a:t>?</a:t>
+            </a:r>
+          </a:p>
+          <a:p>
+            <a:pPr marL="285750" indent="-285750">
+              <a:lnSpc>
+                <a:spcPct val="150000"/>
+              </a:lnSpc>
+              <a:buFont typeface="Wingdings" panose="05000000000000000000" pitchFamily="2" charset="2"/>
+              <a:buChar char="v"/>
+            </a:pPr>
+            <a:endParaRPr lang="en-US" altLang="ko-KR" sz="1400" dirty="0">
+              <a:latin typeface="휴먼모음T" panose="02030504000101010101" pitchFamily="18" charset="-127"/>
+              <a:ea typeface="휴먼모음T" panose="02030504000101010101" pitchFamily="18" charset="-127"/>
+              <a:cs typeface="함초롬돋움" panose="020B0604000101010101" pitchFamily="50" charset="-127"/>
+            </a:endParaRPr>
+          </a:p>
+          <a:p>
+            <a:pPr marL="285750" indent="-285750">
+              <a:lnSpc>
+                <a:spcPct val="150000"/>
+              </a:lnSpc>
+              <a:buFont typeface="Wingdings" panose="05000000000000000000" pitchFamily="2" charset="2"/>
+              <a:buChar char="v"/>
+            </a:pPr>
+            <a:r>
+              <a:rPr lang="en-US" altLang="ko-KR" sz="1400" dirty="0">
+                <a:latin typeface="휴먼모음T" panose="02030504000101010101" pitchFamily="18" charset="-127"/>
+                <a:ea typeface="휴먼모음T" panose="02030504000101010101" pitchFamily="18" charset="-127"/>
+                <a:cs typeface="함초롬돋움" panose="020B0604000101010101" pitchFamily="50" charset="-127"/>
+              </a:rPr>
+              <a:t>8.21%</a:t>
+            </a:r>
+            <a:r>
+              <a:rPr lang="ko-KR" altLang="en-US" sz="1400" dirty="0">
+                <a:latin typeface="휴먼모음T" panose="02030504000101010101" pitchFamily="18" charset="-127"/>
+                <a:ea typeface="휴먼모음T" panose="02030504000101010101" pitchFamily="18" charset="-127"/>
+                <a:cs typeface="함초롬돋움" panose="020B0604000101010101" pitchFamily="50" charset="-127"/>
+              </a:rPr>
+              <a:t>는 극단적인 </a:t>
+            </a:r>
+            <a:r>
+              <a:rPr lang="en-US" altLang="ko-KR" sz="1400" dirty="0">
+                <a:latin typeface="휴먼모음T" panose="02030504000101010101" pitchFamily="18" charset="-127"/>
+                <a:ea typeface="휴먼모음T" panose="02030504000101010101" pitchFamily="18" charset="-127"/>
+                <a:cs typeface="함초롬돋움" panose="020B0604000101010101" pitchFamily="50" charset="-127"/>
+              </a:rPr>
+              <a:t>case</a:t>
+            </a:r>
+            <a:r>
+              <a:rPr lang="ko-KR" altLang="en-US" sz="1400" dirty="0">
+                <a:latin typeface="휴먼모음T" panose="02030504000101010101" pitchFamily="18" charset="-127"/>
+                <a:ea typeface="휴먼모음T" panose="02030504000101010101" pitchFamily="18" charset="-127"/>
+                <a:cs typeface="함초롬돋움" panose="020B0604000101010101" pitchFamily="50" charset="-127"/>
+              </a:rPr>
+              <a:t>인가</a:t>
+            </a:r>
+            <a:r>
+              <a:rPr lang="en-US" altLang="ko-KR" sz="1400" dirty="0">
+                <a:latin typeface="휴먼모음T" panose="02030504000101010101" pitchFamily="18" charset="-127"/>
+                <a:ea typeface="휴먼모음T" panose="02030504000101010101" pitchFamily="18" charset="-127"/>
+                <a:cs typeface="함초롬돋움" panose="020B0604000101010101" pitchFamily="50" charset="-127"/>
+              </a:rPr>
+              <a:t>? </a:t>
+            </a:r>
+            <a:r>
+              <a:rPr lang="ko-KR" altLang="en-US" sz="1400" dirty="0">
+                <a:latin typeface="휴먼모음T" panose="02030504000101010101" pitchFamily="18" charset="-127"/>
+                <a:ea typeface="휴먼모음T" panose="02030504000101010101" pitchFamily="18" charset="-127"/>
+                <a:cs typeface="함초롬돋움" panose="020B0604000101010101" pitchFamily="50" charset="-127"/>
+              </a:rPr>
+              <a:t>너무 크지 않은가</a:t>
+            </a:r>
+            <a:r>
+              <a:rPr lang="en-US" altLang="ko-KR" sz="1400" dirty="0">
+                <a:latin typeface="휴먼모음T" panose="02030504000101010101" pitchFamily="18" charset="-127"/>
+                <a:ea typeface="휴먼모음T" panose="02030504000101010101" pitchFamily="18" charset="-127"/>
+                <a:cs typeface="함초롬돋움" panose="020B0604000101010101" pitchFamily="50" charset="-127"/>
+              </a:rPr>
+              <a:t>? </a:t>
+            </a:r>
+          </a:p>
+          <a:p>
+            <a:pPr marL="285750" indent="-285750">
+              <a:lnSpc>
+                <a:spcPct val="150000"/>
+              </a:lnSpc>
+              <a:buFont typeface="Wingdings" panose="05000000000000000000" pitchFamily="2" charset="2"/>
+              <a:buChar char="v"/>
+            </a:pPr>
+            <a:r>
+              <a:rPr lang="ko-KR" altLang="en-US" sz="1400" dirty="0">
+                <a:latin typeface="휴먼모음T" panose="02030504000101010101" pitchFamily="18" charset="-127"/>
+                <a:ea typeface="휴먼모음T" panose="02030504000101010101" pitchFamily="18" charset="-127"/>
+                <a:cs typeface="함초롬돋움" panose="020B0604000101010101" pitchFamily="50" charset="-127"/>
+              </a:rPr>
+              <a:t>일반적으로 </a:t>
+            </a:r>
+            <a:r>
+              <a:rPr lang="en-US" altLang="ko-KR" sz="1400" dirty="0">
+                <a:latin typeface="휴먼모음T" panose="02030504000101010101" pitchFamily="18" charset="-127"/>
+                <a:ea typeface="휴먼모음T" panose="02030504000101010101" pitchFamily="18" charset="-127"/>
+                <a:cs typeface="함초롬돋움" panose="020B0604000101010101" pitchFamily="50" charset="-127"/>
+              </a:rPr>
+              <a:t>5%</a:t>
+            </a:r>
+            <a:r>
+              <a:rPr lang="ko-KR" altLang="en-US" sz="1400" dirty="0">
+                <a:latin typeface="휴먼모음T" panose="02030504000101010101" pitchFamily="18" charset="-127"/>
+                <a:ea typeface="휴먼모음T" panose="02030504000101010101" pitchFamily="18" charset="-127"/>
+                <a:cs typeface="함초롬돋움" panose="020B0604000101010101" pitchFamily="50" charset="-127"/>
+              </a:rPr>
+              <a:t>나 </a:t>
+            </a:r>
+            <a:r>
+              <a:rPr lang="en-US" altLang="ko-KR" sz="1400" dirty="0">
+                <a:latin typeface="휴먼모음T" panose="02030504000101010101" pitchFamily="18" charset="-127"/>
+                <a:ea typeface="휴먼모음T" panose="02030504000101010101" pitchFamily="18" charset="-127"/>
+                <a:cs typeface="함초롬돋움" panose="020B0604000101010101" pitchFamily="50" charset="-127"/>
+              </a:rPr>
+              <a:t>2% </a:t>
+            </a:r>
+            <a:r>
+              <a:rPr lang="ko-KR" altLang="en-US" sz="1400" dirty="0">
+                <a:latin typeface="휴먼모음T" panose="02030504000101010101" pitchFamily="18" charset="-127"/>
+                <a:ea typeface="휴먼모음T" panose="02030504000101010101" pitchFamily="18" charset="-127"/>
+                <a:cs typeface="함초롬돋움" panose="020B0604000101010101" pitchFamily="50" charset="-127"/>
+              </a:rPr>
+              <a:t>미만은 되어야</a:t>
+            </a:r>
+            <a:r>
+              <a:rPr lang="en-US" altLang="ko-KR" sz="1400" dirty="0">
+                <a:latin typeface="휴먼모음T" panose="02030504000101010101" pitchFamily="18" charset="-127"/>
+                <a:ea typeface="휴먼모음T" panose="02030504000101010101" pitchFamily="18" charset="-127"/>
+                <a:cs typeface="함초롬돋움" panose="020B0604000101010101" pitchFamily="50" charset="-127"/>
+              </a:rPr>
+              <a:t>‘</a:t>
+            </a:r>
+            <a:r>
+              <a:rPr lang="ko-KR" altLang="en-US" sz="1400" dirty="0" err="1">
+                <a:latin typeface="휴먼모음T" panose="02030504000101010101" pitchFamily="18" charset="-127"/>
+                <a:ea typeface="휴먼모음T" panose="02030504000101010101" pitchFamily="18" charset="-127"/>
+                <a:cs typeface="함초롬돋움" panose="020B0604000101010101" pitchFamily="50" charset="-127"/>
+              </a:rPr>
+              <a:t>귀무가설이</a:t>
+            </a:r>
+            <a:r>
+              <a:rPr lang="ko-KR" altLang="en-US" sz="1400" dirty="0">
+                <a:latin typeface="휴먼모음T" panose="02030504000101010101" pitchFamily="18" charset="-127"/>
+                <a:ea typeface="휴먼모음T" panose="02030504000101010101" pitchFamily="18" charset="-127"/>
+                <a:cs typeface="함초롬돋움" panose="020B0604000101010101" pitchFamily="50" charset="-127"/>
+              </a:rPr>
+              <a:t> 틀리지 </a:t>
+            </a:r>
+            <a:r>
+              <a:rPr lang="ko-KR" altLang="en-US" sz="1400" dirty="0" err="1">
+                <a:latin typeface="휴먼모음T" panose="02030504000101010101" pitchFamily="18" charset="-127"/>
+                <a:ea typeface="휴먼모음T" panose="02030504000101010101" pitchFamily="18" charset="-127"/>
+                <a:cs typeface="함초롬돋움" panose="020B0604000101010101" pitchFamily="50" charset="-127"/>
+              </a:rPr>
+              <a:t>않고서여</a:t>
+            </a:r>
+            <a:r>
+              <a:rPr lang="ko-KR" altLang="en-US" sz="1400" dirty="0">
+                <a:latin typeface="휴먼모음T" panose="02030504000101010101" pitchFamily="18" charset="-127"/>
+                <a:ea typeface="휴먼모음T" panose="02030504000101010101" pitchFamily="18" charset="-127"/>
+                <a:cs typeface="함초롬돋움" panose="020B0604000101010101" pitchFamily="50" charset="-127"/>
+              </a:rPr>
+              <a:t> 어찌 이런 데이터가 나온단 말인가</a:t>
+            </a:r>
+            <a:r>
+              <a:rPr lang="en-US" altLang="ko-KR" sz="1400" dirty="0">
+                <a:latin typeface="휴먼모음T" panose="02030504000101010101" pitchFamily="18" charset="-127"/>
+                <a:ea typeface="휴먼모음T" panose="02030504000101010101" pitchFamily="18" charset="-127"/>
+                <a:cs typeface="함초롬돋움" panose="020B0604000101010101" pitchFamily="50" charset="-127"/>
+              </a:rPr>
+              <a:t>?’ </a:t>
+            </a:r>
+            <a:r>
+              <a:rPr lang="ko-KR" altLang="en-US" sz="1400" dirty="0">
+                <a:latin typeface="휴먼모음T" panose="02030504000101010101" pitchFamily="18" charset="-127"/>
+                <a:ea typeface="휴먼모음T" panose="02030504000101010101" pitchFamily="18" charset="-127"/>
+                <a:cs typeface="함초롬돋움" panose="020B0604000101010101" pitchFamily="50" charset="-127"/>
+              </a:rPr>
+              <a:t>라고 믿고 </a:t>
+            </a:r>
+            <a:r>
+              <a:rPr lang="ko-KR" altLang="en-US" sz="1400" dirty="0" err="1">
+                <a:latin typeface="휴먼모음T" panose="02030504000101010101" pitchFamily="18" charset="-127"/>
+                <a:ea typeface="휴먼모음T" panose="02030504000101010101" pitchFamily="18" charset="-127"/>
+                <a:cs typeface="함초롬돋움" panose="020B0604000101010101" pitchFamily="50" charset="-127"/>
+              </a:rPr>
+              <a:t>귀무가설을</a:t>
+            </a:r>
+            <a:r>
+              <a:rPr lang="ko-KR" altLang="en-US" sz="1400" dirty="0">
+                <a:latin typeface="휴먼모음T" panose="02030504000101010101" pitchFamily="18" charset="-127"/>
+                <a:ea typeface="휴먼모음T" panose="02030504000101010101" pitchFamily="18" charset="-127"/>
+                <a:cs typeface="함초롬돋움" panose="020B0604000101010101" pitchFamily="50" charset="-127"/>
+              </a:rPr>
+              <a:t> 기각하고 신약의 효과가 있다라고 결정할 수 있을 텐데</a:t>
+            </a:r>
+            <a:r>
+              <a:rPr lang="en-US" altLang="ko-KR" sz="1400" dirty="0">
+                <a:latin typeface="휴먼모음T" panose="02030504000101010101" pitchFamily="18" charset="-127"/>
+                <a:ea typeface="휴먼모음T" panose="02030504000101010101" pitchFamily="18" charset="-127"/>
+                <a:cs typeface="함초롬돋움" panose="020B0604000101010101" pitchFamily="50" charset="-127"/>
+              </a:rPr>
+              <a:t>……..</a:t>
+            </a:r>
+            <a:endParaRPr lang="ko-KR" altLang="en-US" sz="1400" dirty="0">
+              <a:latin typeface="휴먼모음T" panose="02030504000101010101" pitchFamily="18" charset="-127"/>
+              <a:ea typeface="휴먼모음T" panose="02030504000101010101" pitchFamily="18" charset="-127"/>
+              <a:cs typeface="함초롬돋움" panose="020B0604000101010101" pitchFamily="50" charset="-127"/>
+            </a:endParaRPr>
+          </a:p>
+        </p:txBody>
+      </p:sp>
+      <p:pic>
+        <p:nvPicPr>
+          <p:cNvPr id="6" name="그림 5"/>
+          <p:cNvPicPr>
+            <a:picLocks noChangeAspect="1"/>
+          </p:cNvPicPr>
+          <p:nvPr/>
+        </p:nvPicPr>
+        <p:blipFill>
+          <a:blip r:embed="rId4"/>
+          <a:stretch>
+            <a:fillRect/>
+          </a:stretch>
+        </p:blipFill>
+        <p:spPr>
+          <a:xfrm>
+            <a:off x="6308231" y="1628800"/>
+            <a:ext cx="5757427" cy="1251144"/>
+          </a:xfrm>
+          <a:prstGeom prst="rect">
+            <a:avLst/>
+          </a:prstGeom>
+        </p:spPr>
+      </p:pic>
+    </p:spTree>
+    <p:extLst>
+      <p:ext uri="{BB962C8B-B14F-4D97-AF65-F5344CB8AC3E}">
+        <p14:creationId xmlns:p14="http://schemas.microsoft.com/office/powerpoint/2010/main" val="2244855479"/>
+      </p:ext>
+    </p:extLst>
+  </p:cSld>
+  <p:clrMapOvr>
+    <a:masterClrMapping/>
+  </p:clrMapOvr>
+  <mc:AlternateContent xmlns:mc="http://schemas.openxmlformats.org/markup-compatibility/2006" xmlns:p14="http://schemas.microsoft.com/office/powerpoint/2010/main">
+    <mc:Choice Requires="p14">
+      <p:transition spd="med" p14:dur="700">
+        <p:fade/>
+      </p:transition>
+    </mc:Choice>
+    <mc:Fallback xmlns="">
+      <p:transition spd="med">
+        <p:fade/>
+      </p:transition>
+    </mc:Fallback>
+  </mc:AlternateContent>
+</p:sld>
+</file>
+
+<file path=ppt/slides/slide11.xml><?xml version="1.0" encoding="utf-8"?>
+<p:sld xmlns:a="http://schemas.openxmlformats.org/drawingml/2006/main" xmlns:r="http://schemas.openxmlformats.org/officeDocument/2006/relationships" xmlns:p="http://schemas.openxmlformats.org/presentationml/2006/main">
+  <p:cSld>
+    <p:spTree>
+      <p:nvGrpSpPr>
         <p:cNvPr id="1" name="">
           <a:extLst>
             <a:ext uri="{FF2B5EF4-FFF2-40B4-BE49-F238E27FC236}">
@@ -5600,7 +6187,7 @@
             <a:pPr rtl="0"/>
             <a:fld id="{A3F31473-23EB-4724-8B59-FE6D21D89FA4}" type="slidenum">
               <a:rPr lang="en-US" altLang="ko-KR" noProof="0" smtClean="0"/>
-              <a:t>10</a:t>
+              <a:t>11</a:t>
             </a:fld>
             <a:endParaRPr lang="en-US" altLang="ko-KR" noProof="0" dirty="0"/>
           </a:p>
@@ -5792,7 +6379,7 @@
                 <a:latin typeface="휴먼모음T" panose="02030504000101010101" pitchFamily="18" charset="-127"/>
                 <a:ea typeface="휴먼모음T" panose="02030504000101010101" pitchFamily="18" charset="-127"/>
               </a:rPr>
-              <a:t>귀무가설($H_0$): 목요일과 금요일의 평균 팁 금액은 차이가 없다.</a:t>
+              <a:t>귀무가설(H0): 목요일과 금요일의 평균 팁 금액은 차이가 없다.</a:t>
             </a:r>
           </a:p>
           <a:p>
@@ -5814,7 +6401,7 @@
                 <a:latin typeface="휴먼모음T" panose="02030504000101010101" pitchFamily="18" charset="-127"/>
                 <a:ea typeface="휴먼모음T" panose="02030504000101010101" pitchFamily="18" charset="-127"/>
               </a:rPr>
-              <a:t>대립가설($H_1$): 목요일과 금요일의 평균 팁 금액은 차이가 있다.</a:t>
+              <a:t>대립가설(H1): 목요일과 금요일의 평균 팁 금액은 차이가 있다.</a:t>
             </a:r>
           </a:p>
           <a:p>
@@ -6105,7 +6692,7 @@
 </p:sld>
 </file>
 
-<file path=ppt/slides/slide11.xml><?xml version="1.0" encoding="utf-8"?>
+<file path=ppt/slides/slide12.xml><?xml version="1.0" encoding="utf-8"?>
 <p:sld xmlns:a="http://schemas.openxmlformats.org/drawingml/2006/main" xmlns:r="http://schemas.openxmlformats.org/officeDocument/2006/relationships" xmlns:p="http://schemas.openxmlformats.org/presentationml/2006/main">
   <p:cSld>
     <p:spTree>
@@ -6140,7 +6727,7 @@
             <a:pPr rtl="0"/>
             <a:fld id="{A3F31473-23EB-4724-8B59-FE6D21D89FA4}" type="slidenum">
               <a:rPr lang="en-US" altLang="ko-KR" noProof="0" smtClean="0"/>
-              <a:t>11</a:t>
+              <a:t>12</a:t>
             </a:fld>
             <a:endParaRPr lang="en-US" altLang="ko-KR" noProof="0" dirty="0"/>
           </a:p>
@@ -6195,7 +6782,7 @@
 </p:sld>
 </file>
 
-<file path=ppt/slides/slide12.xml><?xml version="1.0" encoding="utf-8"?>
+<file path=ppt/slides/slide13.xml><?xml version="1.0" encoding="utf-8"?>
 <p:sld xmlns:a="http://schemas.openxmlformats.org/drawingml/2006/main" xmlns:r="http://schemas.openxmlformats.org/officeDocument/2006/relationships" xmlns:p="http://schemas.openxmlformats.org/presentationml/2006/main">
   <p:cSld>
     <p:spTree>
@@ -6230,7 +6817,7 @@
             <a:pPr rtl="0"/>
             <a:fld id="{A3F31473-23EB-4724-8B59-FE6D21D89FA4}" type="slidenum">
               <a:rPr lang="en-US" altLang="ko-KR" noProof="0" smtClean="0"/>
-              <a:t>12</a:t>
+              <a:t>13</a:t>
             </a:fld>
             <a:endParaRPr lang="en-US" altLang="ko-KR" noProof="0" dirty="0"/>
           </a:p>
@@ -6285,7 +6872,7 @@
 </p:sld>
 </file>
 
-<file path=ppt/slides/slide13.xml><?xml version="1.0" encoding="utf-8"?>
+<file path=ppt/slides/slide14.xml><?xml version="1.0" encoding="utf-8"?>
 <p:sld xmlns:a="http://schemas.openxmlformats.org/drawingml/2006/main" xmlns:r="http://schemas.openxmlformats.org/officeDocument/2006/relationships" xmlns:p="http://schemas.openxmlformats.org/presentationml/2006/main">
   <p:cSld>
     <p:spTree>
@@ -6320,7 +6907,7 @@
             <a:pPr rtl="0"/>
             <a:fld id="{A3F31473-23EB-4724-8B59-FE6D21D89FA4}" type="slidenum">
               <a:rPr lang="en-US" altLang="ko-KR" noProof="0" smtClean="0"/>
-              <a:t>13</a:t>
+              <a:t>14</a:t>
             </a:fld>
             <a:endParaRPr lang="en-US" altLang="ko-KR" noProof="0" dirty="0"/>
           </a:p>
@@ -6375,7 +6962,7 @@
 </p:sld>
 </file>
 
-<file path=ppt/slides/slide14.xml><?xml version="1.0" encoding="utf-8"?>
+<file path=ppt/slides/slide15.xml><?xml version="1.0" encoding="utf-8"?>
 <p:sld xmlns:a="http://schemas.openxmlformats.org/drawingml/2006/main" xmlns:r="http://schemas.openxmlformats.org/officeDocument/2006/relationships" xmlns:p="http://schemas.openxmlformats.org/presentationml/2006/main">
   <p:cSld>
     <p:spTree>
@@ -6410,7 +6997,7 @@
             <a:pPr rtl="0"/>
             <a:fld id="{A3F31473-23EB-4724-8B59-FE6D21D89FA4}" type="slidenum">
               <a:rPr lang="en-US" altLang="ko-KR" noProof="0" smtClean="0"/>
-              <a:t>14</a:t>
+              <a:t>15</a:t>
             </a:fld>
             <a:endParaRPr lang="en-US" altLang="ko-KR" noProof="0" dirty="0"/>
           </a:p>
@@ -6522,8 +7109,8 @@
         </p:blipFill>
         <p:spPr>
           <a:xfrm>
-            <a:off x="621804" y="1714861"/>
-            <a:ext cx="4569229" cy="4119579"/>
+            <a:off x="621805" y="2738266"/>
+            <a:ext cx="3721230" cy="3355030"/>
           </a:xfrm>
           <a:prstGeom prst="rect">
             <a:avLst/>
@@ -6546,8 +7133,8 @@
         </p:blipFill>
         <p:spPr>
           <a:xfrm>
-            <a:off x="7307952" y="1714861"/>
-            <a:ext cx="4257040" cy="4068244"/>
+            <a:off x="7307952" y="2738265"/>
+            <a:ext cx="3466980" cy="3313222"/>
           </a:xfrm>
           <a:prstGeom prst="rect">
             <a:avLst/>
@@ -6562,8 +7149,8 @@
         </p:nvSpPr>
         <p:spPr>
           <a:xfrm>
-            <a:off x="1650305" y="1071617"/>
-            <a:ext cx="2512226" cy="461665"/>
+            <a:off x="1650305" y="2095022"/>
+            <a:ext cx="2045984" cy="369332"/>
           </a:xfrm>
           <a:prstGeom prst="rect">
             <a:avLst/>
@@ -6571,24 +7158,23 @@
           <a:noFill/>
         </p:spPr>
         <p:txBody>
-          <a:bodyPr wrap="none" rtlCol="0">
+          <a:bodyPr wrap="square" rtlCol="0">
             <a:spAutoFit/>
           </a:bodyPr>
           <a:lstStyle/>
           <a:p>
             <a:r>
-              <a:rPr lang="ko-KR" altLang="en-US" sz="2400" b="1" dirty="0"/>
+              <a:rPr lang="ko-KR" altLang="en-US" b="1" dirty="0"/>
               <a:t>천동설 </a:t>
             </a:r>
             <a:r>
-              <a:rPr lang="en-US" altLang="ko-KR" sz="2400" b="1" dirty="0"/>
+              <a:rPr lang="en-US" altLang="ko-KR" b="1" dirty="0"/>
               <a:t>: </a:t>
             </a:r>
             <a:r>
-              <a:rPr lang="ko-KR" altLang="en-US" sz="2400" b="1" dirty="0" err="1"/>
+              <a:rPr lang="ko-KR" altLang="en-US" b="1" dirty="0"/>
               <a:t>귀무가설</a:t>
             </a:r>
-            <a:endParaRPr lang="ko-KR" altLang="en-US" sz="2400" b="1" dirty="0"/>
           </a:p>
         </p:txBody>
       </p:sp>
@@ -6600,8 +7186,8 @@
         </p:nvSpPr>
         <p:spPr>
           <a:xfrm>
-            <a:off x="8244056" y="1071616"/>
-            <a:ext cx="2512226" cy="461665"/>
+            <a:off x="8244056" y="2095021"/>
+            <a:ext cx="2045984" cy="369332"/>
           </a:xfrm>
           <a:prstGeom prst="rect">
             <a:avLst/>
@@ -6609,37 +7195,39 @@
           <a:noFill/>
         </p:spPr>
         <p:txBody>
-          <a:bodyPr wrap="none" rtlCol="0">
+          <a:bodyPr wrap="square" rtlCol="0">
             <a:spAutoFit/>
           </a:bodyPr>
           <a:lstStyle/>
           <a:p>
             <a:r>
-              <a:rPr lang="ko-KR" altLang="en-US" sz="2400" b="1" dirty="0"/>
+              <a:rPr lang="ko-KR" altLang="en-US" b="1" dirty="0"/>
               <a:t>지동설 </a:t>
             </a:r>
             <a:r>
-              <a:rPr lang="en-US" altLang="ko-KR" sz="2400" b="1" dirty="0"/>
+              <a:rPr lang="en-US" altLang="ko-KR" b="1" dirty="0"/>
               <a:t>: </a:t>
             </a:r>
             <a:r>
-              <a:rPr lang="ko-KR" altLang="en-US" sz="2400" b="1" dirty="0" err="1"/>
+              <a:rPr lang="ko-KR" altLang="en-US" b="1" dirty="0" err="1"/>
               <a:t>대립가설</a:t>
             </a:r>
-            <a:endParaRPr lang="ko-KR" altLang="en-US" sz="2400" b="1" dirty="0"/>
+            <a:endParaRPr lang="ko-KR" altLang="en-US" b="1" dirty="0"/>
           </a:p>
         </p:txBody>
       </p:sp>
       <p:cxnSp>
         <p:nvCxnSpPr>
           <p:cNvPr id="9" name="직선 화살표 연결선 8"/>
-          <p:cNvCxnSpPr/>
+          <p:cNvCxnSpPr>
+            <a:cxnSpLocks/>
+          </p:cNvCxnSpPr>
           <p:nvPr/>
         </p:nvCxnSpPr>
         <p:spPr>
           <a:xfrm>
-            <a:off x="5518348" y="3645024"/>
-            <a:ext cx="1368152" cy="0"/>
+            <a:off x="5302324" y="4509120"/>
+            <a:ext cx="1114238" cy="0"/>
           </a:xfrm>
           <a:prstGeom prst="straightConnector1">
             <a:avLst/>
@@ -6664,6 +7252,139 @@
           </a:fontRef>
         </p:style>
       </p:cxnSp>
+      <p:sp>
+        <p:nvSpPr>
+          <p:cNvPr id="3" name="TextBox 2">
+            <a:extLst>
+              <a:ext uri="{FF2B5EF4-FFF2-40B4-BE49-F238E27FC236}">
+                <a16:creationId xmlns:a16="http://schemas.microsoft.com/office/drawing/2014/main" id="{B1D92C58-8C4D-6C08-A392-EF301B1BC5A4}"/>
+              </a:ext>
+            </a:extLst>
+          </p:cNvPr>
+          <p:cNvSpPr txBox="1"/>
+          <p:nvPr/>
+        </p:nvSpPr>
+        <p:spPr>
+          <a:xfrm>
+            <a:off x="591294" y="423483"/>
+            <a:ext cx="11191750" cy="873124"/>
+          </a:xfrm>
+          <a:prstGeom prst="rect">
+            <a:avLst/>
+          </a:prstGeom>
+          <a:noFill/>
+        </p:spPr>
+        <p:txBody>
+          <a:bodyPr wrap="square">
+            <a:spAutoFit/>
+          </a:bodyPr>
+          <a:lstStyle/>
+          <a:p>
+            <a:pPr marL="285750" indent="-285750">
+              <a:lnSpc>
+                <a:spcPct val="150000"/>
+              </a:lnSpc>
+              <a:buFont typeface="Wingdings" panose="05000000000000000000" pitchFamily="2" charset="2"/>
+              <a:buChar char="v"/>
+            </a:pPr>
+            <a:r>
+              <a:rPr lang="ko-KR" altLang="en-US" dirty="0">
+                <a:latin typeface="한컴 말랑말랑 Bold" panose="020F0803000000000000" pitchFamily="50" charset="-127"/>
+                <a:ea typeface="한컴 말랑말랑 Bold" panose="020F0803000000000000" pitchFamily="50" charset="-127"/>
+              </a:rPr>
+              <a:t>천동설의</a:t>
+            </a:r>
+            <a:r>
+              <a:rPr lang="en-US" altLang="ko-KR" dirty="0">
+                <a:latin typeface="한컴 말랑말랑 Bold" panose="020F0803000000000000" pitchFamily="50" charset="-127"/>
+                <a:ea typeface="한컴 말랑말랑 Bold" panose="020F0803000000000000" pitchFamily="50" charset="-127"/>
+              </a:rPr>
+              <a:t> </a:t>
+            </a:r>
+            <a:r>
+              <a:rPr lang="ko-KR" altLang="en-US" dirty="0">
+                <a:latin typeface="한컴 말랑말랑 Bold" panose="020F0803000000000000" pitchFamily="50" charset="-127"/>
+                <a:ea typeface="한컴 말랑말랑 Bold" panose="020F0803000000000000" pitchFamily="50" charset="-127"/>
+              </a:rPr>
+              <a:t>확률분포를 가정하고 표본</a:t>
+            </a:r>
+            <a:r>
+              <a:rPr lang="en-US" altLang="ko-KR" dirty="0">
+                <a:latin typeface="한컴 말랑말랑 Bold" panose="020F0803000000000000" pitchFamily="50" charset="-127"/>
+                <a:ea typeface="한컴 말랑말랑 Bold" panose="020F0803000000000000" pitchFamily="50" charset="-127"/>
+              </a:rPr>
+              <a:t>(Sample)</a:t>
+            </a:r>
+            <a:r>
+              <a:rPr lang="ko-KR" altLang="en-US" dirty="0">
+                <a:latin typeface="한컴 말랑말랑 Bold" panose="020F0803000000000000" pitchFamily="50" charset="-127"/>
+                <a:ea typeface="한컴 말랑말랑 Bold" panose="020F0803000000000000" pitchFamily="50" charset="-127"/>
+              </a:rPr>
+              <a:t>으로부터 얻은 정보</a:t>
+            </a:r>
+            <a:r>
+              <a:rPr lang="en-US" altLang="ko-KR" dirty="0">
+                <a:latin typeface="한컴 말랑말랑 Bold" panose="020F0803000000000000" pitchFamily="50" charset="-127"/>
+                <a:ea typeface="한컴 말랑말랑 Bold" panose="020F0803000000000000" pitchFamily="50" charset="-127"/>
+              </a:rPr>
+              <a:t>(</a:t>
+            </a:r>
+            <a:r>
+              <a:rPr lang="ko-KR" altLang="en-US" dirty="0">
+                <a:latin typeface="한컴 말랑말랑 Bold" panose="020F0803000000000000" pitchFamily="50" charset="-127"/>
+                <a:ea typeface="한컴 말랑말랑 Bold" panose="020F0803000000000000" pitchFamily="50" charset="-127"/>
+              </a:rPr>
+              <a:t>통계량</a:t>
+            </a:r>
+            <a:r>
+              <a:rPr lang="en-US" altLang="ko-KR" dirty="0">
+                <a:latin typeface="한컴 말랑말랑 Bold" panose="020F0803000000000000" pitchFamily="50" charset="-127"/>
+                <a:ea typeface="한컴 말랑말랑 Bold" panose="020F0803000000000000" pitchFamily="50" charset="-127"/>
+              </a:rPr>
+              <a:t>)</a:t>
+            </a:r>
+            <a:r>
+              <a:rPr lang="ko-KR" altLang="en-US" dirty="0">
+                <a:latin typeface="한컴 말랑말랑 Bold" panose="020F0803000000000000" pitchFamily="50" charset="-127"/>
+                <a:ea typeface="한컴 말랑말랑 Bold" panose="020F0803000000000000" pitchFamily="50" charset="-127"/>
+              </a:rPr>
+              <a:t>를 바탕으로 얼마나 천동설</a:t>
+            </a:r>
+            <a:r>
+              <a:rPr lang="en-US" altLang="ko-KR" dirty="0">
+                <a:latin typeface="한컴 말랑말랑 Bold" panose="020F0803000000000000" pitchFamily="50" charset="-127"/>
+                <a:ea typeface="한컴 말랑말랑 Bold" panose="020F0803000000000000" pitchFamily="50" charset="-127"/>
+              </a:rPr>
+              <a:t>(</a:t>
+            </a:r>
+            <a:r>
+              <a:rPr lang="ko-KR" altLang="en-US" dirty="0">
+                <a:latin typeface="한컴 말랑말랑 Bold" panose="020F0803000000000000" pitchFamily="50" charset="-127"/>
+                <a:ea typeface="한컴 말랑말랑 Bold" panose="020F0803000000000000" pitchFamily="50" charset="-127"/>
+              </a:rPr>
+              <a:t>귀무가설</a:t>
+            </a:r>
+            <a:r>
+              <a:rPr lang="en-US" altLang="ko-KR" dirty="0">
+                <a:latin typeface="한컴 말랑말랑 Bold" panose="020F0803000000000000" pitchFamily="50" charset="-127"/>
+                <a:ea typeface="한컴 말랑말랑 Bold" panose="020F0803000000000000" pitchFamily="50" charset="-127"/>
+              </a:rPr>
+              <a:t>)</a:t>
+            </a:r>
+            <a:r>
+              <a:rPr lang="ko-KR" altLang="en-US" dirty="0">
+                <a:latin typeface="한컴 말랑말랑 Bold" panose="020F0803000000000000" pitchFamily="50" charset="-127"/>
+                <a:ea typeface="한컴 말랑말랑 Bold" panose="020F0803000000000000" pitchFamily="50" charset="-127"/>
+              </a:rPr>
+              <a:t>과 다른 지를 검증하는 것이 목적</a:t>
+            </a:r>
+            <a:endParaRPr lang="en-US" altLang="ko-KR" dirty="0">
+              <a:latin typeface="한컴 말랑말랑 Bold" panose="020F0803000000000000" pitchFamily="50" charset="-127"/>
+              <a:ea typeface="한컴 말랑말랑 Bold" panose="020F0803000000000000" pitchFamily="50" charset="-127"/>
+            </a:endParaRPr>
+          </a:p>
+        </p:txBody>
+      </p:sp>
     </p:spTree>
     <p:extLst>
       <p:ext uri="{BB962C8B-B14F-4D97-AF65-F5344CB8AC3E}">
@@ -6694,6 +7415,575 @@
   <p:cSld>
     <p:spTree>
       <p:nvGrpSpPr>
+        <p:cNvPr id="1" name="">
+          <a:extLst>
+            <a:ext uri="{FF2B5EF4-FFF2-40B4-BE49-F238E27FC236}">
+              <a16:creationId xmlns:a16="http://schemas.microsoft.com/office/drawing/2014/main" id="{BF786455-0349-1D80-A8E2-0A318591601F}"/>
+            </a:ext>
+          </a:extLst>
+        </p:cNvPr>
+        <p:cNvGrpSpPr/>
+        <p:nvPr/>
+      </p:nvGrpSpPr>
+      <p:grpSpPr>
+        <a:xfrm>
+          <a:off x="0" y="0"/>
+          <a:ext cx="0" cy="0"/>
+          <a:chOff x="0" y="0"/>
+          <a:chExt cx="0" cy="0"/>
+        </a:xfrm>
+      </p:grpSpPr>
+      <p:sp>
+        <p:nvSpPr>
+          <p:cNvPr id="8" name="슬라이드 번호 개체 틀 7">
+            <a:extLst>
+              <a:ext uri="{FF2B5EF4-FFF2-40B4-BE49-F238E27FC236}">
+                <a16:creationId xmlns:a16="http://schemas.microsoft.com/office/drawing/2014/main" id="{526B6010-4F6A-4546-75BF-00EA87DC695C}"/>
+              </a:ext>
+            </a:extLst>
+          </p:cNvPr>
+          <p:cNvSpPr>
+            <a:spLocks noGrp="1"/>
+          </p:cNvSpPr>
+          <p:nvPr>
+            <p:ph type="sldNum" sz="quarter" idx="12"/>
+          </p:nvPr>
+        </p:nvSpPr>
+        <p:spPr/>
+        <p:txBody>
+          <a:bodyPr/>
+          <a:lstStyle/>
+          <a:p>
+            <a:pPr rtl="0"/>
+            <a:fld id="{A3F31473-23EB-4724-8B59-FE6D21D89FA4}" type="slidenum">
+              <a:rPr lang="en-US" altLang="ko-KR" noProof="0" smtClean="0"/>
+              <a:t>3</a:t>
+            </a:fld>
+            <a:endParaRPr lang="en-US" altLang="ko-KR" noProof="0" dirty="0"/>
+          </a:p>
+        </p:txBody>
+      </p:sp>
+      <p:sp>
+        <p:nvSpPr>
+          <p:cNvPr id="3" name="TextBox 2">
+            <a:extLst>
+              <a:ext uri="{FF2B5EF4-FFF2-40B4-BE49-F238E27FC236}">
+                <a16:creationId xmlns:a16="http://schemas.microsoft.com/office/drawing/2014/main" id="{02212207-AC1E-EB08-543E-0AF3681D85E7}"/>
+              </a:ext>
+            </a:extLst>
+          </p:cNvPr>
+          <p:cNvSpPr txBox="1"/>
+          <p:nvPr/>
+        </p:nvSpPr>
+        <p:spPr>
+          <a:xfrm>
+            <a:off x="591294" y="423483"/>
+            <a:ext cx="11191750" cy="873124"/>
+          </a:xfrm>
+          <a:prstGeom prst="rect">
+            <a:avLst/>
+          </a:prstGeom>
+          <a:noFill/>
+        </p:spPr>
+        <p:txBody>
+          <a:bodyPr wrap="square">
+            <a:spAutoFit/>
+          </a:bodyPr>
+          <a:lstStyle/>
+          <a:p>
+            <a:pPr marL="285750" indent="-285750">
+              <a:lnSpc>
+                <a:spcPct val="150000"/>
+              </a:lnSpc>
+              <a:buFont typeface="Wingdings" panose="05000000000000000000" pitchFamily="2" charset="2"/>
+              <a:buChar char="v"/>
+            </a:pPr>
+            <a:r>
+              <a:rPr lang="ko-KR" altLang="en-US" dirty="0">
+                <a:latin typeface="한컴 말랑말랑 Bold" panose="020F0803000000000000" pitchFamily="50" charset="-127"/>
+                <a:ea typeface="한컴 말랑말랑 Bold" panose="020F0803000000000000" pitchFamily="50" charset="-127"/>
+              </a:rPr>
+              <a:t>천동설의</a:t>
+            </a:r>
+            <a:r>
+              <a:rPr lang="en-US" altLang="ko-KR" dirty="0">
+                <a:latin typeface="한컴 말랑말랑 Bold" panose="020F0803000000000000" pitchFamily="50" charset="-127"/>
+                <a:ea typeface="한컴 말랑말랑 Bold" panose="020F0803000000000000" pitchFamily="50" charset="-127"/>
+              </a:rPr>
+              <a:t> </a:t>
+            </a:r>
+            <a:r>
+              <a:rPr lang="ko-KR" altLang="en-US" dirty="0">
+                <a:latin typeface="한컴 말랑말랑 Bold" panose="020F0803000000000000" pitchFamily="50" charset="-127"/>
+                <a:ea typeface="한컴 말랑말랑 Bold" panose="020F0803000000000000" pitchFamily="50" charset="-127"/>
+              </a:rPr>
+              <a:t>확률분포를 가정하고 표본</a:t>
+            </a:r>
+            <a:r>
+              <a:rPr lang="en-US" altLang="ko-KR" dirty="0">
+                <a:latin typeface="한컴 말랑말랑 Bold" panose="020F0803000000000000" pitchFamily="50" charset="-127"/>
+                <a:ea typeface="한컴 말랑말랑 Bold" panose="020F0803000000000000" pitchFamily="50" charset="-127"/>
+              </a:rPr>
+              <a:t>(Sample)</a:t>
+            </a:r>
+            <a:r>
+              <a:rPr lang="ko-KR" altLang="en-US" dirty="0">
+                <a:latin typeface="한컴 말랑말랑 Bold" panose="020F0803000000000000" pitchFamily="50" charset="-127"/>
+                <a:ea typeface="한컴 말랑말랑 Bold" panose="020F0803000000000000" pitchFamily="50" charset="-127"/>
+              </a:rPr>
+              <a:t>으로부터 얻은 정보</a:t>
+            </a:r>
+            <a:r>
+              <a:rPr lang="en-US" altLang="ko-KR" dirty="0">
+                <a:latin typeface="한컴 말랑말랑 Bold" panose="020F0803000000000000" pitchFamily="50" charset="-127"/>
+                <a:ea typeface="한컴 말랑말랑 Bold" panose="020F0803000000000000" pitchFamily="50" charset="-127"/>
+              </a:rPr>
+              <a:t>(</a:t>
+            </a:r>
+            <a:r>
+              <a:rPr lang="ko-KR" altLang="en-US" dirty="0">
+                <a:latin typeface="한컴 말랑말랑 Bold" panose="020F0803000000000000" pitchFamily="50" charset="-127"/>
+                <a:ea typeface="한컴 말랑말랑 Bold" panose="020F0803000000000000" pitchFamily="50" charset="-127"/>
+              </a:rPr>
+              <a:t>통계량</a:t>
+            </a:r>
+            <a:r>
+              <a:rPr lang="en-US" altLang="ko-KR" dirty="0">
+                <a:latin typeface="한컴 말랑말랑 Bold" panose="020F0803000000000000" pitchFamily="50" charset="-127"/>
+                <a:ea typeface="한컴 말랑말랑 Bold" panose="020F0803000000000000" pitchFamily="50" charset="-127"/>
+              </a:rPr>
+              <a:t>)</a:t>
+            </a:r>
+            <a:r>
+              <a:rPr lang="ko-KR" altLang="en-US" dirty="0">
+                <a:latin typeface="한컴 말랑말랑 Bold" panose="020F0803000000000000" pitchFamily="50" charset="-127"/>
+                <a:ea typeface="한컴 말랑말랑 Bold" panose="020F0803000000000000" pitchFamily="50" charset="-127"/>
+              </a:rPr>
+              <a:t>를 바탕으로 얼마나 천동설</a:t>
+            </a:r>
+            <a:r>
+              <a:rPr lang="en-US" altLang="ko-KR" dirty="0">
+                <a:latin typeface="한컴 말랑말랑 Bold" panose="020F0803000000000000" pitchFamily="50" charset="-127"/>
+                <a:ea typeface="한컴 말랑말랑 Bold" panose="020F0803000000000000" pitchFamily="50" charset="-127"/>
+              </a:rPr>
+              <a:t>(</a:t>
+            </a:r>
+            <a:r>
+              <a:rPr lang="ko-KR" altLang="en-US" dirty="0">
+                <a:latin typeface="한컴 말랑말랑 Bold" panose="020F0803000000000000" pitchFamily="50" charset="-127"/>
+                <a:ea typeface="한컴 말랑말랑 Bold" panose="020F0803000000000000" pitchFamily="50" charset="-127"/>
+              </a:rPr>
+              <a:t>귀무가설</a:t>
+            </a:r>
+            <a:r>
+              <a:rPr lang="en-US" altLang="ko-KR" dirty="0">
+                <a:latin typeface="한컴 말랑말랑 Bold" panose="020F0803000000000000" pitchFamily="50" charset="-127"/>
+                <a:ea typeface="한컴 말랑말랑 Bold" panose="020F0803000000000000" pitchFamily="50" charset="-127"/>
+              </a:rPr>
+              <a:t>)</a:t>
+            </a:r>
+            <a:r>
+              <a:rPr lang="ko-KR" altLang="en-US" dirty="0">
+                <a:latin typeface="한컴 말랑말랑 Bold" panose="020F0803000000000000" pitchFamily="50" charset="-127"/>
+                <a:ea typeface="한컴 말랑말랑 Bold" panose="020F0803000000000000" pitchFamily="50" charset="-127"/>
+              </a:rPr>
+              <a:t>과 다른 지를 검증하는 것이 목적</a:t>
+            </a:r>
+            <a:endParaRPr lang="en-US" altLang="ko-KR" dirty="0">
+              <a:latin typeface="한컴 말랑말랑 Bold" panose="020F0803000000000000" pitchFamily="50" charset="-127"/>
+              <a:ea typeface="한컴 말랑말랑 Bold" panose="020F0803000000000000" pitchFamily="50" charset="-127"/>
+            </a:endParaRPr>
+          </a:p>
+        </p:txBody>
+      </p:sp>
+      <p:sp>
+        <p:nvSpPr>
+          <p:cNvPr id="20" name="TextBox 19">
+            <a:extLst>
+              <a:ext uri="{FF2B5EF4-FFF2-40B4-BE49-F238E27FC236}">
+                <a16:creationId xmlns:a16="http://schemas.microsoft.com/office/drawing/2014/main" id="{F061C719-90D1-FA3E-A678-6363C4D23B70}"/>
+              </a:ext>
+            </a:extLst>
+          </p:cNvPr>
+          <p:cNvSpPr txBox="1"/>
+          <p:nvPr/>
+        </p:nvSpPr>
+        <p:spPr>
+          <a:xfrm>
+            <a:off x="798325" y="5446006"/>
+            <a:ext cx="10597540" cy="786369"/>
+          </a:xfrm>
+          <a:prstGeom prst="rect">
+            <a:avLst/>
+          </a:prstGeom>
+          <a:noFill/>
+        </p:spPr>
+        <p:txBody>
+          <a:bodyPr wrap="square">
+            <a:spAutoFit/>
+          </a:bodyPr>
+          <a:lstStyle/>
+          <a:p>
+            <a:pPr marL="285750" indent="-285750">
+              <a:lnSpc>
+                <a:spcPct val="150000"/>
+              </a:lnSpc>
+              <a:buFont typeface="Wingdings" panose="05000000000000000000" pitchFamily="2" charset="2"/>
+              <a:buChar char="v"/>
+            </a:pPr>
+            <a:r>
+              <a:rPr lang="ko-KR" altLang="en-US" sz="1600" b="0" i="1" dirty="0">
+                <a:solidFill>
+                  <a:srgbClr val="0070C0"/>
+                </a:solidFill>
+                <a:effectLst/>
+                <a:latin typeface="한컴 말랑말랑 Bold" panose="020F0803000000000000" pitchFamily="50" charset="-127"/>
+                <a:ea typeface="한컴 말랑말랑 Bold" panose="020F0803000000000000" pitchFamily="50" charset="-127"/>
+              </a:rPr>
+              <a:t>직관적 이해 </a:t>
+            </a:r>
+            <a:r>
+              <a:rPr lang="en-US" altLang="ko-KR" sz="1600" b="0" i="1" dirty="0">
+                <a:solidFill>
+                  <a:srgbClr val="0070C0"/>
+                </a:solidFill>
+                <a:effectLst/>
+                <a:latin typeface="한컴 말랑말랑 Bold" panose="020F0803000000000000" pitchFamily="50" charset="-127"/>
+                <a:ea typeface="한컴 말랑말랑 Bold" panose="020F0803000000000000" pitchFamily="50" charset="-127"/>
+              </a:rPr>
+              <a:t>: </a:t>
+            </a:r>
+            <a:r>
+              <a:rPr lang="ko-KR" altLang="en-US" sz="1600" b="1" i="1" dirty="0">
+                <a:solidFill>
+                  <a:srgbClr val="FF0000"/>
+                </a:solidFill>
+                <a:effectLst/>
+                <a:latin typeface="한컴 말랑말랑 Bold" panose="020F0803000000000000" pitchFamily="50" charset="-127"/>
+                <a:ea typeface="한컴 말랑말랑 Bold" panose="020F0803000000000000" pitchFamily="50" charset="-127"/>
+              </a:rPr>
+              <a:t>귀무가설이 </a:t>
+            </a:r>
+            <a:r>
+              <a:rPr lang="en-US" altLang="ko-KR" sz="1600" b="1" i="1" dirty="0">
+                <a:solidFill>
+                  <a:srgbClr val="FF0000"/>
+                </a:solidFill>
+                <a:effectLst/>
+                <a:latin typeface="한컴 말랑말랑 Bold" panose="020F0803000000000000" pitchFamily="50" charset="-127"/>
+                <a:ea typeface="한컴 말랑말랑 Bold" panose="020F0803000000000000" pitchFamily="50" charset="-127"/>
+              </a:rPr>
+              <a:t>Adelie </a:t>
+            </a:r>
+            <a:r>
+              <a:rPr lang="ko-KR" altLang="en-US" sz="1600" b="1" i="1" dirty="0">
+                <a:solidFill>
+                  <a:srgbClr val="FF0000"/>
+                </a:solidFill>
+                <a:effectLst/>
+                <a:latin typeface="한컴 말랑말랑 Bold" panose="020F0803000000000000" pitchFamily="50" charset="-127"/>
+                <a:ea typeface="한컴 말랑말랑 Bold" panose="020F0803000000000000" pitchFamily="50" charset="-127"/>
+              </a:rPr>
+              <a:t>라고 가정하고 </a:t>
+            </a:r>
+            <a:r>
+              <a:rPr lang="ko-KR" altLang="en-US" sz="1600" b="0" i="1" dirty="0" err="1">
+                <a:solidFill>
+                  <a:srgbClr val="0070C0"/>
+                </a:solidFill>
+                <a:effectLst/>
+                <a:latin typeface="한컴 말랑말랑 Bold" panose="020F0803000000000000" pitchFamily="50" charset="-127"/>
+                <a:ea typeface="한컴 말랑말랑 Bold" panose="020F0803000000000000" pitchFamily="50" charset="-127"/>
+              </a:rPr>
+              <a:t>표본를</a:t>
+            </a:r>
+            <a:r>
+              <a:rPr lang="ko-KR" altLang="en-US" sz="1600" b="0" i="1" dirty="0">
+                <a:solidFill>
+                  <a:srgbClr val="0070C0"/>
+                </a:solidFill>
+                <a:effectLst/>
+                <a:latin typeface="한컴 말랑말랑 Bold" panose="020F0803000000000000" pitchFamily="50" charset="-127"/>
+                <a:ea typeface="한컴 말랑말랑 Bold" panose="020F0803000000000000" pitchFamily="50" charset="-127"/>
+              </a:rPr>
+              <a:t> 추출하였더니 </a:t>
+            </a:r>
+            <a:r>
+              <a:rPr lang="en-US" altLang="ko-KR" sz="1600" b="0" i="1" dirty="0">
+                <a:solidFill>
+                  <a:srgbClr val="0070C0"/>
+                </a:solidFill>
+                <a:effectLst/>
+                <a:latin typeface="한컴 말랑말랑 Bold" panose="020F0803000000000000" pitchFamily="50" charset="-127"/>
+                <a:ea typeface="한컴 말랑말랑 Bold" panose="020F0803000000000000" pitchFamily="50" charset="-127"/>
+              </a:rPr>
+              <a:t>47, 48, 50, 55</a:t>
+            </a:r>
+            <a:r>
+              <a:rPr lang="ko-KR" altLang="en-US" sz="1600" b="0" i="1" dirty="0">
+                <a:solidFill>
+                  <a:srgbClr val="0070C0"/>
+                </a:solidFill>
+                <a:effectLst/>
+                <a:latin typeface="한컴 말랑말랑 Bold" panose="020F0803000000000000" pitchFamily="50" charset="-127"/>
+                <a:ea typeface="한컴 말랑말랑 Bold" panose="020F0803000000000000" pitchFamily="50" charset="-127"/>
+              </a:rPr>
+              <a:t>가 나오면 이 데이터가 </a:t>
+            </a:r>
+            <a:r>
+              <a:rPr lang="en-US" altLang="ko-KR" sz="1600" i="1" dirty="0">
+                <a:solidFill>
+                  <a:srgbClr val="0070C0"/>
+                </a:solidFill>
+                <a:latin typeface="한컴 말랑말랑 Bold" panose="020F0803000000000000" pitchFamily="50" charset="-127"/>
+                <a:ea typeface="한컴 말랑말랑 Bold" panose="020F0803000000000000" pitchFamily="50" charset="-127"/>
+              </a:rPr>
+              <a:t>Adelie</a:t>
+            </a:r>
+            <a:r>
+              <a:rPr lang="ko-KR" altLang="en-US" sz="1600" i="1" dirty="0">
+                <a:solidFill>
+                  <a:srgbClr val="0070C0"/>
+                </a:solidFill>
+                <a:latin typeface="한컴 말랑말랑 Bold" panose="020F0803000000000000" pitchFamily="50" charset="-127"/>
+                <a:ea typeface="한컴 말랑말랑 Bold" panose="020F0803000000000000" pitchFamily="50" charset="-127"/>
+              </a:rPr>
+              <a:t>에서 나온 데이터라고 믿어야 되나</a:t>
+            </a:r>
+            <a:r>
+              <a:rPr lang="en-US" altLang="ko-KR" sz="1600" i="1" dirty="0">
+                <a:solidFill>
+                  <a:srgbClr val="0070C0"/>
+                </a:solidFill>
+                <a:latin typeface="한컴 말랑말랑 Bold" panose="020F0803000000000000" pitchFamily="50" charset="-127"/>
+                <a:ea typeface="한컴 말랑말랑 Bold" panose="020F0803000000000000" pitchFamily="50" charset="-127"/>
+              </a:rPr>
+              <a:t>? P-value</a:t>
+            </a:r>
+            <a:r>
+              <a:rPr lang="ko-KR" altLang="en-US" sz="1600" i="1" dirty="0">
+                <a:solidFill>
+                  <a:srgbClr val="0070C0"/>
+                </a:solidFill>
+                <a:latin typeface="한컴 말랑말랑 Bold" panose="020F0803000000000000" pitchFamily="50" charset="-127"/>
+                <a:ea typeface="한컴 말랑말랑 Bold" panose="020F0803000000000000" pitchFamily="50" charset="-127"/>
+              </a:rPr>
+              <a:t>로 설명하라</a:t>
+            </a:r>
+            <a:r>
+              <a:rPr lang="ko-KR" altLang="en-US" sz="1600" b="0" i="1" dirty="0">
+                <a:solidFill>
+                  <a:srgbClr val="0070C0"/>
+                </a:solidFill>
+                <a:effectLst/>
+                <a:latin typeface="한컴 말랑말랑 Bold" panose="020F0803000000000000" pitchFamily="50" charset="-127"/>
+                <a:ea typeface="한컴 말랑말랑 Bold" panose="020F0803000000000000" pitchFamily="50" charset="-127"/>
+              </a:rPr>
+              <a:t> </a:t>
+            </a:r>
+            <a:endParaRPr lang="en-US" altLang="ko-KR" sz="1600" b="0" i="1" dirty="0">
+              <a:solidFill>
+                <a:srgbClr val="0070C0"/>
+              </a:solidFill>
+              <a:effectLst/>
+              <a:latin typeface="한컴 말랑말랑 Bold" panose="020F0803000000000000" pitchFamily="50" charset="-127"/>
+              <a:ea typeface="한컴 말랑말랑 Bold" panose="020F0803000000000000" pitchFamily="50" charset="-127"/>
+            </a:endParaRPr>
+          </a:p>
+        </p:txBody>
+      </p:sp>
+      <p:pic>
+        <p:nvPicPr>
+          <p:cNvPr id="1030" name="Picture 6">
+            <a:extLst>
+              <a:ext uri="{FF2B5EF4-FFF2-40B4-BE49-F238E27FC236}">
+                <a16:creationId xmlns:a16="http://schemas.microsoft.com/office/drawing/2014/main" id="{25C247D6-DCC6-0F90-E8AE-249C2D697DCC}"/>
+              </a:ext>
+            </a:extLst>
+          </p:cNvPr>
+          <p:cNvPicPr>
+            <a:picLocks noChangeAspect="1" noChangeArrowheads="1"/>
+          </p:cNvPicPr>
+          <p:nvPr/>
+        </p:nvPicPr>
+        <p:blipFill>
+          <a:blip r:embed="rId3">
+            <a:extLst>
+              <a:ext uri="{28A0092B-C50C-407E-A947-70E740481C1C}">
+                <a14:useLocalDpi xmlns:a14="http://schemas.microsoft.com/office/drawing/2010/main" val="0"/>
+              </a:ext>
+            </a:extLst>
+          </a:blip>
+          <a:srcRect/>
+          <a:stretch>
+            <a:fillRect/>
+          </a:stretch>
+        </p:blipFill>
+        <p:spPr bwMode="auto">
+          <a:xfrm>
+            <a:off x="773631" y="2034554"/>
+            <a:ext cx="11041662" cy="3287476"/>
+          </a:xfrm>
+          <a:prstGeom prst="rect">
+            <a:avLst/>
+          </a:prstGeom>
+          <a:noFill/>
+          <a:extLst>
+            <a:ext uri="{909E8E84-426E-40DD-AFC4-6F175D3DCCD1}">
+              <a14:hiddenFill xmlns:a14="http://schemas.microsoft.com/office/drawing/2010/main">
+                <a:solidFill>
+                  <a:srgbClr val="FFFFFF"/>
+                </a:solidFill>
+              </a14:hiddenFill>
+            </a:ext>
+          </a:extLst>
+        </p:spPr>
+      </p:pic>
+      <p:sp>
+        <p:nvSpPr>
+          <p:cNvPr id="22" name="TextBox 21">
+            <a:extLst>
+              <a:ext uri="{FF2B5EF4-FFF2-40B4-BE49-F238E27FC236}">
+                <a16:creationId xmlns:a16="http://schemas.microsoft.com/office/drawing/2014/main" id="{41A4700C-D226-398D-17E9-AEBB25F298C6}"/>
+              </a:ext>
+            </a:extLst>
+          </p:cNvPr>
+          <p:cNvSpPr txBox="1"/>
+          <p:nvPr/>
+        </p:nvSpPr>
+        <p:spPr>
+          <a:xfrm>
+            <a:off x="773631" y="1548843"/>
+            <a:ext cx="6096000" cy="485710"/>
+          </a:xfrm>
+          <a:prstGeom prst="rect">
+            <a:avLst/>
+          </a:prstGeom>
+          <a:solidFill>
+            <a:schemeClr val="bg1">
+              <a:lumMod val="95000"/>
+            </a:schemeClr>
+          </a:solidFill>
+          <a:ln>
+            <a:noFill/>
+          </a:ln>
+        </p:spPr>
+        <p:txBody>
+          <a:bodyPr wrap="square">
+            <a:spAutoFit/>
+          </a:bodyPr>
+          <a:lstStyle/>
+          <a:p>
+            <a:pPr>
+              <a:lnSpc>
+                <a:spcPts val="1575"/>
+              </a:lnSpc>
+              <a:buNone/>
+            </a:pPr>
+            <a:r>
+              <a:rPr lang="en-US" altLang="ko-KR" sz="1200" b="0" dirty="0">
+                <a:effectLst/>
+                <a:latin typeface="Arial Narrow" panose="020B0606020202030204" pitchFamily="34" charset="0"/>
+              </a:rPr>
+              <a:t>penguins = </a:t>
+            </a:r>
+            <a:r>
+              <a:rPr lang="en-US" altLang="ko-KR" sz="1200" b="0" dirty="0" err="1">
+                <a:effectLst/>
+                <a:latin typeface="Arial Narrow" panose="020B0606020202030204" pitchFamily="34" charset="0"/>
+              </a:rPr>
+              <a:t>sns.load_dataset</a:t>
+            </a:r>
+            <a:r>
+              <a:rPr lang="en-US" altLang="ko-KR" sz="1200" b="0" dirty="0">
+                <a:effectLst/>
+                <a:latin typeface="Arial Narrow" panose="020B0606020202030204" pitchFamily="34" charset="0"/>
+              </a:rPr>
+              <a:t>("penguins")</a:t>
+            </a:r>
+          </a:p>
+          <a:p>
+            <a:pPr>
+              <a:lnSpc>
+                <a:spcPts val="1575"/>
+              </a:lnSpc>
+              <a:buNone/>
+            </a:pPr>
+            <a:r>
+              <a:rPr lang="en-US" altLang="ko-KR" sz="1200" b="0" dirty="0" err="1">
+                <a:effectLst/>
+                <a:latin typeface="Arial Narrow" panose="020B0606020202030204" pitchFamily="34" charset="0"/>
+              </a:rPr>
+              <a:t>sns.displot</a:t>
+            </a:r>
+            <a:r>
+              <a:rPr lang="en-US" altLang="ko-KR" sz="1200" b="0" dirty="0">
+                <a:effectLst/>
+                <a:latin typeface="Arial Narrow" panose="020B0606020202030204" pitchFamily="34" charset="0"/>
+              </a:rPr>
+              <a:t>(data=penguins, x="</a:t>
+            </a:r>
+            <a:r>
+              <a:rPr lang="en-US" altLang="ko-KR" sz="1200" b="0" dirty="0" err="1">
+                <a:effectLst/>
+                <a:latin typeface="Arial Narrow" panose="020B0606020202030204" pitchFamily="34" charset="0"/>
+              </a:rPr>
+              <a:t>bill_length_mm</a:t>
+            </a:r>
+            <a:r>
+              <a:rPr lang="en-US" altLang="ko-KR" sz="1200" b="0" dirty="0">
+                <a:effectLst/>
+                <a:latin typeface="Arial Narrow" panose="020B0606020202030204" pitchFamily="34" charset="0"/>
+              </a:rPr>
+              <a:t>", col="species", bins=20, hue="species", </a:t>
+            </a:r>
+            <a:r>
+              <a:rPr lang="en-US" altLang="ko-KR" sz="1200" b="0" dirty="0" err="1">
+                <a:effectLst/>
+                <a:latin typeface="Arial Narrow" panose="020B0606020202030204" pitchFamily="34" charset="0"/>
+              </a:rPr>
+              <a:t>kde</a:t>
+            </a:r>
+            <a:r>
+              <a:rPr lang="en-US" altLang="ko-KR" sz="1200" b="0" dirty="0">
+                <a:effectLst/>
+                <a:latin typeface="Arial Narrow" panose="020B0606020202030204" pitchFamily="34" charset="0"/>
+              </a:rPr>
+              <a:t>=True)</a:t>
+            </a:r>
+          </a:p>
+        </p:txBody>
+      </p:sp>
+    </p:spTree>
+    <p:extLst>
+      <p:ext uri="{BB962C8B-B14F-4D97-AF65-F5344CB8AC3E}">
+        <p14:creationId xmlns:p14="http://schemas.microsoft.com/office/powerpoint/2010/main" val="2532231569"/>
+      </p:ext>
+    </p:extLst>
+  </p:cSld>
+  <p:clrMapOvr>
+    <a:masterClrMapping/>
+  </p:clrMapOvr>
+  <mc:AlternateContent xmlns:mc="http://schemas.openxmlformats.org/markup-compatibility/2006" xmlns:p14="http://schemas.microsoft.com/office/powerpoint/2010/main">
+    <mc:Choice Requires="p14">
+      <p:transition spd="med" p14:dur="700">
+        <p:fade/>
+      </p:transition>
+    </mc:Choice>
+    <mc:Fallback xmlns="">
+      <p:transition spd="med">
+        <p:fade/>
+      </p:transition>
+    </mc:Fallback>
+  </mc:AlternateContent>
+</p:sld>
+</file>
+
+<file path=ppt/slides/slide4.xml><?xml version="1.0" encoding="utf-8"?>
+<p:sld xmlns:a="http://schemas.openxmlformats.org/drawingml/2006/main" xmlns:r="http://schemas.openxmlformats.org/officeDocument/2006/relationships" xmlns:p="http://schemas.openxmlformats.org/presentationml/2006/main">
+  <p:cSld>
+    <p:spTree>
+      <p:nvGrpSpPr>
         <p:cNvPr id="1" name=""/>
         <p:cNvGrpSpPr/>
         <p:nvPr/>
@@ -6724,7 +8014,7 @@
             <a:pPr rtl="0"/>
             <a:fld id="{A3F31473-23EB-4724-8B59-FE6D21D89FA4}" type="slidenum">
               <a:rPr lang="en-US" altLang="ko-KR" noProof="0" smtClean="0"/>
-              <a:t>3</a:t>
+              <a:t>4</a:t>
             </a:fld>
             <a:endParaRPr lang="en-US" altLang="ko-KR" noProof="0" dirty="0"/>
           </a:p>
@@ -6779,7 +8069,7 @@
 </p:sld>
 </file>
 
-<file path=ppt/slides/slide4.xml><?xml version="1.0" encoding="utf-8"?>
+<file path=ppt/slides/slide5.xml><?xml version="1.0" encoding="utf-8"?>
 <p:sld xmlns:a="http://schemas.openxmlformats.org/drawingml/2006/main" xmlns:r="http://schemas.openxmlformats.org/officeDocument/2006/relationships" xmlns:p="http://schemas.openxmlformats.org/presentationml/2006/main">
   <p:cSld>
     <p:spTree>
@@ -6814,7 +8104,7 @@
             <a:pPr rtl="0"/>
             <a:fld id="{A3F31473-23EB-4724-8B59-FE6D21D89FA4}" type="slidenum">
               <a:rPr lang="en-US" altLang="ko-KR" noProof="0" smtClean="0"/>
-              <a:t>4</a:t>
+              <a:t>5</a:t>
             </a:fld>
             <a:endParaRPr lang="en-US" altLang="ko-KR" noProof="0" dirty="0"/>
           </a:p>
@@ -6869,7 +8159,7 @@
 </p:sld>
 </file>
 
-<file path=ppt/slides/slide5.xml><?xml version="1.0" encoding="utf-8"?>
+<file path=ppt/slides/slide6.xml><?xml version="1.0" encoding="utf-8"?>
 <p:sld xmlns:a="http://schemas.openxmlformats.org/drawingml/2006/main" xmlns:r="http://schemas.openxmlformats.org/officeDocument/2006/relationships" xmlns:p="http://schemas.openxmlformats.org/presentationml/2006/main">
   <p:cSld>
     <p:spTree>
@@ -6916,7 +8206,7 @@
             <a:pPr rtl="0"/>
             <a:fld id="{A3F31473-23EB-4724-8B59-FE6D21D89FA4}" type="slidenum">
               <a:rPr lang="en-US" altLang="ko-KR" noProof="0" smtClean="0"/>
-              <a:t>5</a:t>
+              <a:t>6</a:t>
             </a:fld>
             <a:endParaRPr lang="en-US" altLang="ko-KR" noProof="0" dirty="0"/>
           </a:p>
@@ -6977,7 +8267,7 @@
 </p:sld>
 </file>
 
-<file path=ppt/slides/slide6.xml><?xml version="1.0" encoding="utf-8"?>
+<file path=ppt/slides/slide7.xml><?xml version="1.0" encoding="utf-8"?>
 <p:sld xmlns:a="http://schemas.openxmlformats.org/drawingml/2006/main" xmlns:r="http://schemas.openxmlformats.org/officeDocument/2006/relationships" xmlns:p="http://schemas.openxmlformats.org/presentationml/2006/main">
   <p:cSld>
     <p:spTree>
@@ -7012,7 +8302,7 @@
             <a:pPr rtl="0"/>
             <a:fld id="{A3F31473-23EB-4724-8B59-FE6D21D89FA4}" type="slidenum">
               <a:rPr lang="en-US" altLang="ko-KR" noProof="0" smtClean="0"/>
-              <a:t>6</a:t>
+              <a:t>7</a:t>
             </a:fld>
             <a:endParaRPr lang="en-US" altLang="ko-KR" noProof="0" dirty="0"/>
           </a:p>
@@ -7067,7 +8357,7 @@
 </p:sld>
 </file>
 
-<file path=ppt/slides/slide7.xml><?xml version="1.0" encoding="utf-8"?>
+<file path=ppt/slides/slide8.xml><?xml version="1.0" encoding="utf-8"?>
 <p:sld xmlns:a="http://schemas.openxmlformats.org/drawingml/2006/main" xmlns:r="http://schemas.openxmlformats.org/officeDocument/2006/relationships" xmlns:p="http://schemas.openxmlformats.org/presentationml/2006/main">
   <p:cSld>
     <p:spTree>
@@ -7102,7 +8392,7 @@
             <a:pPr rtl="0"/>
             <a:fld id="{A3F31473-23EB-4724-8B59-FE6D21D89FA4}" type="slidenum">
               <a:rPr lang="en-US" altLang="ko-KR" noProof="0" smtClean="0"/>
-              <a:t>7</a:t>
+              <a:t>8</a:t>
             </a:fld>
             <a:endParaRPr lang="en-US" altLang="ko-KR" noProof="0" dirty="0"/>
           </a:p>
@@ -7404,7 +8694,7 @@
 </p:sld>
 </file>
 
-<file path=ppt/slides/slide8.xml><?xml version="1.0" encoding="utf-8"?>
+<file path=ppt/slides/slide9.xml><?xml version="1.0" encoding="utf-8"?>
 <p:sld xmlns:a="http://schemas.openxmlformats.org/drawingml/2006/main" xmlns:r="http://schemas.openxmlformats.org/officeDocument/2006/relationships" xmlns:p="http://schemas.openxmlformats.org/presentationml/2006/main">
   <p:cSld>
     <p:spTree>
@@ -7439,7 +8729,7 @@
             <a:pPr rtl="0"/>
             <a:fld id="{A3F31473-23EB-4724-8B59-FE6D21D89FA4}" type="slidenum">
               <a:rPr lang="en-US" altLang="ko-KR" noProof="0" smtClean="0"/>
-              <a:t>8</a:t>
+              <a:t>9</a:t>
             </a:fld>
             <a:endParaRPr lang="en-US" altLang="ko-KR" noProof="0" dirty="0"/>
           </a:p>
@@ -7530,483 +8820,6 @@
     <p:extLst>
       <p:ext uri="{BB962C8B-B14F-4D97-AF65-F5344CB8AC3E}">
         <p14:creationId xmlns:p14="http://schemas.microsoft.com/office/powerpoint/2010/main" val="3176157259"/>
-      </p:ext>
-    </p:extLst>
-  </p:cSld>
-  <p:clrMapOvr>
-    <a:masterClrMapping/>
-  </p:clrMapOvr>
-  <mc:AlternateContent xmlns:mc="http://schemas.openxmlformats.org/markup-compatibility/2006" xmlns:p14="http://schemas.microsoft.com/office/powerpoint/2010/main">
-    <mc:Choice Requires="p14">
-      <p:transition spd="med" p14:dur="700">
-        <p:fade/>
-      </p:transition>
-    </mc:Choice>
-    <mc:Fallback xmlns="">
-      <p:transition spd="med">
-        <p:fade/>
-      </p:transition>
-    </mc:Fallback>
-  </mc:AlternateContent>
-</p:sld>
-</file>
-
-<file path=ppt/slides/slide9.xml><?xml version="1.0" encoding="utf-8"?>
-<p:sld xmlns:a="http://schemas.openxmlformats.org/drawingml/2006/main" xmlns:r="http://schemas.openxmlformats.org/officeDocument/2006/relationships" xmlns:p="http://schemas.openxmlformats.org/presentationml/2006/main">
-  <p:cSld>
-    <p:spTree>
-      <p:nvGrpSpPr>
-        <p:cNvPr id="1" name=""/>
-        <p:cNvGrpSpPr/>
-        <p:nvPr/>
-      </p:nvGrpSpPr>
-      <p:grpSpPr>
-        <a:xfrm>
-          <a:off x="0" y="0"/>
-          <a:ext cx="0" cy="0"/>
-          <a:chOff x="0" y="0"/>
-          <a:chExt cx="0" cy="0"/>
-        </a:xfrm>
-      </p:grpSpPr>
-      <p:sp>
-        <p:nvSpPr>
-          <p:cNvPr id="8" name="슬라이드 번호 개체 틀 7"/>
-          <p:cNvSpPr>
-            <a:spLocks noGrp="1"/>
-          </p:cNvSpPr>
-          <p:nvPr>
-            <p:ph type="sldNum" sz="quarter" idx="12"/>
-          </p:nvPr>
-        </p:nvSpPr>
-        <p:spPr/>
-        <p:txBody>
-          <a:bodyPr/>
-          <a:lstStyle/>
-          <a:p>
-            <a:pPr rtl="0"/>
-            <a:fld id="{A3F31473-23EB-4724-8B59-FE6D21D89FA4}" type="slidenum">
-              <a:rPr lang="en-US" altLang="ko-KR" noProof="0" smtClean="0"/>
-              <a:t>9</a:t>
-            </a:fld>
-            <a:endParaRPr lang="en-US" altLang="ko-KR" noProof="0" dirty="0"/>
-          </a:p>
-        </p:txBody>
-      </p:sp>
-      <p:sp>
-        <p:nvSpPr>
-          <p:cNvPr id="4" name="직사각형 3"/>
-          <p:cNvSpPr/>
-          <p:nvPr/>
-        </p:nvSpPr>
-        <p:spPr>
-          <a:xfrm>
-            <a:off x="333772" y="370028"/>
-            <a:ext cx="7231467" cy="523220"/>
-          </a:xfrm>
-          <a:prstGeom prst="rect">
-            <a:avLst/>
-          </a:prstGeom>
-        </p:spPr>
-        <p:txBody>
-          <a:bodyPr wrap="none">
-            <a:spAutoFit/>
-          </a:bodyPr>
-          <a:lstStyle/>
-          <a:p>
-            <a:r>
-              <a:rPr lang="ko-KR" altLang="en-US" sz="2800" b="1" dirty="0"/>
-              <a:t>새로운 신약의 효과 검정을 위한 통계분석</a:t>
-            </a:r>
-            <a:r>
-              <a:rPr lang="en-US" altLang="ko-KR" sz="2800" b="1" dirty="0"/>
-              <a:t>(3/3)</a:t>
-            </a:r>
-            <a:endParaRPr lang="ko-KR" altLang="en-US" sz="2800" b="1" dirty="0"/>
-          </a:p>
-        </p:txBody>
-      </p:sp>
-      <p:pic>
-        <p:nvPicPr>
-          <p:cNvPr id="2" name="그림 1"/>
-          <p:cNvPicPr>
-            <a:picLocks noChangeAspect="1"/>
-          </p:cNvPicPr>
-          <p:nvPr/>
-        </p:nvPicPr>
-        <p:blipFill>
-          <a:blip r:embed="rId3"/>
-          <a:stretch>
-            <a:fillRect/>
-          </a:stretch>
-        </p:blipFill>
-        <p:spPr>
-          <a:xfrm>
-            <a:off x="837828" y="1628800"/>
-            <a:ext cx="5313788" cy="4320480"/>
-          </a:xfrm>
-          <a:prstGeom prst="rect">
-            <a:avLst/>
-          </a:prstGeom>
-        </p:spPr>
-      </p:pic>
-      <p:sp>
-        <p:nvSpPr>
-          <p:cNvPr id="7" name="직사각형 6"/>
-          <p:cNvSpPr/>
-          <p:nvPr/>
-        </p:nvSpPr>
-        <p:spPr>
-          <a:xfrm>
-            <a:off x="6308231" y="3356992"/>
-            <a:ext cx="5757427" cy="2354491"/>
-          </a:xfrm>
-          <a:prstGeom prst="rect">
-            <a:avLst/>
-          </a:prstGeom>
-          <a:solidFill>
-            <a:schemeClr val="accent5">
-              <a:lumMod val="20000"/>
-              <a:lumOff val="80000"/>
-            </a:schemeClr>
-          </a:solidFill>
-        </p:spPr>
-        <p:txBody>
-          <a:bodyPr wrap="square">
-            <a:spAutoFit/>
-          </a:bodyPr>
-          <a:lstStyle/>
-          <a:p>
-            <a:pPr marL="285750" indent="-285750">
-              <a:lnSpc>
-                <a:spcPct val="150000"/>
-              </a:lnSpc>
-              <a:buFont typeface="Wingdings" panose="05000000000000000000" pitchFamily="2" charset="2"/>
-              <a:buChar char="v"/>
-            </a:pPr>
-            <a:r>
-              <a:rPr lang="ko-KR" altLang="en-US" sz="1400" dirty="0">
-                <a:latin typeface="휴먼모음T" panose="02030504000101010101" pitchFamily="18" charset="-127"/>
-                <a:ea typeface="휴먼모음T" panose="02030504000101010101" pitchFamily="18" charset="-127"/>
-                <a:cs typeface="함초롬돋움" panose="020B0604000101010101" pitchFamily="50" charset="-127"/>
-              </a:rPr>
-              <a:t>차이가 없다는 가정</a:t>
-            </a:r>
-            <a:r>
-              <a:rPr lang="en-US" altLang="ko-KR" sz="1400" dirty="0">
-                <a:latin typeface="휴먼모음T" panose="02030504000101010101" pitchFamily="18" charset="-127"/>
-                <a:ea typeface="휴먼모음T" panose="02030504000101010101" pitchFamily="18" charset="-127"/>
-                <a:cs typeface="함초롬돋움" panose="020B0604000101010101" pitchFamily="50" charset="-127"/>
-              </a:rPr>
-              <a:t>(</a:t>
-            </a:r>
-            <a:r>
-              <a:rPr lang="ko-KR" altLang="en-US" sz="1400" dirty="0" err="1">
-                <a:latin typeface="휴먼모음T" panose="02030504000101010101" pitchFamily="18" charset="-127"/>
-                <a:ea typeface="휴먼모음T" panose="02030504000101010101" pitchFamily="18" charset="-127"/>
-                <a:cs typeface="함초롬돋움" panose="020B0604000101010101" pitchFamily="50" charset="-127"/>
-              </a:rPr>
-              <a:t>귀무가설</a:t>
-            </a:r>
-            <a:r>
-              <a:rPr lang="en-US" altLang="ko-KR" sz="1400" dirty="0">
-                <a:latin typeface="휴먼모음T" panose="02030504000101010101" pitchFamily="18" charset="-127"/>
-                <a:ea typeface="휴먼모음T" panose="02030504000101010101" pitchFamily="18" charset="-127"/>
-                <a:cs typeface="함초롬돋움" panose="020B0604000101010101" pitchFamily="50" charset="-127"/>
-              </a:rPr>
-              <a:t>)</a:t>
-            </a:r>
-            <a:r>
-              <a:rPr lang="ko-KR" altLang="en-US" sz="1400" dirty="0">
-                <a:latin typeface="휴먼모음T" panose="02030504000101010101" pitchFamily="18" charset="-127"/>
-                <a:ea typeface="휴먼모음T" panose="02030504000101010101" pitchFamily="18" charset="-127"/>
-                <a:cs typeface="함초롬돋움" panose="020B0604000101010101" pitchFamily="50" charset="-127"/>
-              </a:rPr>
-              <a:t>이 옳다면 실험자료상으로 </a:t>
-            </a:r>
-            <a:r>
-              <a:rPr lang="ko-KR" altLang="en-US" sz="1400" dirty="0" err="1">
-                <a:latin typeface="휴먼모음T" panose="02030504000101010101" pitchFamily="18" charset="-127"/>
-                <a:ea typeface="휴먼모음T" panose="02030504000101010101" pitchFamily="18" charset="-127"/>
-                <a:cs typeface="함초롬돋움" panose="020B0604000101010101" pitchFamily="50" charset="-127"/>
-              </a:rPr>
-              <a:t>귀무가설을</a:t>
-            </a:r>
-            <a:r>
-              <a:rPr lang="ko-KR" altLang="en-US" sz="1400" dirty="0">
-                <a:latin typeface="휴먼모음T" panose="02030504000101010101" pitchFamily="18" charset="-127"/>
-                <a:ea typeface="휴먼모음T" panose="02030504000101010101" pitchFamily="18" charset="-127"/>
-                <a:cs typeface="함초롬돋움" panose="020B0604000101010101" pitchFamily="50" charset="-127"/>
-              </a:rPr>
-              <a:t> 기각할 확률</a:t>
-            </a:r>
-            <a:r>
-              <a:rPr lang="en-US" altLang="ko-KR" sz="1400" dirty="0">
-                <a:latin typeface="휴먼모음T" panose="02030504000101010101" pitchFamily="18" charset="-127"/>
-                <a:ea typeface="휴먼모음T" panose="02030504000101010101" pitchFamily="18" charset="-127"/>
-                <a:cs typeface="함초롬돋움" panose="020B0604000101010101" pitchFamily="50" charset="-127"/>
-              </a:rPr>
-              <a:t>(p-value = 8.21%)</a:t>
-            </a:r>
-            <a:r>
-              <a:rPr lang="ko-KR" altLang="en-US" sz="1400" dirty="0">
-                <a:latin typeface="휴먼모음T" panose="02030504000101010101" pitchFamily="18" charset="-127"/>
-                <a:ea typeface="휴먼모음T" panose="02030504000101010101" pitchFamily="18" charset="-127"/>
-                <a:cs typeface="함초롬돋움" panose="020B0604000101010101" pitchFamily="50" charset="-127"/>
-              </a:rPr>
-              <a:t>인데</a:t>
-            </a:r>
-            <a:r>
-              <a:rPr lang="en-US" altLang="ko-KR" sz="1400" dirty="0">
-                <a:latin typeface="휴먼모음T" panose="02030504000101010101" pitchFamily="18" charset="-127"/>
-                <a:ea typeface="휴먼모음T" panose="02030504000101010101" pitchFamily="18" charset="-127"/>
-                <a:cs typeface="함초롬돋움" panose="020B0604000101010101" pitchFamily="50" charset="-127"/>
-              </a:rPr>
-              <a:t>?</a:t>
-            </a:r>
-          </a:p>
-          <a:p>
-            <a:pPr marL="285750" indent="-285750">
-              <a:lnSpc>
-                <a:spcPct val="150000"/>
-              </a:lnSpc>
-              <a:buFont typeface="Wingdings" panose="05000000000000000000" pitchFamily="2" charset="2"/>
-              <a:buChar char="v"/>
-            </a:pPr>
-            <a:endParaRPr lang="en-US" altLang="ko-KR" sz="1400" dirty="0">
-              <a:latin typeface="휴먼모음T" panose="02030504000101010101" pitchFamily="18" charset="-127"/>
-              <a:ea typeface="휴먼모음T" panose="02030504000101010101" pitchFamily="18" charset="-127"/>
-              <a:cs typeface="함초롬돋움" panose="020B0604000101010101" pitchFamily="50" charset="-127"/>
-            </a:endParaRPr>
-          </a:p>
-          <a:p>
-            <a:pPr marL="285750" indent="-285750">
-              <a:lnSpc>
-                <a:spcPct val="150000"/>
-              </a:lnSpc>
-              <a:buFont typeface="Wingdings" panose="05000000000000000000" pitchFamily="2" charset="2"/>
-              <a:buChar char="v"/>
-            </a:pPr>
-            <a:r>
-              <a:rPr lang="en-US" altLang="ko-KR" sz="1400" dirty="0">
-                <a:latin typeface="휴먼모음T" panose="02030504000101010101" pitchFamily="18" charset="-127"/>
-                <a:ea typeface="휴먼모음T" panose="02030504000101010101" pitchFamily="18" charset="-127"/>
-                <a:cs typeface="함초롬돋움" panose="020B0604000101010101" pitchFamily="50" charset="-127"/>
-              </a:rPr>
-              <a:t>8.21%</a:t>
-            </a:r>
-            <a:r>
-              <a:rPr lang="ko-KR" altLang="en-US" sz="1400" dirty="0">
-                <a:latin typeface="휴먼모음T" panose="02030504000101010101" pitchFamily="18" charset="-127"/>
-                <a:ea typeface="휴먼모음T" panose="02030504000101010101" pitchFamily="18" charset="-127"/>
-                <a:cs typeface="함초롬돋움" panose="020B0604000101010101" pitchFamily="50" charset="-127"/>
-              </a:rPr>
-              <a:t>는 극단적인 </a:t>
-            </a:r>
-            <a:r>
-              <a:rPr lang="en-US" altLang="ko-KR" sz="1400" dirty="0">
-                <a:latin typeface="휴먼모음T" panose="02030504000101010101" pitchFamily="18" charset="-127"/>
-                <a:ea typeface="휴먼모음T" panose="02030504000101010101" pitchFamily="18" charset="-127"/>
-                <a:cs typeface="함초롬돋움" panose="020B0604000101010101" pitchFamily="50" charset="-127"/>
-              </a:rPr>
-              <a:t>case</a:t>
-            </a:r>
-            <a:r>
-              <a:rPr lang="ko-KR" altLang="en-US" sz="1400" dirty="0">
-                <a:latin typeface="휴먼모음T" panose="02030504000101010101" pitchFamily="18" charset="-127"/>
-                <a:ea typeface="휴먼모음T" panose="02030504000101010101" pitchFamily="18" charset="-127"/>
-                <a:cs typeface="함초롬돋움" panose="020B0604000101010101" pitchFamily="50" charset="-127"/>
-              </a:rPr>
-              <a:t>인가</a:t>
-            </a:r>
-            <a:r>
-              <a:rPr lang="en-US" altLang="ko-KR" sz="1400" dirty="0">
-                <a:latin typeface="휴먼모음T" panose="02030504000101010101" pitchFamily="18" charset="-127"/>
-                <a:ea typeface="휴먼모음T" panose="02030504000101010101" pitchFamily="18" charset="-127"/>
-                <a:cs typeface="함초롬돋움" panose="020B0604000101010101" pitchFamily="50" charset="-127"/>
-              </a:rPr>
-              <a:t>? </a:t>
-            </a:r>
-            <a:r>
-              <a:rPr lang="ko-KR" altLang="en-US" sz="1400" dirty="0">
-                <a:latin typeface="휴먼모음T" panose="02030504000101010101" pitchFamily="18" charset="-127"/>
-                <a:ea typeface="휴먼모음T" panose="02030504000101010101" pitchFamily="18" charset="-127"/>
-                <a:cs typeface="함초롬돋움" panose="020B0604000101010101" pitchFamily="50" charset="-127"/>
-              </a:rPr>
-              <a:t>너무 크지 않은가</a:t>
-            </a:r>
-            <a:r>
-              <a:rPr lang="en-US" altLang="ko-KR" sz="1400" dirty="0">
-                <a:latin typeface="휴먼모음T" panose="02030504000101010101" pitchFamily="18" charset="-127"/>
-                <a:ea typeface="휴먼모음T" panose="02030504000101010101" pitchFamily="18" charset="-127"/>
-                <a:cs typeface="함초롬돋움" panose="020B0604000101010101" pitchFamily="50" charset="-127"/>
-              </a:rPr>
-              <a:t>? </a:t>
-            </a:r>
-          </a:p>
-          <a:p>
-            <a:pPr marL="285750" indent="-285750">
-              <a:lnSpc>
-                <a:spcPct val="150000"/>
-              </a:lnSpc>
-              <a:buFont typeface="Wingdings" panose="05000000000000000000" pitchFamily="2" charset="2"/>
-              <a:buChar char="v"/>
-            </a:pPr>
-            <a:r>
-              <a:rPr lang="ko-KR" altLang="en-US" sz="1400" dirty="0">
-                <a:latin typeface="휴먼모음T" panose="02030504000101010101" pitchFamily="18" charset="-127"/>
-                <a:ea typeface="휴먼모음T" panose="02030504000101010101" pitchFamily="18" charset="-127"/>
-                <a:cs typeface="함초롬돋움" panose="020B0604000101010101" pitchFamily="50" charset="-127"/>
-              </a:rPr>
-              <a:t>일반적으로 </a:t>
-            </a:r>
-            <a:r>
-              <a:rPr lang="en-US" altLang="ko-KR" sz="1400" dirty="0">
-                <a:latin typeface="휴먼모음T" panose="02030504000101010101" pitchFamily="18" charset="-127"/>
-                <a:ea typeface="휴먼모음T" panose="02030504000101010101" pitchFamily="18" charset="-127"/>
-                <a:cs typeface="함초롬돋움" panose="020B0604000101010101" pitchFamily="50" charset="-127"/>
-              </a:rPr>
-              <a:t>5%</a:t>
-            </a:r>
-            <a:r>
-              <a:rPr lang="ko-KR" altLang="en-US" sz="1400" dirty="0">
-                <a:latin typeface="휴먼모음T" panose="02030504000101010101" pitchFamily="18" charset="-127"/>
-                <a:ea typeface="휴먼모음T" panose="02030504000101010101" pitchFamily="18" charset="-127"/>
-                <a:cs typeface="함초롬돋움" panose="020B0604000101010101" pitchFamily="50" charset="-127"/>
-              </a:rPr>
-              <a:t>나 </a:t>
-            </a:r>
-            <a:r>
-              <a:rPr lang="en-US" altLang="ko-KR" sz="1400" dirty="0">
-                <a:latin typeface="휴먼모음T" panose="02030504000101010101" pitchFamily="18" charset="-127"/>
-                <a:ea typeface="휴먼모음T" panose="02030504000101010101" pitchFamily="18" charset="-127"/>
-                <a:cs typeface="함초롬돋움" panose="020B0604000101010101" pitchFamily="50" charset="-127"/>
-              </a:rPr>
-              <a:t>2% </a:t>
-            </a:r>
-            <a:r>
-              <a:rPr lang="ko-KR" altLang="en-US" sz="1400" dirty="0">
-                <a:latin typeface="휴먼모음T" panose="02030504000101010101" pitchFamily="18" charset="-127"/>
-                <a:ea typeface="휴먼모음T" panose="02030504000101010101" pitchFamily="18" charset="-127"/>
-                <a:cs typeface="함초롬돋움" panose="020B0604000101010101" pitchFamily="50" charset="-127"/>
-              </a:rPr>
-              <a:t>미만은 되어야</a:t>
-            </a:r>
-            <a:r>
-              <a:rPr lang="en-US" altLang="ko-KR" sz="1400" dirty="0">
-                <a:latin typeface="휴먼모음T" panose="02030504000101010101" pitchFamily="18" charset="-127"/>
-                <a:ea typeface="휴먼모음T" panose="02030504000101010101" pitchFamily="18" charset="-127"/>
-                <a:cs typeface="함초롬돋움" panose="020B0604000101010101" pitchFamily="50" charset="-127"/>
-              </a:rPr>
-              <a:t>‘</a:t>
-            </a:r>
-            <a:r>
-              <a:rPr lang="ko-KR" altLang="en-US" sz="1400" dirty="0" err="1">
-                <a:latin typeface="휴먼모음T" panose="02030504000101010101" pitchFamily="18" charset="-127"/>
-                <a:ea typeface="휴먼모음T" panose="02030504000101010101" pitchFamily="18" charset="-127"/>
-                <a:cs typeface="함초롬돋움" panose="020B0604000101010101" pitchFamily="50" charset="-127"/>
-              </a:rPr>
-              <a:t>귀무가설이</a:t>
-            </a:r>
-            <a:r>
-              <a:rPr lang="ko-KR" altLang="en-US" sz="1400" dirty="0">
-                <a:latin typeface="휴먼모음T" panose="02030504000101010101" pitchFamily="18" charset="-127"/>
-                <a:ea typeface="휴먼모음T" panose="02030504000101010101" pitchFamily="18" charset="-127"/>
-                <a:cs typeface="함초롬돋움" panose="020B0604000101010101" pitchFamily="50" charset="-127"/>
-              </a:rPr>
-              <a:t> 틀리지 </a:t>
-            </a:r>
-            <a:r>
-              <a:rPr lang="ko-KR" altLang="en-US" sz="1400" dirty="0" err="1">
-                <a:latin typeface="휴먼모음T" panose="02030504000101010101" pitchFamily="18" charset="-127"/>
-                <a:ea typeface="휴먼모음T" panose="02030504000101010101" pitchFamily="18" charset="-127"/>
-                <a:cs typeface="함초롬돋움" panose="020B0604000101010101" pitchFamily="50" charset="-127"/>
-              </a:rPr>
-              <a:t>않고서여</a:t>
-            </a:r>
-            <a:r>
-              <a:rPr lang="ko-KR" altLang="en-US" sz="1400" dirty="0">
-                <a:latin typeface="휴먼모음T" panose="02030504000101010101" pitchFamily="18" charset="-127"/>
-                <a:ea typeface="휴먼모음T" panose="02030504000101010101" pitchFamily="18" charset="-127"/>
-                <a:cs typeface="함초롬돋움" panose="020B0604000101010101" pitchFamily="50" charset="-127"/>
-              </a:rPr>
-              <a:t> 어찌 이런 데이터가 나온단 말인가</a:t>
-            </a:r>
-            <a:r>
-              <a:rPr lang="en-US" altLang="ko-KR" sz="1400" dirty="0">
-                <a:latin typeface="휴먼모음T" panose="02030504000101010101" pitchFamily="18" charset="-127"/>
-                <a:ea typeface="휴먼모음T" panose="02030504000101010101" pitchFamily="18" charset="-127"/>
-                <a:cs typeface="함초롬돋움" panose="020B0604000101010101" pitchFamily="50" charset="-127"/>
-              </a:rPr>
-              <a:t>?’ </a:t>
-            </a:r>
-            <a:r>
-              <a:rPr lang="ko-KR" altLang="en-US" sz="1400" dirty="0">
-                <a:latin typeface="휴먼모음T" panose="02030504000101010101" pitchFamily="18" charset="-127"/>
-                <a:ea typeface="휴먼모음T" panose="02030504000101010101" pitchFamily="18" charset="-127"/>
-                <a:cs typeface="함초롬돋움" panose="020B0604000101010101" pitchFamily="50" charset="-127"/>
-              </a:rPr>
-              <a:t>라고 믿고 </a:t>
-            </a:r>
-            <a:r>
-              <a:rPr lang="ko-KR" altLang="en-US" sz="1400" dirty="0" err="1">
-                <a:latin typeface="휴먼모음T" panose="02030504000101010101" pitchFamily="18" charset="-127"/>
-                <a:ea typeface="휴먼모음T" panose="02030504000101010101" pitchFamily="18" charset="-127"/>
-                <a:cs typeface="함초롬돋움" panose="020B0604000101010101" pitchFamily="50" charset="-127"/>
-              </a:rPr>
-              <a:t>귀무가설을</a:t>
-            </a:r>
-            <a:r>
-              <a:rPr lang="ko-KR" altLang="en-US" sz="1400" dirty="0">
-                <a:latin typeface="휴먼모음T" panose="02030504000101010101" pitchFamily="18" charset="-127"/>
-                <a:ea typeface="휴먼모음T" panose="02030504000101010101" pitchFamily="18" charset="-127"/>
-                <a:cs typeface="함초롬돋움" panose="020B0604000101010101" pitchFamily="50" charset="-127"/>
-              </a:rPr>
-              <a:t> 기각하고 신약의 효과가 있다라고 결정할 수 있을 텐데</a:t>
-            </a:r>
-            <a:r>
-              <a:rPr lang="en-US" altLang="ko-KR" sz="1400" dirty="0">
-                <a:latin typeface="휴먼모음T" panose="02030504000101010101" pitchFamily="18" charset="-127"/>
-                <a:ea typeface="휴먼모음T" panose="02030504000101010101" pitchFamily="18" charset="-127"/>
-                <a:cs typeface="함초롬돋움" panose="020B0604000101010101" pitchFamily="50" charset="-127"/>
-              </a:rPr>
-              <a:t>……..</a:t>
-            </a:r>
-            <a:endParaRPr lang="ko-KR" altLang="en-US" sz="1400" dirty="0">
-              <a:latin typeface="휴먼모음T" panose="02030504000101010101" pitchFamily="18" charset="-127"/>
-              <a:ea typeface="휴먼모음T" panose="02030504000101010101" pitchFamily="18" charset="-127"/>
-              <a:cs typeface="함초롬돋움" panose="020B0604000101010101" pitchFamily="50" charset="-127"/>
-            </a:endParaRPr>
-          </a:p>
-        </p:txBody>
-      </p:sp>
-      <p:pic>
-        <p:nvPicPr>
-          <p:cNvPr id="6" name="그림 5"/>
-          <p:cNvPicPr>
-            <a:picLocks noChangeAspect="1"/>
-          </p:cNvPicPr>
-          <p:nvPr/>
-        </p:nvPicPr>
-        <p:blipFill>
-          <a:blip r:embed="rId4"/>
-          <a:stretch>
-            <a:fillRect/>
-          </a:stretch>
-        </p:blipFill>
-        <p:spPr>
-          <a:xfrm>
-            <a:off x="6308231" y="1628800"/>
-            <a:ext cx="5757427" cy="1251144"/>
-          </a:xfrm>
-          <a:prstGeom prst="rect">
-            <a:avLst/>
-          </a:prstGeom>
-        </p:spPr>
-      </p:pic>
-    </p:spTree>
-    <p:extLst>
-      <p:ext uri="{BB962C8B-B14F-4D97-AF65-F5344CB8AC3E}">
-        <p14:creationId xmlns:p14="http://schemas.microsoft.com/office/powerpoint/2010/main" val="2244855479"/>
       </p:ext>
     </p:extLst>
   </p:cSld>
@@ -8829,6 +9642,26 @@
 </file>
 
 <file path=customXml/item1.xml><?xml version="1.0" encoding="utf-8"?>
+<?mso-contentType ?>
+<FormTemplates xmlns="http://schemas.microsoft.com/sharepoint/v3/contenttype/forms">
+  <Display>DocumentLibraryForm</Display>
+  <Edit>DocumentLibraryForm</Edit>
+  <New>DocumentLibraryForm</New>
+</FormTemplates>
+</file>
+
+<file path=customXml/item2.xml><?xml version="1.0" encoding="utf-8"?>
+<p:properties xmlns:p="http://schemas.microsoft.com/office/2006/metadata/properties" xmlns:xsi="http://www.w3.org/2001/XMLSchema-instance" xmlns:pc="http://schemas.microsoft.com/office/infopath/2007/PartnerControls">
+  <documentManagement>
+    <VSO_x0020_item_x0020_id xmlns="40262f94-9f35-4ac3-9a90-690165a166b7" xsi:nil="true"/>
+    <Assetid_x0020_ xmlns="40262f94-9f35-4ac3-9a90-690165a166b7" xsi:nil="true"/>
+    <Item_x0020_Details xmlns="40262f94-9f35-4ac3-9a90-690165a166b7" xsi:nil="true"/>
+    <Template_x0020_details xmlns="40262f94-9f35-4ac3-9a90-690165a166b7" xsi:nil="true"/>
+  </documentManagement>
+</p:properties>
+</file>
+
+<file path=customXml/item3.xml><?xml version="1.0" encoding="utf-8"?>
 <ct:contentTypeSchema xmlns:ct="http://schemas.microsoft.com/office/2006/metadata/contentType" xmlns:ma="http://schemas.microsoft.com/office/2006/metadata/properties/metaAttributes" ct:_="" ma:_="" ma:contentTypeName="Document" ma:contentTypeID="0x010100AA3F7D94069FF64A86F7DFF56D60E3BE" ma:contentTypeVersion="6" ma:contentTypeDescription="Create a new document." ma:contentTypeScope="" ma:versionID="c32302c77d4085ecf495bdddb7f5e889">
   <xsd:schema xmlns:xsd="http://www.w3.org/2001/XMLSchema" xmlns:xs="http://www.w3.org/2001/XMLSchema" xmlns:p="http://schemas.microsoft.com/office/2006/metadata/properties" xmlns:ns2="a4f35948-e619-41b3-aa29-22878b09cfd2" xmlns:ns3="40262f94-9f35-4ac3-9a90-690165a166b7" targetNamespace="http://schemas.microsoft.com/office/2006/metadata/properties" ma:root="true" ma:fieldsID="4ab5ae46be95f9d0be6107e8200be7a2" ns2:_="" ns3:_="">
     <xsd:import namespace="a4f35948-e619-41b3-aa29-22878b09cfd2"/>
@@ -9009,27 +9842,32 @@
 </ct:contentTypeSchema>
 </file>
 
-<file path=customXml/item2.xml><?xml version="1.0" encoding="utf-8"?>
-<p:properties xmlns:p="http://schemas.microsoft.com/office/2006/metadata/properties" xmlns:xsi="http://www.w3.org/2001/XMLSchema-instance" xmlns:pc="http://schemas.microsoft.com/office/infopath/2007/PartnerControls">
-  <documentManagement>
-    <VSO_x0020_item_x0020_id xmlns="40262f94-9f35-4ac3-9a90-690165a166b7" xsi:nil="true"/>
-    <Assetid_x0020_ xmlns="40262f94-9f35-4ac3-9a90-690165a166b7" xsi:nil="true"/>
-    <Item_x0020_Details xmlns="40262f94-9f35-4ac3-9a90-690165a166b7" xsi:nil="true"/>
-    <Template_x0020_details xmlns="40262f94-9f35-4ac3-9a90-690165a166b7" xsi:nil="true"/>
-  </documentManagement>
-</p:properties>
+<file path=customXml/itemProps1.xml><?xml version="1.0" encoding="utf-8"?>
+<ds:datastoreItem xmlns:ds="http://schemas.openxmlformats.org/officeDocument/2006/customXml" ds:itemID="{7F9B8BCC-BF24-4800-92E1-9F891BBB27E6}">
+  <ds:schemaRefs>
+    <ds:schemaRef ds:uri="http://schemas.microsoft.com/sharepoint/v3/contenttype/forms"/>
+  </ds:schemaRefs>
+</ds:datastoreItem>
 </file>
 
-<file path=customXml/item3.xml><?xml version="1.0" encoding="utf-8"?>
-<?mso-contentType ?>
-<FormTemplates xmlns="http://schemas.microsoft.com/sharepoint/v3/contenttype/forms">
-  <Display>DocumentLibraryForm</Display>
-  <Edit>DocumentLibraryForm</Edit>
-  <New>DocumentLibraryForm</New>
-</FormTemplates>
+<file path=customXml/itemProps2.xml><?xml version="1.0" encoding="utf-8"?>
+<ds:datastoreItem xmlns:ds="http://schemas.openxmlformats.org/officeDocument/2006/customXml" ds:itemID="{50AACE6D-8EB6-447A-8DFD-C2C0C52916AC}">
+  <ds:schemaRefs>
+    <ds:schemaRef ds:uri="http://schemas.openxmlformats.org/package/2006/metadata/core-properties"/>
+    <ds:schemaRef ds:uri="http://purl.org/dc/elements/1.1/"/>
+    <ds:schemaRef ds:uri="http://purl.org/dc/dcmitype/"/>
+    <ds:schemaRef ds:uri="http://schemas.microsoft.com/office/infopath/2007/PartnerControls"/>
+    <ds:schemaRef ds:uri="http://schemas.microsoft.com/office/2006/documentManagement/types"/>
+    <ds:schemaRef ds:uri="http://purl.org/dc/terms/"/>
+    <ds:schemaRef ds:uri="40262f94-9f35-4ac3-9a90-690165a166b7"/>
+    <ds:schemaRef ds:uri="a4f35948-e619-41b3-aa29-22878b09cfd2"/>
+    <ds:schemaRef ds:uri="http://schemas.microsoft.com/office/2006/metadata/properties"/>
+    <ds:schemaRef ds:uri="http://www.w3.org/XML/1998/namespace"/>
+  </ds:schemaRefs>
+</ds:datastoreItem>
 </file>
 
-<file path=customXml/itemProps1.xml><?xml version="1.0" encoding="utf-8"?>
+<file path=customXml/itemProps3.xml><?xml version="1.0" encoding="utf-8"?>
 <ds:datastoreItem xmlns:ds="http://schemas.openxmlformats.org/officeDocument/2006/customXml" ds:itemID="{5CCB2C71-1ED8-4540-B003-293B5E75C71F}">
   <ds:schemaRefs>
     <ds:schemaRef ds:uri="http://schemas.microsoft.com/office/2006/metadata/contentType"/>
@@ -9046,29 +9884,4 @@
     <ds:schemaRef ds:uri="http://schemas.microsoft.com/internal/obd"/>
   </ds:schemaRefs>
 </ds:datastoreItem>
-</file>
-
-<file path=customXml/itemProps2.xml><?xml version="1.0" encoding="utf-8"?>
-<ds:datastoreItem xmlns:ds="http://schemas.openxmlformats.org/officeDocument/2006/customXml" ds:itemID="{50AACE6D-8EB6-447A-8DFD-C2C0C52916AC}">
-  <ds:schemaRefs>
-    <ds:schemaRef ds:uri="http://schemas.microsoft.com/office/infopath/2007/PartnerControls"/>
-    <ds:schemaRef ds:uri="http://schemas.microsoft.com/office/2006/documentManagement/types"/>
-    <ds:schemaRef ds:uri="http://schemas.openxmlformats.org/package/2006/metadata/core-properties"/>
-    <ds:schemaRef ds:uri="http://purl.org/dc/dcmitype/"/>
-    <ds:schemaRef ds:uri="http://schemas.microsoft.com/office/2006/metadata/properties"/>
-    <ds:schemaRef ds:uri="http://purl.org/dc/elements/1.1/"/>
-    <ds:schemaRef ds:uri="http://www.w3.org/XML/1998/namespace"/>
-    <ds:schemaRef ds:uri="40262f94-9f35-4ac3-9a90-690165a166b7"/>
-    <ds:schemaRef ds:uri="a4f35948-e619-41b3-aa29-22878b09cfd2"/>
-    <ds:schemaRef ds:uri="http://purl.org/dc/terms/"/>
-  </ds:schemaRefs>
-</ds:datastoreItem>
-</file>
-
-<file path=customXml/itemProps3.xml><?xml version="1.0" encoding="utf-8"?>
-<ds:datastoreItem xmlns:ds="http://schemas.openxmlformats.org/officeDocument/2006/customXml" ds:itemID="{7F9B8BCC-BF24-4800-92E1-9F891BBB27E6}">
-  <ds:schemaRefs>
-    <ds:schemaRef ds:uri="http://schemas.microsoft.com/sharepoint/v3/contenttype/forms"/>
-  </ds:schemaRefs>
-</ds:datastoreItem>
 </file>
--- a/4_Hypothesis Testing.pptx
+++ b/4_Hypothesis Testing.pptx
@@ -5,10 +5,10 @@
     <p:sldMasterId id="2147483648" r:id="rId4"/>
   </p:sldMasterIdLst>
   <p:notesMasterIdLst>
-    <p:notesMasterId r:id="rId20"/>
+    <p:notesMasterId r:id="rId21"/>
   </p:notesMasterIdLst>
   <p:handoutMasterIdLst>
-    <p:handoutMasterId r:id="rId21"/>
+    <p:handoutMasterId r:id="rId22"/>
   </p:handoutMasterIdLst>
   <p:sldIdLst>
     <p:sldId id="256" r:id="rId5"/>
@@ -26,6 +26,7 @@
     <p:sldId id="278" r:id="rId17"/>
     <p:sldId id="279" r:id="rId18"/>
     <p:sldId id="280" r:id="rId19"/>
+    <p:sldId id="365" r:id="rId20"/>
   </p:sldIdLst>
   <p:sldSz cx="12188825" cy="6858000"/>
   <p:notesSz cx="6858000" cy="9144000"/>
@@ -1320,6 +1321,115 @@
     <p:extLst>
       <p:ext uri="{BB962C8B-B14F-4D97-AF65-F5344CB8AC3E}">
         <p14:creationId xmlns:p14="http://schemas.microsoft.com/office/powerpoint/2010/main" val="1195164198"/>
+      </p:ext>
+    </p:extLst>
+  </p:cSld>
+  <p:clrMapOvr>
+    <a:masterClrMapping/>
+  </p:clrMapOvr>
+</p:notes>
+</file>
+
+<file path=ppt/notesSlides/notesSlide16.xml><?xml version="1.0" encoding="utf-8"?>
+<p:notes xmlns:a="http://schemas.openxmlformats.org/drawingml/2006/main" xmlns:r="http://schemas.openxmlformats.org/officeDocument/2006/relationships" xmlns:p="http://schemas.openxmlformats.org/presentationml/2006/main">
+  <p:cSld>
+    <p:spTree>
+      <p:nvGrpSpPr>
+        <p:cNvPr id="1" name="">
+          <a:extLst>
+            <a:ext uri="{FF2B5EF4-FFF2-40B4-BE49-F238E27FC236}">
+              <a16:creationId xmlns:a16="http://schemas.microsoft.com/office/drawing/2014/main" id="{444758FD-2C12-1255-2213-930ACA98054F}"/>
+            </a:ext>
+          </a:extLst>
+        </p:cNvPr>
+        <p:cNvGrpSpPr/>
+        <p:nvPr/>
+      </p:nvGrpSpPr>
+      <p:grpSpPr>
+        <a:xfrm>
+          <a:off x="0" y="0"/>
+          <a:ext cx="0" cy="0"/>
+          <a:chOff x="0" y="0"/>
+          <a:chExt cx="0" cy="0"/>
+        </a:xfrm>
+      </p:grpSpPr>
+      <p:sp>
+        <p:nvSpPr>
+          <p:cNvPr id="2" name="슬라이드 이미지 개체 틀 1">
+            <a:extLst>
+              <a:ext uri="{FF2B5EF4-FFF2-40B4-BE49-F238E27FC236}">
+                <a16:creationId xmlns:a16="http://schemas.microsoft.com/office/drawing/2014/main" id="{A391F035-FBFF-018B-062F-FF5CF7C2D2E0}"/>
+              </a:ext>
+            </a:extLst>
+          </p:cNvPr>
+          <p:cNvSpPr>
+            <a:spLocks noGrp="1" noRot="1" noChangeAspect="1"/>
+          </p:cNvSpPr>
+          <p:nvPr>
+            <p:ph type="sldImg"/>
+          </p:nvPr>
+        </p:nvSpPr>
+        <p:spPr/>
+      </p:sp>
+      <p:sp>
+        <p:nvSpPr>
+          <p:cNvPr id="3" name="슬라이드 노트 개체 틀 2">
+            <a:extLst>
+              <a:ext uri="{FF2B5EF4-FFF2-40B4-BE49-F238E27FC236}">
+                <a16:creationId xmlns:a16="http://schemas.microsoft.com/office/drawing/2014/main" id="{0738ECAE-F9D4-7DB5-E691-AFFDA64BFB8A}"/>
+              </a:ext>
+            </a:extLst>
+          </p:cNvPr>
+          <p:cNvSpPr>
+            <a:spLocks noGrp="1"/>
+          </p:cNvSpPr>
+          <p:nvPr>
+            <p:ph type="body" idx="1"/>
+          </p:nvPr>
+        </p:nvSpPr>
+        <p:spPr/>
+        <p:txBody>
+          <a:bodyPr/>
+          <a:lstStyle/>
+          <a:p>
+            <a:endParaRPr lang="ko-KR" altLang="en-US" dirty="0"/>
+          </a:p>
+        </p:txBody>
+      </p:sp>
+      <p:sp>
+        <p:nvSpPr>
+          <p:cNvPr id="4" name="슬라이드 번호 개체 틀 3">
+            <a:extLst>
+              <a:ext uri="{FF2B5EF4-FFF2-40B4-BE49-F238E27FC236}">
+                <a16:creationId xmlns:a16="http://schemas.microsoft.com/office/drawing/2014/main" id="{2C2181B1-B00E-C719-0EF9-5FEAA0355BB7}"/>
+              </a:ext>
+            </a:extLst>
+          </p:cNvPr>
+          <p:cNvSpPr>
+            <a:spLocks noGrp="1"/>
+          </p:cNvSpPr>
+          <p:nvPr>
+            <p:ph type="sldNum" sz="quarter" idx="10"/>
+          </p:nvPr>
+        </p:nvSpPr>
+        <p:spPr/>
+        <p:txBody>
+          <a:bodyPr/>
+          <a:lstStyle/>
+          <a:p>
+            <a:pPr rtl="0"/>
+            <a:fld id="{5FB91549-43BF-425A-AF25-75262019208C}" type="slidenum">
+              <a:rPr lang="en-US" altLang="ko-KR" smtClean="0"/>
+              <a:t>16</a:t>
+            </a:fld>
+            <a:endParaRPr lang="ko-KR" altLang="en-US" dirty="0"/>
+          </a:p>
+        </p:txBody>
+      </p:sp>
+    </p:spTree>
+    <p:extLst>
+      <p:ext uri="{BB962C8B-B14F-4D97-AF65-F5344CB8AC3E}">
+        <p14:creationId xmlns:p14="http://schemas.microsoft.com/office/powerpoint/2010/main" val="1649972782"/>
       </p:ext>
     </p:extLst>
   </p:cSld>
@@ -7031,6 +7141,1090 @@
     <p:extLst>
       <p:ext uri="{BB962C8B-B14F-4D97-AF65-F5344CB8AC3E}">
         <p14:creationId xmlns:p14="http://schemas.microsoft.com/office/powerpoint/2010/main" val="2576092072"/>
+      </p:ext>
+    </p:extLst>
+  </p:cSld>
+  <p:clrMapOvr>
+    <a:masterClrMapping/>
+  </p:clrMapOvr>
+  <mc:AlternateContent xmlns:mc="http://schemas.openxmlformats.org/markup-compatibility/2006" xmlns:p14="http://schemas.microsoft.com/office/powerpoint/2010/main">
+    <mc:Choice Requires="p14">
+      <p:transition spd="med" p14:dur="700">
+        <p:fade/>
+      </p:transition>
+    </mc:Choice>
+    <mc:Fallback xmlns="">
+      <p:transition spd="med">
+        <p:fade/>
+      </p:transition>
+    </mc:Fallback>
+  </mc:AlternateContent>
+</p:sld>
+</file>
+
+<file path=ppt/slides/slide16.xml><?xml version="1.0" encoding="utf-8"?>
+<p:sld xmlns:a="http://schemas.openxmlformats.org/drawingml/2006/main" xmlns:r="http://schemas.openxmlformats.org/officeDocument/2006/relationships" xmlns:p="http://schemas.openxmlformats.org/presentationml/2006/main">
+  <p:cSld>
+    <p:spTree>
+      <p:nvGrpSpPr>
+        <p:cNvPr id="1" name="">
+          <a:extLst>
+            <a:ext uri="{FF2B5EF4-FFF2-40B4-BE49-F238E27FC236}">
+              <a16:creationId xmlns:a16="http://schemas.microsoft.com/office/drawing/2014/main" id="{159EFBF4-C854-8B0C-402B-64EA26703B45}"/>
+            </a:ext>
+          </a:extLst>
+        </p:cNvPr>
+        <p:cNvGrpSpPr/>
+        <p:nvPr/>
+      </p:nvGrpSpPr>
+      <p:grpSpPr>
+        <a:xfrm>
+          <a:off x="0" y="0"/>
+          <a:ext cx="0" cy="0"/>
+          <a:chOff x="0" y="0"/>
+          <a:chExt cx="0" cy="0"/>
+        </a:xfrm>
+      </p:grpSpPr>
+      <p:sp>
+        <p:nvSpPr>
+          <p:cNvPr id="8" name="슬라이드 번호 개체 틀 7">
+            <a:extLst>
+              <a:ext uri="{FF2B5EF4-FFF2-40B4-BE49-F238E27FC236}">
+                <a16:creationId xmlns:a16="http://schemas.microsoft.com/office/drawing/2014/main" id="{AF9FE9E7-8E5C-1FC2-1EE6-F20BF189E252}"/>
+              </a:ext>
+            </a:extLst>
+          </p:cNvPr>
+          <p:cNvSpPr>
+            <a:spLocks noGrp="1"/>
+          </p:cNvSpPr>
+          <p:nvPr>
+            <p:ph type="sldNum" sz="quarter" idx="12"/>
+          </p:nvPr>
+        </p:nvSpPr>
+        <p:spPr/>
+        <p:txBody>
+          <a:bodyPr/>
+          <a:lstStyle/>
+          <a:p>
+            <a:pPr rtl="0"/>
+            <a:fld id="{A3F31473-23EB-4724-8B59-FE6D21D89FA4}" type="slidenum">
+              <a:rPr lang="en-US" altLang="ko-KR" noProof="0" smtClean="0"/>
+              <a:t>16</a:t>
+            </a:fld>
+            <a:endParaRPr lang="en-US" altLang="ko-KR" noProof="0" dirty="0"/>
+          </a:p>
+        </p:txBody>
+      </p:sp>
+      <p:sp>
+        <p:nvSpPr>
+          <p:cNvPr id="3" name="TextBox 2">
+            <a:extLst>
+              <a:ext uri="{FF2B5EF4-FFF2-40B4-BE49-F238E27FC236}">
+                <a16:creationId xmlns:a16="http://schemas.microsoft.com/office/drawing/2014/main" id="{A6FF4407-06FD-C08E-3FB8-E256F08DB85E}"/>
+              </a:ext>
+            </a:extLst>
+          </p:cNvPr>
+          <p:cNvSpPr txBox="1"/>
+          <p:nvPr/>
+        </p:nvSpPr>
+        <p:spPr>
+          <a:xfrm>
+            <a:off x="246509" y="198588"/>
+            <a:ext cx="11191750" cy="660565"/>
+          </a:xfrm>
+          <a:prstGeom prst="rect">
+            <a:avLst/>
+          </a:prstGeom>
+          <a:noFill/>
+        </p:spPr>
+        <p:txBody>
+          <a:bodyPr wrap="square">
+            <a:spAutoFit/>
+          </a:bodyPr>
+          <a:lstStyle/>
+          <a:p>
+            <a:pPr>
+              <a:lnSpc>
+                <a:spcPct val="150000"/>
+              </a:lnSpc>
+            </a:pPr>
+            <a:r>
+              <a:rPr lang="en-US" altLang="ko-KR" sz="2800" dirty="0">
+                <a:latin typeface="한컴 말랑말랑 Bold" panose="020F0803000000000000" pitchFamily="50" charset="-127"/>
+                <a:ea typeface="한컴 말랑말랑 Bold" panose="020F0803000000000000" pitchFamily="50" charset="-127"/>
+              </a:rPr>
+              <a:t>Summary</a:t>
+            </a:r>
+          </a:p>
+        </p:txBody>
+      </p:sp>
+      <p:sp>
+        <p:nvSpPr>
+          <p:cNvPr id="7" name="직사각형 6">
+            <a:extLst>
+              <a:ext uri="{FF2B5EF4-FFF2-40B4-BE49-F238E27FC236}">
+                <a16:creationId xmlns:a16="http://schemas.microsoft.com/office/drawing/2014/main" id="{4EBF83CB-FCBF-055A-5E05-21C631832BD5}"/>
+              </a:ext>
+            </a:extLst>
+          </p:cNvPr>
+          <p:cNvSpPr/>
+          <p:nvPr/>
+        </p:nvSpPr>
+        <p:spPr>
+          <a:xfrm>
+            <a:off x="4870276" y="836712"/>
+            <a:ext cx="1944216" cy="504056"/>
+          </a:xfrm>
+          <a:prstGeom prst="rect">
+            <a:avLst/>
+          </a:prstGeom>
+        </p:spPr>
+        <p:style>
+          <a:lnRef idx="2">
+            <a:schemeClr val="accent1">
+              <a:shade val="15000"/>
+            </a:schemeClr>
+          </a:lnRef>
+          <a:fillRef idx="1">
+            <a:schemeClr val="accent1"/>
+          </a:fillRef>
+          <a:effectRef idx="0">
+            <a:schemeClr val="accent1"/>
+          </a:effectRef>
+          <a:fontRef idx="minor">
+            <a:schemeClr val="lt1"/>
+          </a:fontRef>
+        </p:style>
+        <p:txBody>
+          <a:bodyPr rtlCol="0" anchor="ctr"/>
+          <a:lstStyle/>
+          <a:p>
+            <a:pPr algn="ctr"/>
+            <a:r>
+              <a:rPr lang="ko-KR" altLang="en-US" sz="2400" dirty="0">
+                <a:latin typeface="한컴 말랑말랑 Bold" panose="020F0803000000000000" pitchFamily="50" charset="-127"/>
+                <a:ea typeface="한컴 말랑말랑 Bold" panose="020F0803000000000000" pitchFamily="50" charset="-127"/>
+              </a:rPr>
+              <a:t>통계학</a:t>
+            </a:r>
+            <a:endParaRPr lang="ko-KR" altLang="en-US" sz="3200" dirty="0">
+              <a:latin typeface="한컴 말랑말랑 Bold" panose="020F0803000000000000" pitchFamily="50" charset="-127"/>
+              <a:ea typeface="한컴 말랑말랑 Bold" panose="020F0803000000000000" pitchFamily="50" charset="-127"/>
+            </a:endParaRPr>
+          </a:p>
+        </p:txBody>
+      </p:sp>
+      <p:sp>
+        <p:nvSpPr>
+          <p:cNvPr id="9" name="직사각형 8">
+            <a:extLst>
+              <a:ext uri="{FF2B5EF4-FFF2-40B4-BE49-F238E27FC236}">
+                <a16:creationId xmlns:a16="http://schemas.microsoft.com/office/drawing/2014/main" id="{E79824AE-C6FC-79CD-A30A-40E889349193}"/>
+              </a:ext>
+            </a:extLst>
+          </p:cNvPr>
+          <p:cNvSpPr/>
+          <p:nvPr/>
+        </p:nvSpPr>
+        <p:spPr>
+          <a:xfrm>
+            <a:off x="1413892" y="2420888"/>
+            <a:ext cx="1944216" cy="504056"/>
+          </a:xfrm>
+          <a:prstGeom prst="rect">
+            <a:avLst/>
+          </a:prstGeom>
+        </p:spPr>
+        <p:style>
+          <a:lnRef idx="2">
+            <a:schemeClr val="accent1">
+              <a:shade val="15000"/>
+            </a:schemeClr>
+          </a:lnRef>
+          <a:fillRef idx="1">
+            <a:schemeClr val="accent1"/>
+          </a:fillRef>
+          <a:effectRef idx="0">
+            <a:schemeClr val="accent1"/>
+          </a:effectRef>
+          <a:fontRef idx="minor">
+            <a:schemeClr val="lt1"/>
+          </a:fontRef>
+        </p:style>
+        <p:txBody>
+          <a:bodyPr rtlCol="0" anchor="ctr"/>
+          <a:lstStyle/>
+          <a:p>
+            <a:pPr algn="ctr"/>
+            <a:r>
+              <a:rPr lang="ko-KR" altLang="en-US" sz="2400" dirty="0">
+                <a:latin typeface="한컴 말랑말랑 Bold" panose="020F0803000000000000" pitchFamily="50" charset="-127"/>
+                <a:ea typeface="한컴 말랑말랑 Bold" panose="020F0803000000000000" pitchFamily="50" charset="-127"/>
+              </a:rPr>
+              <a:t>기술통계</a:t>
+            </a:r>
+            <a:endParaRPr lang="ko-KR" altLang="en-US" sz="3200" dirty="0">
+              <a:latin typeface="한컴 말랑말랑 Bold" panose="020F0803000000000000" pitchFamily="50" charset="-127"/>
+              <a:ea typeface="한컴 말랑말랑 Bold" panose="020F0803000000000000" pitchFamily="50" charset="-127"/>
+            </a:endParaRPr>
+          </a:p>
+        </p:txBody>
+      </p:sp>
+      <p:sp>
+        <p:nvSpPr>
+          <p:cNvPr id="10" name="직사각형 9">
+            <a:extLst>
+              <a:ext uri="{FF2B5EF4-FFF2-40B4-BE49-F238E27FC236}">
+                <a16:creationId xmlns:a16="http://schemas.microsoft.com/office/drawing/2014/main" id="{3C41D334-29FF-4873-077B-1CA764FC20AA}"/>
+              </a:ext>
+            </a:extLst>
+          </p:cNvPr>
+          <p:cNvSpPr/>
+          <p:nvPr/>
+        </p:nvSpPr>
+        <p:spPr>
+          <a:xfrm>
+            <a:off x="8398668" y="2420888"/>
+            <a:ext cx="1944216" cy="504056"/>
+          </a:xfrm>
+          <a:prstGeom prst="rect">
+            <a:avLst/>
+          </a:prstGeom>
+        </p:spPr>
+        <p:style>
+          <a:lnRef idx="2">
+            <a:schemeClr val="accent1">
+              <a:shade val="15000"/>
+            </a:schemeClr>
+          </a:lnRef>
+          <a:fillRef idx="1">
+            <a:schemeClr val="accent1"/>
+          </a:fillRef>
+          <a:effectRef idx="0">
+            <a:schemeClr val="accent1"/>
+          </a:effectRef>
+          <a:fontRef idx="minor">
+            <a:schemeClr val="lt1"/>
+          </a:fontRef>
+        </p:style>
+        <p:txBody>
+          <a:bodyPr rtlCol="0" anchor="ctr"/>
+          <a:lstStyle/>
+          <a:p>
+            <a:pPr algn="ctr"/>
+            <a:r>
+              <a:rPr lang="ko-KR" altLang="en-US" sz="2400" dirty="0">
+                <a:latin typeface="한컴 말랑말랑 Bold" panose="020F0803000000000000" pitchFamily="50" charset="-127"/>
+                <a:ea typeface="한컴 말랑말랑 Bold" panose="020F0803000000000000" pitchFamily="50" charset="-127"/>
+              </a:rPr>
+              <a:t>추론통계</a:t>
+            </a:r>
+            <a:endParaRPr lang="ko-KR" altLang="en-US" sz="3200" dirty="0">
+              <a:latin typeface="한컴 말랑말랑 Bold" panose="020F0803000000000000" pitchFamily="50" charset="-127"/>
+              <a:ea typeface="한컴 말랑말랑 Bold" panose="020F0803000000000000" pitchFamily="50" charset="-127"/>
+            </a:endParaRPr>
+          </a:p>
+        </p:txBody>
+      </p:sp>
+      <p:sp>
+        <p:nvSpPr>
+          <p:cNvPr id="11" name="직사각형 10">
+            <a:extLst>
+              <a:ext uri="{FF2B5EF4-FFF2-40B4-BE49-F238E27FC236}">
+                <a16:creationId xmlns:a16="http://schemas.microsoft.com/office/drawing/2014/main" id="{C9628176-F633-25A0-F7CB-B44223ECE667}"/>
+              </a:ext>
+            </a:extLst>
+          </p:cNvPr>
+          <p:cNvSpPr/>
+          <p:nvPr/>
+        </p:nvSpPr>
+        <p:spPr>
+          <a:xfrm>
+            <a:off x="9856113" y="4049950"/>
+            <a:ext cx="1944216" cy="504056"/>
+          </a:xfrm>
+          <a:prstGeom prst="rect">
+            <a:avLst/>
+          </a:prstGeom>
+        </p:spPr>
+        <p:style>
+          <a:lnRef idx="2">
+            <a:schemeClr val="accent1">
+              <a:shade val="15000"/>
+            </a:schemeClr>
+          </a:lnRef>
+          <a:fillRef idx="1">
+            <a:schemeClr val="accent1"/>
+          </a:fillRef>
+          <a:effectRef idx="0">
+            <a:schemeClr val="accent1"/>
+          </a:effectRef>
+          <a:fontRef idx="minor">
+            <a:schemeClr val="lt1"/>
+          </a:fontRef>
+        </p:style>
+        <p:txBody>
+          <a:bodyPr rtlCol="0" anchor="ctr"/>
+          <a:lstStyle/>
+          <a:p>
+            <a:pPr algn="ctr"/>
+            <a:r>
+              <a:rPr lang="ko-KR" altLang="en-US" sz="2000" dirty="0">
+                <a:latin typeface="한컴 말랑말랑 Bold" panose="020F0803000000000000" pitchFamily="50" charset="-127"/>
+                <a:ea typeface="한컴 말랑말랑 Bold" panose="020F0803000000000000" pitchFamily="50" charset="-127"/>
+              </a:rPr>
+              <a:t>가설검정</a:t>
+            </a:r>
+            <a:endParaRPr lang="ko-KR" altLang="en-US" sz="2800" dirty="0">
+              <a:latin typeface="한컴 말랑말랑 Bold" panose="020F0803000000000000" pitchFamily="50" charset="-127"/>
+              <a:ea typeface="한컴 말랑말랑 Bold" panose="020F0803000000000000" pitchFamily="50" charset="-127"/>
+            </a:endParaRPr>
+          </a:p>
+        </p:txBody>
+      </p:sp>
+      <p:sp>
+        <p:nvSpPr>
+          <p:cNvPr id="12" name="직사각형 11">
+            <a:extLst>
+              <a:ext uri="{FF2B5EF4-FFF2-40B4-BE49-F238E27FC236}">
+                <a16:creationId xmlns:a16="http://schemas.microsoft.com/office/drawing/2014/main" id="{2B4138A7-8A11-225A-36D5-14E270727BAE}"/>
+              </a:ext>
+            </a:extLst>
+          </p:cNvPr>
+          <p:cNvSpPr/>
+          <p:nvPr/>
+        </p:nvSpPr>
+        <p:spPr>
+          <a:xfrm>
+            <a:off x="6526460" y="4049950"/>
+            <a:ext cx="1944216" cy="504056"/>
+          </a:xfrm>
+          <a:prstGeom prst="rect">
+            <a:avLst/>
+          </a:prstGeom>
+        </p:spPr>
+        <p:style>
+          <a:lnRef idx="2">
+            <a:schemeClr val="accent1">
+              <a:shade val="15000"/>
+            </a:schemeClr>
+          </a:lnRef>
+          <a:fillRef idx="1">
+            <a:schemeClr val="accent1"/>
+          </a:fillRef>
+          <a:effectRef idx="0">
+            <a:schemeClr val="accent1"/>
+          </a:effectRef>
+          <a:fontRef idx="minor">
+            <a:schemeClr val="lt1"/>
+          </a:fontRef>
+        </p:style>
+        <p:txBody>
+          <a:bodyPr rtlCol="0" anchor="ctr"/>
+          <a:lstStyle/>
+          <a:p>
+            <a:pPr algn="ctr"/>
+            <a:r>
+              <a:rPr lang="ko-KR" altLang="en-US" sz="2000" dirty="0">
+                <a:latin typeface="한컴 말랑말랑 Bold" panose="020F0803000000000000" pitchFamily="50" charset="-127"/>
+                <a:ea typeface="한컴 말랑말랑 Bold" panose="020F0803000000000000" pitchFamily="50" charset="-127"/>
+              </a:rPr>
+              <a:t>추정</a:t>
+            </a:r>
+            <a:endParaRPr lang="ko-KR" altLang="en-US" sz="2800" dirty="0">
+              <a:latin typeface="한컴 말랑말랑 Bold" panose="020F0803000000000000" pitchFamily="50" charset="-127"/>
+              <a:ea typeface="한컴 말랑말랑 Bold" panose="020F0803000000000000" pitchFamily="50" charset="-127"/>
+            </a:endParaRPr>
+          </a:p>
+        </p:txBody>
+      </p:sp>
+      <p:sp>
+        <p:nvSpPr>
+          <p:cNvPr id="13" name="직사각형 12">
+            <a:extLst>
+              <a:ext uri="{FF2B5EF4-FFF2-40B4-BE49-F238E27FC236}">
+                <a16:creationId xmlns:a16="http://schemas.microsoft.com/office/drawing/2014/main" id="{0DC9EE40-F079-ED83-22D5-957CBE13B387}"/>
+              </a:ext>
+            </a:extLst>
+          </p:cNvPr>
+          <p:cNvSpPr/>
+          <p:nvPr/>
+        </p:nvSpPr>
+        <p:spPr>
+          <a:xfrm>
+            <a:off x="5215061" y="5517232"/>
+            <a:ext cx="1944216" cy="504056"/>
+          </a:xfrm>
+          <a:prstGeom prst="rect">
+            <a:avLst/>
+          </a:prstGeom>
+        </p:spPr>
+        <p:style>
+          <a:lnRef idx="2">
+            <a:schemeClr val="accent1">
+              <a:shade val="15000"/>
+            </a:schemeClr>
+          </a:lnRef>
+          <a:fillRef idx="1">
+            <a:schemeClr val="accent1"/>
+          </a:fillRef>
+          <a:effectRef idx="0">
+            <a:schemeClr val="accent1"/>
+          </a:effectRef>
+          <a:fontRef idx="minor">
+            <a:schemeClr val="lt1"/>
+          </a:fontRef>
+        </p:style>
+        <p:txBody>
+          <a:bodyPr rtlCol="0" anchor="ctr"/>
+          <a:lstStyle/>
+          <a:p>
+            <a:pPr algn="ctr"/>
+            <a:r>
+              <a:rPr lang="ko-KR" altLang="en-US">
+                <a:latin typeface="한컴 말랑말랑 Bold" panose="020F0803000000000000" pitchFamily="50" charset="-127"/>
+                <a:ea typeface="한컴 말랑말랑 Bold" panose="020F0803000000000000" pitchFamily="50" charset="-127"/>
+              </a:rPr>
+              <a:t>점 추정</a:t>
+            </a:r>
+            <a:endParaRPr lang="ko-KR" altLang="en-US" sz="2400" dirty="0">
+              <a:latin typeface="한컴 말랑말랑 Bold" panose="020F0803000000000000" pitchFamily="50" charset="-127"/>
+              <a:ea typeface="한컴 말랑말랑 Bold" panose="020F0803000000000000" pitchFamily="50" charset="-127"/>
+            </a:endParaRPr>
+          </a:p>
+        </p:txBody>
+      </p:sp>
+      <p:sp>
+        <p:nvSpPr>
+          <p:cNvPr id="14" name="직사각형 13">
+            <a:extLst>
+              <a:ext uri="{FF2B5EF4-FFF2-40B4-BE49-F238E27FC236}">
+                <a16:creationId xmlns:a16="http://schemas.microsoft.com/office/drawing/2014/main" id="{D97FCA7F-CA07-F0BA-17EE-A0120E977AEE}"/>
+              </a:ext>
+            </a:extLst>
+          </p:cNvPr>
+          <p:cNvSpPr/>
+          <p:nvPr/>
+        </p:nvSpPr>
+        <p:spPr>
+          <a:xfrm>
+            <a:off x="7678588" y="5517232"/>
+            <a:ext cx="1944216" cy="504056"/>
+          </a:xfrm>
+          <a:prstGeom prst="rect">
+            <a:avLst/>
+          </a:prstGeom>
+        </p:spPr>
+        <p:style>
+          <a:lnRef idx="2">
+            <a:schemeClr val="accent1">
+              <a:shade val="15000"/>
+            </a:schemeClr>
+          </a:lnRef>
+          <a:fillRef idx="1">
+            <a:schemeClr val="accent1"/>
+          </a:fillRef>
+          <a:effectRef idx="0">
+            <a:schemeClr val="accent1"/>
+          </a:effectRef>
+          <a:fontRef idx="minor">
+            <a:schemeClr val="lt1"/>
+          </a:fontRef>
+        </p:style>
+        <p:txBody>
+          <a:bodyPr rtlCol="0" anchor="ctr"/>
+          <a:lstStyle/>
+          <a:p>
+            <a:pPr algn="ctr"/>
+            <a:r>
+              <a:rPr lang="ko-KR" altLang="en-US" dirty="0">
+                <a:latin typeface="한컴 말랑말랑 Bold" panose="020F0803000000000000" pitchFamily="50" charset="-127"/>
+                <a:ea typeface="한컴 말랑말랑 Bold" panose="020F0803000000000000" pitchFamily="50" charset="-127"/>
+              </a:rPr>
+              <a:t>구간 추정</a:t>
+            </a:r>
+            <a:endParaRPr lang="ko-KR" altLang="en-US" sz="2400" dirty="0">
+              <a:latin typeface="한컴 말랑말랑 Bold" panose="020F0803000000000000" pitchFamily="50" charset="-127"/>
+              <a:ea typeface="한컴 말랑말랑 Bold" panose="020F0803000000000000" pitchFamily="50" charset="-127"/>
+            </a:endParaRPr>
+          </a:p>
+        </p:txBody>
+      </p:sp>
+      <p:cxnSp>
+        <p:nvCxnSpPr>
+          <p:cNvPr id="16" name="연결선: 꺾임 15">
+            <a:extLst>
+              <a:ext uri="{FF2B5EF4-FFF2-40B4-BE49-F238E27FC236}">
+                <a16:creationId xmlns:a16="http://schemas.microsoft.com/office/drawing/2014/main" id="{79974693-FA6C-1B23-6CAE-B0D257ECD77F}"/>
+              </a:ext>
+            </a:extLst>
+          </p:cNvPr>
+          <p:cNvCxnSpPr>
+            <a:stCxn id="7" idx="2"/>
+            <a:endCxn id="9" idx="0"/>
+          </p:cNvCxnSpPr>
+          <p:nvPr/>
+        </p:nvCxnSpPr>
+        <p:spPr>
+          <a:xfrm rot="5400000">
+            <a:off x="3574132" y="152636"/>
+            <a:ext cx="1080120" cy="3456384"/>
+          </a:xfrm>
+          <a:prstGeom prst="bentConnector3">
+            <a:avLst/>
+          </a:prstGeom>
+        </p:spPr>
+        <p:style>
+          <a:lnRef idx="3">
+            <a:schemeClr val="dk1"/>
+          </a:lnRef>
+          <a:fillRef idx="0">
+            <a:schemeClr val="dk1"/>
+          </a:fillRef>
+          <a:effectRef idx="2">
+            <a:schemeClr val="dk1"/>
+          </a:effectRef>
+          <a:fontRef idx="minor">
+            <a:schemeClr val="tx1"/>
+          </a:fontRef>
+        </p:style>
+      </p:cxnSp>
+      <p:cxnSp>
+        <p:nvCxnSpPr>
+          <p:cNvPr id="17" name="연결선: 꺾임 16">
+            <a:extLst>
+              <a:ext uri="{FF2B5EF4-FFF2-40B4-BE49-F238E27FC236}">
+                <a16:creationId xmlns:a16="http://schemas.microsoft.com/office/drawing/2014/main" id="{8C593572-D7B4-2E80-44D4-089E8626D8F4}"/>
+              </a:ext>
+            </a:extLst>
+          </p:cNvPr>
+          <p:cNvCxnSpPr>
+            <a:cxnSpLocks/>
+            <a:stCxn id="7" idx="2"/>
+            <a:endCxn id="10" idx="0"/>
+          </p:cNvCxnSpPr>
+          <p:nvPr/>
+        </p:nvCxnSpPr>
+        <p:spPr>
+          <a:xfrm rot="16200000" flipH="1">
+            <a:off x="7066520" y="116632"/>
+            <a:ext cx="1080120" cy="3528392"/>
+          </a:xfrm>
+          <a:prstGeom prst="bentConnector3">
+            <a:avLst>
+              <a:gd name="adj1" fmla="val 50000"/>
+            </a:avLst>
+          </a:prstGeom>
+        </p:spPr>
+        <p:style>
+          <a:lnRef idx="3">
+            <a:schemeClr val="dk1"/>
+          </a:lnRef>
+          <a:fillRef idx="0">
+            <a:schemeClr val="dk1"/>
+          </a:fillRef>
+          <a:effectRef idx="2">
+            <a:schemeClr val="dk1"/>
+          </a:effectRef>
+          <a:fontRef idx="minor">
+            <a:schemeClr val="tx1"/>
+          </a:fontRef>
+        </p:style>
+      </p:cxnSp>
+      <p:cxnSp>
+        <p:nvCxnSpPr>
+          <p:cNvPr id="20" name="연결선: 꺾임 19">
+            <a:extLst>
+              <a:ext uri="{FF2B5EF4-FFF2-40B4-BE49-F238E27FC236}">
+                <a16:creationId xmlns:a16="http://schemas.microsoft.com/office/drawing/2014/main" id="{4895DAF6-3C2C-DE41-F201-F449A30C8BC2}"/>
+              </a:ext>
+            </a:extLst>
+          </p:cNvPr>
+          <p:cNvCxnSpPr>
+            <a:cxnSpLocks/>
+            <a:stCxn id="10" idx="2"/>
+            <a:endCxn id="12" idx="0"/>
+          </p:cNvCxnSpPr>
+          <p:nvPr/>
+        </p:nvCxnSpPr>
+        <p:spPr>
+          <a:xfrm rot="5400000">
+            <a:off x="7872169" y="2551343"/>
+            <a:ext cx="1125006" cy="1872208"/>
+          </a:xfrm>
+          <a:prstGeom prst="bentConnector3">
+            <a:avLst>
+              <a:gd name="adj1" fmla="val 50000"/>
+            </a:avLst>
+          </a:prstGeom>
+        </p:spPr>
+        <p:style>
+          <a:lnRef idx="3">
+            <a:schemeClr val="dk1"/>
+          </a:lnRef>
+          <a:fillRef idx="0">
+            <a:schemeClr val="dk1"/>
+          </a:fillRef>
+          <a:effectRef idx="2">
+            <a:schemeClr val="dk1"/>
+          </a:effectRef>
+          <a:fontRef idx="minor">
+            <a:schemeClr val="tx1"/>
+          </a:fontRef>
+        </p:style>
+      </p:cxnSp>
+      <p:cxnSp>
+        <p:nvCxnSpPr>
+          <p:cNvPr id="21" name="연결선: 꺾임 20">
+            <a:extLst>
+              <a:ext uri="{FF2B5EF4-FFF2-40B4-BE49-F238E27FC236}">
+                <a16:creationId xmlns:a16="http://schemas.microsoft.com/office/drawing/2014/main" id="{80DFB1D7-9D5F-44C8-960C-163848C3219C}"/>
+              </a:ext>
+            </a:extLst>
+          </p:cNvPr>
+          <p:cNvCxnSpPr>
+            <a:cxnSpLocks/>
+            <a:stCxn id="10" idx="2"/>
+            <a:endCxn id="11" idx="0"/>
+          </p:cNvCxnSpPr>
+          <p:nvPr/>
+        </p:nvCxnSpPr>
+        <p:spPr>
+          <a:xfrm rot="16200000" flipH="1">
+            <a:off x="9536995" y="2758724"/>
+            <a:ext cx="1125006" cy="1457445"/>
+          </a:xfrm>
+          <a:prstGeom prst="bentConnector3">
+            <a:avLst>
+              <a:gd name="adj1" fmla="val 50000"/>
+            </a:avLst>
+          </a:prstGeom>
+        </p:spPr>
+        <p:style>
+          <a:lnRef idx="3">
+            <a:schemeClr val="dk1"/>
+          </a:lnRef>
+          <a:fillRef idx="0">
+            <a:schemeClr val="dk1"/>
+          </a:fillRef>
+          <a:effectRef idx="2">
+            <a:schemeClr val="dk1"/>
+          </a:effectRef>
+          <a:fontRef idx="minor">
+            <a:schemeClr val="tx1"/>
+          </a:fontRef>
+        </p:style>
+      </p:cxnSp>
+      <p:cxnSp>
+        <p:nvCxnSpPr>
+          <p:cNvPr id="27" name="연결선: 꺾임 26">
+            <a:extLst>
+              <a:ext uri="{FF2B5EF4-FFF2-40B4-BE49-F238E27FC236}">
+                <a16:creationId xmlns:a16="http://schemas.microsoft.com/office/drawing/2014/main" id="{770B1B04-1989-43E7-958B-11AB127AA072}"/>
+              </a:ext>
+            </a:extLst>
+          </p:cNvPr>
+          <p:cNvCxnSpPr>
+            <a:cxnSpLocks/>
+            <a:stCxn id="12" idx="2"/>
+            <a:endCxn id="13" idx="0"/>
+          </p:cNvCxnSpPr>
+          <p:nvPr/>
+        </p:nvCxnSpPr>
+        <p:spPr>
+          <a:xfrm rot="5400000">
+            <a:off x="6361256" y="4379920"/>
+            <a:ext cx="963226" cy="1311399"/>
+          </a:xfrm>
+          <a:prstGeom prst="bentConnector3">
+            <a:avLst>
+              <a:gd name="adj1" fmla="val 50000"/>
+            </a:avLst>
+          </a:prstGeom>
+        </p:spPr>
+        <p:style>
+          <a:lnRef idx="3">
+            <a:schemeClr val="dk1"/>
+          </a:lnRef>
+          <a:fillRef idx="0">
+            <a:schemeClr val="dk1"/>
+          </a:fillRef>
+          <a:effectRef idx="2">
+            <a:schemeClr val="dk1"/>
+          </a:effectRef>
+          <a:fontRef idx="minor">
+            <a:schemeClr val="tx1"/>
+          </a:fontRef>
+        </p:style>
+      </p:cxnSp>
+      <p:cxnSp>
+        <p:nvCxnSpPr>
+          <p:cNvPr id="28" name="연결선: 꺾임 27">
+            <a:extLst>
+              <a:ext uri="{FF2B5EF4-FFF2-40B4-BE49-F238E27FC236}">
+                <a16:creationId xmlns:a16="http://schemas.microsoft.com/office/drawing/2014/main" id="{36C17717-5923-BF72-668E-9BBB810AE42C}"/>
+              </a:ext>
+            </a:extLst>
+          </p:cNvPr>
+          <p:cNvCxnSpPr>
+            <a:cxnSpLocks/>
+            <a:stCxn id="12" idx="2"/>
+            <a:endCxn id="14" idx="0"/>
+          </p:cNvCxnSpPr>
+          <p:nvPr/>
+        </p:nvCxnSpPr>
+        <p:spPr>
+          <a:xfrm rot="16200000" flipH="1">
+            <a:off x="7593019" y="4459555"/>
+            <a:ext cx="963226" cy="1152128"/>
+          </a:xfrm>
+          <a:prstGeom prst="bentConnector3">
+            <a:avLst>
+              <a:gd name="adj1" fmla="val 50000"/>
+            </a:avLst>
+          </a:prstGeom>
+        </p:spPr>
+        <p:style>
+          <a:lnRef idx="3">
+            <a:schemeClr val="dk1"/>
+          </a:lnRef>
+          <a:fillRef idx="0">
+            <a:schemeClr val="dk1"/>
+          </a:fillRef>
+          <a:effectRef idx="2">
+            <a:schemeClr val="dk1"/>
+          </a:effectRef>
+          <a:fontRef idx="minor">
+            <a:schemeClr val="tx1"/>
+          </a:fontRef>
+        </p:style>
+      </p:cxnSp>
+      <p:sp>
+        <p:nvSpPr>
+          <p:cNvPr id="33" name="TextBox 32">
+            <a:extLst>
+              <a:ext uri="{FF2B5EF4-FFF2-40B4-BE49-F238E27FC236}">
+                <a16:creationId xmlns:a16="http://schemas.microsoft.com/office/drawing/2014/main" id="{CF455240-824F-1FFC-FDF1-FF857BFE6523}"/>
+              </a:ext>
+            </a:extLst>
+          </p:cNvPr>
+          <p:cNvSpPr txBox="1"/>
+          <p:nvPr/>
+        </p:nvSpPr>
+        <p:spPr>
+          <a:xfrm>
+            <a:off x="1256042" y="3362479"/>
+            <a:ext cx="2076209" cy="1169551"/>
+          </a:xfrm>
+          <a:prstGeom prst="rect">
+            <a:avLst/>
+          </a:prstGeom>
+          <a:noFill/>
+        </p:spPr>
+        <p:txBody>
+          <a:bodyPr wrap="none" rtlCol="0">
+            <a:spAutoFit/>
+          </a:bodyPr>
+          <a:lstStyle/>
+          <a:p>
+            <a:pPr marL="285750" indent="-285750">
+              <a:buFont typeface="Wingdings" panose="05000000000000000000" pitchFamily="2" charset="2"/>
+              <a:buChar char="§"/>
+            </a:pPr>
+            <a:r>
+              <a:rPr lang="ko-KR" altLang="en-US" sz="1400" dirty="0"/>
+              <a:t>모집단과</a:t>
+            </a:r>
+            <a:r>
+              <a:rPr lang="en-US" altLang="ko-KR" sz="1400" dirty="0"/>
+              <a:t> </a:t>
+            </a:r>
+            <a:r>
+              <a:rPr lang="ko-KR" altLang="en-US" sz="1400" dirty="0"/>
+              <a:t>표본</a:t>
+            </a:r>
+            <a:r>
+              <a:rPr lang="en-US" altLang="ko-KR" sz="1400" dirty="0"/>
+              <a:t> </a:t>
+            </a:r>
+          </a:p>
+          <a:p>
+            <a:pPr marL="285750" indent="-285750">
+              <a:buFont typeface="Wingdings" panose="05000000000000000000" pitchFamily="2" charset="2"/>
+              <a:buChar char="§"/>
+            </a:pPr>
+            <a:r>
+              <a:rPr lang="ko-KR" altLang="en-US" sz="1400" dirty="0"/>
+              <a:t>평균</a:t>
+            </a:r>
+            <a:r>
+              <a:rPr lang="en-US" altLang="ko-KR" sz="1400" dirty="0"/>
+              <a:t>, </a:t>
+            </a:r>
+            <a:r>
+              <a:rPr lang="ko-KR" altLang="en-US" sz="1400" dirty="0"/>
+              <a:t>분산</a:t>
+            </a:r>
+            <a:r>
+              <a:rPr lang="en-US" altLang="ko-KR" sz="1400" dirty="0"/>
+              <a:t>, </a:t>
+            </a:r>
+            <a:r>
+              <a:rPr lang="ko-KR" altLang="en-US" sz="1400" dirty="0"/>
+              <a:t>표준편차</a:t>
+            </a:r>
+            <a:endParaRPr lang="en-US" altLang="ko-KR" sz="1400" dirty="0"/>
+          </a:p>
+          <a:p>
+            <a:pPr marL="285750" indent="-285750">
+              <a:buFont typeface="Wingdings" panose="05000000000000000000" pitchFamily="2" charset="2"/>
+              <a:buChar char="§"/>
+            </a:pPr>
+            <a:r>
+              <a:rPr lang="ko-KR" altLang="en-US" sz="1400" dirty="0"/>
+              <a:t>기술 통계량</a:t>
+            </a:r>
+            <a:endParaRPr lang="en-US" altLang="ko-KR" sz="1400" dirty="0"/>
+          </a:p>
+          <a:p>
+            <a:pPr marL="285750" indent="-285750">
+              <a:buFont typeface="Wingdings" panose="05000000000000000000" pitchFamily="2" charset="2"/>
+              <a:buChar char="§"/>
+            </a:pPr>
+            <a:r>
+              <a:rPr lang="ko-KR" altLang="en-US" sz="1400" dirty="0"/>
+              <a:t>히스토그램</a:t>
+            </a:r>
+            <a:r>
+              <a:rPr lang="en-US" altLang="ko-KR" sz="1400" dirty="0"/>
+              <a:t>. </a:t>
+            </a:r>
+            <a:r>
+              <a:rPr lang="ko-KR" altLang="en-US" sz="1400" dirty="0"/>
+              <a:t>산포도</a:t>
+            </a:r>
+            <a:endParaRPr lang="en-US" altLang="ko-KR" sz="1400" dirty="0"/>
+          </a:p>
+          <a:p>
+            <a:pPr marL="285750" indent="-285750">
+              <a:buFont typeface="Wingdings" panose="05000000000000000000" pitchFamily="2" charset="2"/>
+              <a:buChar char="§"/>
+            </a:pPr>
+            <a:r>
+              <a:rPr lang="ko-KR" altLang="en-US" sz="1400" dirty="0"/>
+              <a:t>상관관계</a:t>
+            </a:r>
+            <a:r>
+              <a:rPr lang="en-US" altLang="ko-KR" sz="1400" dirty="0"/>
+              <a:t>, </a:t>
+            </a:r>
+            <a:r>
+              <a:rPr lang="ko-KR" altLang="en-US" sz="1400" dirty="0"/>
+              <a:t>공분산</a:t>
+            </a:r>
+          </a:p>
+        </p:txBody>
+      </p:sp>
+      <p:cxnSp>
+        <p:nvCxnSpPr>
+          <p:cNvPr id="36" name="직선 화살표 연결선 35">
+            <a:extLst>
+              <a:ext uri="{FF2B5EF4-FFF2-40B4-BE49-F238E27FC236}">
+                <a16:creationId xmlns:a16="http://schemas.microsoft.com/office/drawing/2014/main" id="{FA5CDD18-9280-6EB1-D8BD-A56DE168DF14}"/>
+              </a:ext>
+            </a:extLst>
+          </p:cNvPr>
+          <p:cNvCxnSpPr>
+            <a:cxnSpLocks/>
+            <a:stCxn id="9" idx="3"/>
+            <a:endCxn id="10" idx="1"/>
+          </p:cNvCxnSpPr>
+          <p:nvPr/>
+        </p:nvCxnSpPr>
+        <p:spPr>
+          <a:xfrm>
+            <a:off x="3358108" y="2672916"/>
+            <a:ext cx="5040560" cy="0"/>
+          </a:xfrm>
+          <a:prstGeom prst="straightConnector1">
+            <a:avLst/>
+          </a:prstGeom>
+          <a:ln>
+            <a:tailEnd type="triangle"/>
+          </a:ln>
+        </p:spPr>
+        <p:style>
+          <a:lnRef idx="1">
+            <a:schemeClr val="accent1"/>
+          </a:lnRef>
+          <a:fillRef idx="0">
+            <a:schemeClr val="accent1"/>
+          </a:fillRef>
+          <a:effectRef idx="0">
+            <a:schemeClr val="accent1"/>
+          </a:effectRef>
+          <a:fontRef idx="minor">
+            <a:schemeClr val="tx1"/>
+          </a:fontRef>
+        </p:style>
+      </p:cxnSp>
+      <p:sp>
+        <p:nvSpPr>
+          <p:cNvPr id="34" name="직사각형 33">
+            <a:extLst>
+              <a:ext uri="{FF2B5EF4-FFF2-40B4-BE49-F238E27FC236}">
+                <a16:creationId xmlns:a16="http://schemas.microsoft.com/office/drawing/2014/main" id="{ED5A98A7-C86E-3D41-319D-BA1E4ECEC36E}"/>
+              </a:ext>
+            </a:extLst>
+          </p:cNvPr>
+          <p:cNvSpPr/>
+          <p:nvPr/>
+        </p:nvSpPr>
+        <p:spPr>
+          <a:xfrm>
+            <a:off x="4894706" y="2420887"/>
+            <a:ext cx="1944216" cy="504056"/>
+          </a:xfrm>
+          <a:prstGeom prst="rect">
+            <a:avLst/>
+          </a:prstGeom>
+          <a:solidFill>
+            <a:srgbClr val="C00000"/>
+          </a:solidFill>
+        </p:spPr>
+        <p:style>
+          <a:lnRef idx="2">
+            <a:schemeClr val="accent1">
+              <a:shade val="15000"/>
+            </a:schemeClr>
+          </a:lnRef>
+          <a:fillRef idx="1">
+            <a:schemeClr val="accent1"/>
+          </a:fillRef>
+          <a:effectRef idx="0">
+            <a:schemeClr val="accent1"/>
+          </a:effectRef>
+          <a:fontRef idx="minor">
+            <a:schemeClr val="lt1"/>
+          </a:fontRef>
+        </p:style>
+        <p:txBody>
+          <a:bodyPr rtlCol="0" anchor="ctr"/>
+          <a:lstStyle/>
+          <a:p>
+            <a:pPr algn="ctr"/>
+            <a:r>
+              <a:rPr lang="ko-KR" altLang="en-US" sz="2400" dirty="0">
+                <a:latin typeface="한컴 말랑말랑 Bold" panose="020F0803000000000000" pitchFamily="50" charset="-127"/>
+                <a:ea typeface="한컴 말랑말랑 Bold" panose="020F0803000000000000" pitchFamily="50" charset="-127"/>
+              </a:rPr>
+              <a:t>확률론</a:t>
+            </a:r>
+            <a:endParaRPr lang="ko-KR" altLang="en-US" sz="3200" dirty="0">
+              <a:latin typeface="한컴 말랑말랑 Bold" panose="020F0803000000000000" pitchFamily="50" charset="-127"/>
+              <a:ea typeface="한컴 말랑말랑 Bold" panose="020F0803000000000000" pitchFamily="50" charset="-127"/>
+            </a:endParaRPr>
+          </a:p>
+        </p:txBody>
+      </p:sp>
+      <p:sp>
+        <p:nvSpPr>
+          <p:cNvPr id="38" name="TextBox 37">
+            <a:extLst>
+              <a:ext uri="{FF2B5EF4-FFF2-40B4-BE49-F238E27FC236}">
+                <a16:creationId xmlns:a16="http://schemas.microsoft.com/office/drawing/2014/main" id="{0899A9F2-C66D-BE34-1C34-A3E25F200FBA}"/>
+              </a:ext>
+            </a:extLst>
+          </p:cNvPr>
+          <p:cNvSpPr txBox="1"/>
+          <p:nvPr/>
+        </p:nvSpPr>
+        <p:spPr>
+          <a:xfrm>
+            <a:off x="4849771" y="3376616"/>
+            <a:ext cx="1191352" cy="523220"/>
+          </a:xfrm>
+          <a:prstGeom prst="rect">
+            <a:avLst/>
+          </a:prstGeom>
+          <a:noFill/>
+        </p:spPr>
+        <p:txBody>
+          <a:bodyPr wrap="none" rtlCol="0">
+            <a:spAutoFit/>
+          </a:bodyPr>
+          <a:lstStyle/>
+          <a:p>
+            <a:pPr marL="285750" indent="-285750">
+              <a:buFont typeface="Wingdings" panose="05000000000000000000" pitchFamily="2" charset="2"/>
+              <a:buChar char="§"/>
+            </a:pPr>
+            <a:r>
+              <a:rPr lang="ko-KR" altLang="en-US" sz="1400" dirty="0"/>
+              <a:t>확률변수</a:t>
+            </a:r>
+            <a:endParaRPr lang="en-US" altLang="ko-KR" sz="1400" dirty="0"/>
+          </a:p>
+          <a:p>
+            <a:pPr marL="285750" indent="-285750">
+              <a:buFont typeface="Wingdings" panose="05000000000000000000" pitchFamily="2" charset="2"/>
+              <a:buChar char="§"/>
+            </a:pPr>
+            <a:r>
+              <a:rPr lang="ko-KR" altLang="en-US" sz="1400" dirty="0"/>
+              <a:t>확률분포</a:t>
+            </a:r>
+          </a:p>
+        </p:txBody>
+      </p:sp>
+      <p:sp>
+        <p:nvSpPr>
+          <p:cNvPr id="39" name="TextBox 38">
+            <a:extLst>
+              <a:ext uri="{FF2B5EF4-FFF2-40B4-BE49-F238E27FC236}">
+                <a16:creationId xmlns:a16="http://schemas.microsoft.com/office/drawing/2014/main" id="{0E75F960-897D-8ADD-0748-D5EE85DA9ED1}"/>
+              </a:ext>
+            </a:extLst>
+          </p:cNvPr>
+          <p:cNvSpPr txBox="1"/>
+          <p:nvPr/>
+        </p:nvSpPr>
+        <p:spPr>
+          <a:xfrm>
+            <a:off x="1989956" y="499853"/>
+            <a:ext cx="1316386" cy="307777"/>
+          </a:xfrm>
+          <a:prstGeom prst="rect">
+            <a:avLst/>
+          </a:prstGeom>
+          <a:noFill/>
+        </p:spPr>
+        <p:txBody>
+          <a:bodyPr wrap="none" rtlCol="0">
+            <a:spAutoFit/>
+          </a:bodyPr>
+          <a:lstStyle/>
+          <a:p>
+            <a:r>
+              <a:rPr lang="ko-KR" altLang="en-US" sz="1400" b="1" dirty="0">
+                <a:hlinkClick r:id="rId3">
+                  <a:extLst>
+                    <a:ext uri="{A12FA001-AC4F-418D-AE19-62706E023703}">
+                      <ahyp:hlinkClr xmlns:ahyp="http://schemas.microsoft.com/office/drawing/2018/hyperlinkcolor" val="tx"/>
+                    </a:ext>
+                  </a:extLst>
+                </a:hlinkClick>
+              </a:rPr>
+              <a:t>통계 요약 클릭</a:t>
+            </a:r>
+            <a:endParaRPr lang="ko-KR" altLang="en-US" sz="1400" b="1" dirty="0"/>
+          </a:p>
+        </p:txBody>
+      </p:sp>
+    </p:spTree>
+    <p:extLst>
+      <p:ext uri="{BB962C8B-B14F-4D97-AF65-F5344CB8AC3E}">
+        <p14:creationId xmlns:p14="http://schemas.microsoft.com/office/powerpoint/2010/main" val="3357988805"/>
       </p:ext>
     </p:extLst>
   </p:cSld>
@@ -9651,17 +10845,6 @@
 </file>
 
 <file path=customXml/item2.xml><?xml version="1.0" encoding="utf-8"?>
-<p:properties xmlns:p="http://schemas.microsoft.com/office/2006/metadata/properties" xmlns:xsi="http://www.w3.org/2001/XMLSchema-instance" xmlns:pc="http://schemas.microsoft.com/office/infopath/2007/PartnerControls">
-  <documentManagement>
-    <VSO_x0020_item_x0020_id xmlns="40262f94-9f35-4ac3-9a90-690165a166b7" xsi:nil="true"/>
-    <Assetid_x0020_ xmlns="40262f94-9f35-4ac3-9a90-690165a166b7" xsi:nil="true"/>
-    <Item_x0020_Details xmlns="40262f94-9f35-4ac3-9a90-690165a166b7" xsi:nil="true"/>
-    <Template_x0020_details xmlns="40262f94-9f35-4ac3-9a90-690165a166b7" xsi:nil="true"/>
-  </documentManagement>
-</p:properties>
-</file>
-
-<file path=customXml/item3.xml><?xml version="1.0" encoding="utf-8"?>
 <ct:contentTypeSchema xmlns:ct="http://schemas.microsoft.com/office/2006/metadata/contentType" xmlns:ma="http://schemas.microsoft.com/office/2006/metadata/properties/metaAttributes" ct:_="" ma:_="" ma:contentTypeName="Document" ma:contentTypeID="0x010100AA3F7D94069FF64A86F7DFF56D60E3BE" ma:contentTypeVersion="6" ma:contentTypeDescription="Create a new document." ma:contentTypeScope="" ma:versionID="c32302c77d4085ecf495bdddb7f5e889">
   <xsd:schema xmlns:xsd="http://www.w3.org/2001/XMLSchema" xmlns:xs="http://www.w3.org/2001/XMLSchema" xmlns:p="http://schemas.microsoft.com/office/2006/metadata/properties" xmlns:ns2="a4f35948-e619-41b3-aa29-22878b09cfd2" xmlns:ns3="40262f94-9f35-4ac3-9a90-690165a166b7" targetNamespace="http://schemas.microsoft.com/office/2006/metadata/properties" ma:root="true" ma:fieldsID="4ab5ae46be95f9d0be6107e8200be7a2" ns2:_="" ns3:_="">
     <xsd:import namespace="a4f35948-e619-41b3-aa29-22878b09cfd2"/>
@@ -9842,6 +11025,17 @@
 </ct:contentTypeSchema>
 </file>
 
+<file path=customXml/item3.xml><?xml version="1.0" encoding="utf-8"?>
+<p:properties xmlns:p="http://schemas.microsoft.com/office/2006/metadata/properties" xmlns:xsi="http://www.w3.org/2001/XMLSchema-instance" xmlns:pc="http://schemas.microsoft.com/office/infopath/2007/PartnerControls">
+  <documentManagement>
+    <VSO_x0020_item_x0020_id xmlns="40262f94-9f35-4ac3-9a90-690165a166b7" xsi:nil="true"/>
+    <Assetid_x0020_ xmlns="40262f94-9f35-4ac3-9a90-690165a166b7" xsi:nil="true"/>
+    <Item_x0020_Details xmlns="40262f94-9f35-4ac3-9a90-690165a166b7" xsi:nil="true"/>
+    <Template_x0020_details xmlns="40262f94-9f35-4ac3-9a90-690165a166b7" xsi:nil="true"/>
+  </documentManagement>
+</p:properties>
+</file>
+
 <file path=customXml/itemProps1.xml><?xml version="1.0" encoding="utf-8"?>
 <ds:datastoreItem xmlns:ds="http://schemas.openxmlformats.org/officeDocument/2006/customXml" ds:itemID="{7F9B8BCC-BF24-4800-92E1-9F891BBB27E6}">
   <ds:schemaRefs>
@@ -9851,23 +11045,6 @@
 </file>
 
 <file path=customXml/itemProps2.xml><?xml version="1.0" encoding="utf-8"?>
-<ds:datastoreItem xmlns:ds="http://schemas.openxmlformats.org/officeDocument/2006/customXml" ds:itemID="{50AACE6D-8EB6-447A-8DFD-C2C0C52916AC}">
-  <ds:schemaRefs>
-    <ds:schemaRef ds:uri="http://schemas.openxmlformats.org/package/2006/metadata/core-properties"/>
-    <ds:schemaRef ds:uri="http://purl.org/dc/elements/1.1/"/>
-    <ds:schemaRef ds:uri="http://purl.org/dc/dcmitype/"/>
-    <ds:schemaRef ds:uri="http://schemas.microsoft.com/office/infopath/2007/PartnerControls"/>
-    <ds:schemaRef ds:uri="http://schemas.microsoft.com/office/2006/documentManagement/types"/>
-    <ds:schemaRef ds:uri="http://purl.org/dc/terms/"/>
-    <ds:schemaRef ds:uri="40262f94-9f35-4ac3-9a90-690165a166b7"/>
-    <ds:schemaRef ds:uri="a4f35948-e619-41b3-aa29-22878b09cfd2"/>
-    <ds:schemaRef ds:uri="http://schemas.microsoft.com/office/2006/metadata/properties"/>
-    <ds:schemaRef ds:uri="http://www.w3.org/XML/1998/namespace"/>
-  </ds:schemaRefs>
-</ds:datastoreItem>
-</file>
-
-<file path=customXml/itemProps3.xml><?xml version="1.0" encoding="utf-8"?>
 <ds:datastoreItem xmlns:ds="http://schemas.openxmlformats.org/officeDocument/2006/customXml" ds:itemID="{5CCB2C71-1ED8-4540-B003-293B5E75C71F}">
   <ds:schemaRefs>
     <ds:schemaRef ds:uri="http://schemas.microsoft.com/office/2006/metadata/contentType"/>
@@ -9884,4 +11061,21 @@
     <ds:schemaRef ds:uri="http://schemas.microsoft.com/internal/obd"/>
   </ds:schemaRefs>
 </ds:datastoreItem>
+</file>
+
+<file path=customXml/itemProps3.xml><?xml version="1.0" encoding="utf-8"?>
+<ds:datastoreItem xmlns:ds="http://schemas.openxmlformats.org/officeDocument/2006/customXml" ds:itemID="{50AACE6D-8EB6-447A-8DFD-C2C0C52916AC}">
+  <ds:schemaRefs>
+    <ds:schemaRef ds:uri="http://schemas.openxmlformats.org/package/2006/metadata/core-properties"/>
+    <ds:schemaRef ds:uri="http://purl.org/dc/elements/1.1/"/>
+    <ds:schemaRef ds:uri="http://purl.org/dc/dcmitype/"/>
+    <ds:schemaRef ds:uri="http://schemas.microsoft.com/office/infopath/2007/PartnerControls"/>
+    <ds:schemaRef ds:uri="http://schemas.microsoft.com/office/2006/documentManagement/types"/>
+    <ds:schemaRef ds:uri="http://purl.org/dc/terms/"/>
+    <ds:schemaRef ds:uri="40262f94-9f35-4ac3-9a90-690165a166b7"/>
+    <ds:schemaRef ds:uri="a4f35948-e619-41b3-aa29-22878b09cfd2"/>
+    <ds:schemaRef ds:uri="http://schemas.microsoft.com/office/2006/metadata/properties"/>
+    <ds:schemaRef ds:uri="http://www.w3.org/XML/1998/namespace"/>
+  </ds:schemaRefs>
+</ds:datastoreItem>
 </file>